--- a/Documents/WorkitSA - FNB Hackathon Deck.pptx
+++ b/Documents/WorkitSA - FNB Hackathon Deck.pptx
@@ -6264,119 +6264,6 @@
       </p:sp>
       <p:sp>
         <p:nvSpPr>
-          <p:cNvPr id="7" name="Rounded Rectangle 6"/>
-          <p:cNvSpPr/>
-          <p:nvPr/>
-        </p:nvSpPr>
-        <p:spPr>
-          <a:xfrm>
-            <a:off x="6812280" y="1783080"/>
-            <a:ext cx="4800600" cy="4297680"/>
-          </a:xfrm>
-          <a:prstGeom prst="roundRect">
-            <a:avLst/>
-          </a:prstGeom>
-          <a:solidFill>
-            <a:srgbClr val="FFFFFF"/>
-          </a:solidFill>
-          <a:ln w="19050">
-            <a:solidFill>
-              <a:srgbClr val="F5DBB5"/>
-            </a:solidFill>
-          </a:ln>
-          <a:effectLst/>
-        </p:spPr>
-        <p:style>
-          <a:lnRef idx="1">
-            <a:schemeClr val="accent1"/>
-          </a:lnRef>
-          <a:fillRef idx="3">
-            <a:schemeClr val="accent1"/>
-          </a:fillRef>
-          <a:effectRef idx="2">
-            <a:schemeClr val="accent1"/>
-          </a:effectRef>
-          <a:fontRef idx="minor">
-            <a:schemeClr val="lt1"/>
-          </a:fontRef>
-        </p:style>
-        <p:txBody>
-          <a:bodyPr rtlCol="0" anchor="ctr"/>
-          <a:lstStyle/>
-          <a:p>
-            <a:pPr algn="ctr"/>
-          </a:p>
-        </p:txBody>
-      </p:sp>
-      <p:sp>
-        <p:nvSpPr>
-          <p:cNvPr id="8" name="TextBox 7"/>
-          <p:cNvSpPr txBox="1"/>
-          <p:nvPr/>
-        </p:nvSpPr>
-        <p:spPr>
-          <a:xfrm>
-            <a:off x="6812280" y="3520440"/>
-            <a:ext cx="4800600" cy="822960"/>
-          </a:xfrm>
-          <a:prstGeom prst="rect">
-            <a:avLst/>
-          </a:prstGeom>
-          <a:noFill/>
-        </p:spPr>
-        <p:txBody>
-          <a:bodyPr wrap="square" anchor="ctr">
-            <a:spAutoFit/>
-          </a:bodyPr>
-          <a:lstStyle/>
-          <a:p>
-            <a:pPr algn="ctr">
-              <a:lnSpc>
-                <a:spcPct val="105000"/>
-              </a:lnSpc>
-              <a:spcBef>
-                <a:spcPts val="0"/>
-              </a:spcBef>
-              <a:spcAft>
-                <a:spcPts val="200"/>
-              </a:spcAft>
-            </a:pPr>
-            <a:r>
-              <a:rPr sz="1300" b="1" i="0">
-                <a:solidFill>
-                  <a:srgbClr val="8A7A6A"/>
-                </a:solidFill>
-                <a:latin typeface="Calibri"/>
-              </a:rPr>
-              <a:t>[ SCREENSHOT ]</a:t>
-            </a:r>
-          </a:p>
-          <a:p>
-            <a:pPr algn="ctr">
-              <a:lnSpc>
-                <a:spcPct val="105000"/>
-              </a:lnSpc>
-              <a:spcBef>
-                <a:spcPts val="0"/>
-              </a:spcBef>
-              <a:spcAft>
-                <a:spcPts val="200"/>
-              </a:spcAft>
-            </a:pPr>
-            <a:r>
-              <a:rPr sz="1100" b="0" i="0">
-                <a:solidFill>
-                  <a:srgbClr val="8A7A6A"/>
-                </a:solidFill>
-                <a:latin typeface="Calibri"/>
-              </a:rPr>
-              <a:t>find-work job feed on a phone (workitsa.co.za/find-work)</a:t>
-            </a:r>
-          </a:p>
-        </p:txBody>
-      </p:sp>
-      <p:sp>
-        <p:nvSpPr>
           <p:cNvPr id="9" name="Rounded Rectangle 8"/>
           <p:cNvSpPr/>
           <p:nvPr/>
@@ -6424,6 +6311,69 @@
                 <a:latin typeface="Calibri"/>
               </a:rPr>
               <a:t>Live PWA · Gauteng · low-end Android · en / af / zu</a:t>
+            </a:r>
+          </a:p>
+        </p:txBody>
+      </p:sp>
+      <p:pic>
+        <p:nvPicPr>
+          <p:cNvPr id="10" name="Picture 9" descr="homepage-marketplace.png"/>
+          <p:cNvPicPr>
+            <a:picLocks noChangeAspect="1"/>
+          </p:cNvPicPr>
+          <p:nvPr/>
+        </p:nvPicPr>
+        <p:blipFill>
+          <a:blip r:embed="rId3"/>
+          <a:stretch>
+            <a:fillRect/>
+          </a:stretch>
+        </p:blipFill>
+        <p:spPr>
+          <a:xfrm>
+            <a:off x="6812280" y="2376011"/>
+            <a:ext cx="4800600" cy="2700338"/>
+          </a:xfrm>
+          <a:prstGeom prst="rect">
+            <a:avLst/>
+          </a:prstGeom>
+          <a:ln w="12700">
+            <a:solidFill>
+              <a:srgbClr val="C9BCAF"/>
+            </a:solidFill>
+          </a:ln>
+        </p:spPr>
+      </p:pic>
+      <p:sp>
+        <p:nvSpPr>
+          <p:cNvPr id="11" name="TextBox 10"/>
+          <p:cNvSpPr txBox="1"/>
+          <p:nvPr/>
+        </p:nvSpPr>
+        <p:spPr>
+          <a:xfrm>
+            <a:off x="6812280" y="5186076"/>
+            <a:ext cx="4800600" cy="365760"/>
+          </a:xfrm>
+          <a:prstGeom prst="rect">
+            <a:avLst/>
+          </a:prstGeom>
+          <a:noFill/>
+        </p:spPr>
+        <p:txBody>
+          <a:bodyPr wrap="square">
+            <a:spAutoFit/>
+          </a:bodyPr>
+          <a:lstStyle/>
+          <a:p>
+            <a:pPr algn="ctr"/>
+            <a:r>
+              <a:rPr sz="1100" i="1">
+                <a:solidFill>
+                  <a:srgbClr val="D8CFC4"/>
+                </a:solidFill>
+              </a:rPr>
+              <a:t>Live at workitsa.co.za — real jobs, verified workers</a:t>
             </a:r>
           </a:p>
         </p:txBody>
@@ -8924,7 +8874,7 @@
                 </a:solidFill>
                 <a:latin typeface="Calibri"/>
               </a:rPr>
-              <a:t>Save +27 67 748 2643 and send  JOBS</a:t>
+              <a:t>Shown in the demo video below</a:t>
             </a:r>
           </a:p>
         </p:txBody>
@@ -9594,62 +9544,74 @@
           </a:p>
         </p:txBody>
       </p:sp>
-      <p:sp>
-        <p:nvSpPr>
-          <p:cNvPr id="7" name="Rounded Rectangle 6"/>
-          <p:cNvSpPr/>
-          <p:nvPr/>
-        </p:nvSpPr>
+      <p:pic>
+        <p:nvPicPr>
+          <p:cNvPr id="7" name="Picture 6" descr="s7-pulse.png"/>
+          <p:cNvPicPr>
+            <a:picLocks noChangeAspect="1"/>
+          </p:cNvPicPr>
+          <p:nvPr/>
+        </p:nvPicPr>
+        <p:blipFill>
+          <a:blip r:embed="rId3"/>
+          <a:stretch>
+            <a:fillRect/>
+          </a:stretch>
+        </p:blipFill>
         <p:spPr>
           <a:xfrm>
             <a:off x="6812280" y="1783080"/>
-            <a:ext cx="4800600" cy="4206240"/>
-          </a:xfrm>
-          <a:prstGeom prst="roundRect">
-            <a:avLst/>
-          </a:prstGeom>
-          <a:solidFill>
-            <a:srgbClr val="FFFFFF"/>
-          </a:solidFill>
-          <a:ln w="19050">
+            <a:ext cx="4800600" cy="1549644"/>
+          </a:xfrm>
+          <a:prstGeom prst="rect">
+            <a:avLst/>
+          </a:prstGeom>
+          <a:ln w="12700">
             <a:solidFill>
-              <a:srgbClr val="F5DBB5"/>
+              <a:srgbClr val="C9BCAF"/>
             </a:solidFill>
           </a:ln>
-          <a:effectLst/>
-        </p:spPr>
-        <p:style>
-          <a:lnRef idx="1">
-            <a:schemeClr val="accent1"/>
-          </a:lnRef>
-          <a:fillRef idx="3">
-            <a:schemeClr val="accent1"/>
-          </a:fillRef>
-          <a:effectRef idx="2">
-            <a:schemeClr val="accent1"/>
-          </a:effectRef>
-          <a:fontRef idx="minor">
-            <a:schemeClr val="lt1"/>
-          </a:fontRef>
-        </p:style>
-        <p:txBody>
-          <a:bodyPr rtlCol="0" anchor="ctr"/>
-          <a:lstStyle/>
-          <a:p>
-            <a:pPr algn="ctr"/>
-          </a:p>
-        </p:txBody>
-      </p:sp>
-      <p:sp>
-        <p:nvSpPr>
-          <p:cNvPr id="8" name="TextBox 7"/>
+        </p:spPr>
+      </p:pic>
+      <p:pic>
+        <p:nvPicPr>
+          <p:cNvPr id="8" name="Picture 7" descr="s7-jarvis.png"/>
+          <p:cNvPicPr>
+            <a:picLocks noChangeAspect="1"/>
+          </p:cNvPicPr>
+          <p:nvPr/>
+        </p:nvPicPr>
+        <p:blipFill>
+          <a:blip r:embed="rId4"/>
+          <a:stretch>
+            <a:fillRect/>
+          </a:stretch>
+        </p:blipFill>
+        <p:spPr>
+          <a:xfrm>
+            <a:off x="6812280" y="3424100"/>
+            <a:ext cx="4800600" cy="2571750"/>
+          </a:xfrm>
+          <a:prstGeom prst="rect">
+            <a:avLst/>
+          </a:prstGeom>
+          <a:ln w="12700">
+            <a:solidFill>
+              <a:srgbClr val="C9BCAF"/>
+            </a:solidFill>
+          </a:ln>
+        </p:spPr>
+      </p:pic>
+      <p:sp>
+        <p:nvSpPr>
+          <p:cNvPr id="9" name="TextBox 8"/>
           <p:cNvSpPr txBox="1"/>
           <p:nvPr/>
         </p:nvSpPr>
         <p:spPr>
           <a:xfrm>
-            <a:off x="6812280" y="3474720"/>
-            <a:ext cx="4800600" cy="822960"/>
+            <a:off x="6812280" y="6068543"/>
+            <a:ext cx="4800600" cy="274320"/>
           </a:xfrm>
           <a:prstGeom prst="rect">
             <a:avLst/>
@@ -9657,52 +9619,19 @@
           <a:noFill/>
         </p:spPr>
         <p:txBody>
-          <a:bodyPr wrap="square" anchor="ctr">
+          <a:bodyPr wrap="square">
             <a:spAutoFit/>
           </a:bodyPr>
           <a:lstStyle/>
           <a:p>
-            <a:pPr algn="ctr">
-              <a:lnSpc>
-                <a:spcPct val="105000"/>
-              </a:lnSpc>
-              <a:spcBef>
-                <a:spcPts val="0"/>
-              </a:spcBef>
-              <a:spcAft>
-                <a:spcPts val="200"/>
-              </a:spcAft>
-            </a:pPr>
-            <a:r>
-              <a:rPr sz="1300" b="1" i="0">
-                <a:solidFill>
-                  <a:srgbClr val="8A7A6A"/>
-                </a:solidFill>
-                <a:latin typeface="Calibri"/>
-              </a:rPr>
-              <a:t>[ SCREENSHOT ]</a:t>
-            </a:r>
-          </a:p>
-          <a:p>
-            <a:pPr algn="ctr">
-              <a:lnSpc>
-                <a:spcPct val="105000"/>
-              </a:lnSpc>
-              <a:spcBef>
-                <a:spcPts val="0"/>
-              </a:spcBef>
-              <a:spcAft>
-                <a:spcPts val="200"/>
-              </a:spcAft>
-            </a:pPr>
-            <a:r>
-              <a:rPr sz="1100" b="0" i="0">
-                <a:solidFill>
-                  <a:srgbClr val="8A7A6A"/>
-                </a:solidFill>
-                <a:latin typeface="Calibri"/>
-              </a:rPr>
-              <a:t>Live Pulse heatmap + Jarvis chat (/admin)</a:t>
+            <a:pPr algn="ctr"/>
+            <a:r>
+              <a:rPr sz="1000" i="1">
+                <a:solidFill>
+                  <a:srgbClr val="D8CFC4"/>
+                </a:solidFill>
+              </a:rPr>
+              <a:t>Live Pulse + Jarvis — the live-ops brain (/admin)</a:t>
             </a:r>
           </a:p>
         </p:txBody>

--- a/Documents/WorkitSA - FNB Hackathon Deck.pptx
+++ b/Documents/WorkitSA - FNB Hackathon Deck.pptx
@@ -5046,7 +5046,7 @@
             <a:r>
               <a:rPr sz="1200" b="0" i="1">
                 <a:solidFill>
-                  <a:srgbClr val="8A7A6A"/>
+                  <a:srgbClr val="D8CFC4"/>
                 </a:solidFill>
                 <a:latin typeface="Calibri"/>
               </a:rPr>
@@ -5100,7 +5100,7 @@
             <a:r>
               <a:rPr sz="1500" b="1" i="0">
                 <a:solidFill>
-                  <a:srgbClr val="1F1612"/>
+                  <a:srgbClr val="FAF4EC"/>
                 </a:solidFill>
                 <a:latin typeface="Calibri"/>
               </a:rPr>
@@ -5109,7 +5109,7 @@
             <a:r>
               <a:rPr sz="1500" b="0" i="0">
                 <a:solidFill>
-                  <a:srgbClr val="4A3A30"/>
+                  <a:srgbClr val="D8CFC4"/>
                 </a:solidFill>
                 <a:latin typeface="Calibri"/>
               </a:rPr>
@@ -5140,7 +5140,7 @@
             <a:r>
               <a:rPr sz="1500" b="1" i="0">
                 <a:solidFill>
-                  <a:srgbClr val="1F1612"/>
+                  <a:srgbClr val="FAF4EC"/>
                 </a:solidFill>
                 <a:latin typeface="Calibri"/>
               </a:rPr>
@@ -5149,7 +5149,7 @@
             <a:r>
               <a:rPr sz="1500" b="0" i="0">
                 <a:solidFill>
-                  <a:srgbClr val="4A3A30"/>
+                  <a:srgbClr val="D8CFC4"/>
                 </a:solidFill>
                 <a:latin typeface="Calibri"/>
               </a:rPr>
@@ -5180,7 +5180,7 @@
             <a:r>
               <a:rPr sz="1500" b="1" i="0">
                 <a:solidFill>
-                  <a:srgbClr val="1F1612"/>
+                  <a:srgbClr val="FAF4EC"/>
                 </a:solidFill>
                 <a:latin typeface="Calibri"/>
               </a:rPr>
@@ -5189,7 +5189,7 @@
             <a:r>
               <a:rPr sz="1500" b="0" i="0">
                 <a:solidFill>
-                  <a:srgbClr val="4A3A30"/>
+                  <a:srgbClr val="D8CFC4"/>
                 </a:solidFill>
                 <a:latin typeface="Calibri"/>
               </a:rPr>
@@ -5278,7 +5278,7 @@
             <a:r>
               <a:rPr sz="1400" b="1" i="0">
                 <a:solidFill>
-                  <a:srgbClr val="1F1612"/>
+                  <a:srgbClr val="FAF4EC"/>
                 </a:solidFill>
                 <a:latin typeface="Calibri"/>
               </a:rPr>
@@ -5300,7 +5300,7 @@
             <a:r>
               <a:rPr sz="1500" b="1" i="0">
                 <a:solidFill>
-                  <a:srgbClr val="1F1612"/>
+                  <a:srgbClr val="FAF4EC"/>
                 </a:solidFill>
                 <a:latin typeface="Calibri"/>
               </a:rPr>
@@ -5322,7 +5322,7 @@
             <a:r>
               <a:rPr sz="1200" b="0" i="0">
                 <a:solidFill>
-                  <a:srgbClr val="1F1612"/>
+                  <a:srgbClr val="FAF4EC"/>
                 </a:solidFill>
                 <a:latin typeface="Calibri"/>
               </a:rPr>
@@ -6619,20 +6619,20 @@
             <a:r>
               <a:rPr sz="1450" b="1" i="0">
                 <a:solidFill>
-                  <a:srgbClr val="1F1612"/>
-                </a:solidFill>
-                <a:latin typeface="Calibri"/>
-              </a:rPr>
-              <a:t>Meet workers where they are.  </a:t>
+                  <a:srgbClr val="FAF4EC"/>
+                </a:solidFill>
+                <a:latin typeface="Calibri"/>
+              </a:rPr>
+              <a:t>Register in a chat.  </a:t>
             </a:r>
             <a:r>
               <a:rPr sz="1450" b="0" i="0">
                 <a:solidFill>
-                  <a:srgbClr val="4A3A30"/>
-                </a:solidFill>
-                <a:latin typeface="Calibri"/>
-              </a:rPr>
-              <a:t>Many can't keep a data-hungry app open. WhatsApp, they already have.</a:t>
+                  <a:srgbClr val="D8CFC4"/>
+                </a:solidFill>
+                <a:latin typeface="Calibri"/>
+              </a:rPr>
+              <a:t>A jobseeker with no app and no data signs up over WhatsApp — name, area, skills, consent.</a:t>
             </a:r>
           </a:p>
           <a:p>
@@ -6659,20 +6659,20 @@
             <a:r>
               <a:rPr sz="1450" b="1" i="0">
                 <a:solidFill>
-                  <a:srgbClr val="1F1612"/>
-                </a:solidFill>
-                <a:latin typeface="Calibri"/>
-              </a:rPr>
-              <a:t>JOBS  </a:t>
+                  <a:srgbClr val="FAF4EC"/>
+                </a:solidFill>
+                <a:latin typeface="Calibri"/>
+              </a:rPr>
+              <a:t>Get matched.  </a:t>
             </a:r>
             <a:r>
               <a:rPr sz="1450" b="0" i="0">
                 <a:solidFill>
-                  <a:srgbClr val="4A3A30"/>
-                </a:solidFill>
-                <a:latin typeface="Calibri"/>
-              </a:rPr>
-              <a:t>→ get the nearby jobs that match you.</a:t>
+                  <a:srgbClr val="D8CFC4"/>
+                </a:solidFill>
+                <a:latin typeface="Calibri"/>
+              </a:rPr>
+              <a:t>We WhatsApp them when a verified job appears nearby, in their line of work.</a:t>
             </a:r>
           </a:p>
           <a:p>
@@ -6699,20 +6699,20 @@
             <a:r>
               <a:rPr sz="1450" b="1" i="0">
                 <a:solidFill>
-                  <a:srgbClr val="1F1612"/>
-                </a:solidFill>
-                <a:latin typeface="Calibri"/>
-              </a:rPr>
-              <a:t>ACCEPT 3  </a:t>
+                  <a:srgbClr val="FAF4EC"/>
+                </a:solidFill>
+                <a:latin typeface="Calibri"/>
+              </a:rPr>
+              <a:t>Find &amp; offer.  </a:t>
             </a:r>
             <a:r>
               <a:rPr sz="1450" b="0" i="0">
                 <a:solidFill>
-                  <a:srgbClr val="4A3A30"/>
-                </a:solidFill>
-                <a:latin typeface="Calibri"/>
-              </a:rPr>
-              <a:t>→ makes an offer to the employer instantly.</a:t>
+                  <a:srgbClr val="D8CFC4"/>
+                </a:solidFill>
+                <a:latin typeface="Calibri"/>
+              </a:rPr>
+              <a:t>Text JOBS to see work; reply a number to apply, or name your own price.</a:t>
             </a:r>
           </a:p>
           <a:p>
@@ -6739,20 +6739,20 @@
             <a:r>
               <a:rPr sz="1450" b="1" i="0">
                 <a:solidFill>
-                  <a:srgbClr val="1F1612"/>
-                </a:solidFill>
-                <a:latin typeface="Calibri"/>
-              </a:rPr>
-              <a:t>ON MY WAY / DONE  </a:t>
+                  <a:srgbClr val="FAF4EC"/>
+                </a:solidFill>
+                <a:latin typeface="Calibri"/>
+              </a:rPr>
+              <a:t>Get hired.  </a:t>
             </a:r>
             <a:r>
               <a:rPr sz="1450" b="0" i="0">
                 <a:solidFill>
-                  <a:srgbClr val="4A3A30"/>
-                </a:solidFill>
-                <a:latin typeface="Calibri"/>
-              </a:rPr>
-              <a:t>→ update the job status by text.</a:t>
+                  <a:srgbClr val="D8CFC4"/>
+                </a:solidFill>
+                <a:latin typeface="Calibri"/>
+              </a:rPr>
+              <a:t>The employer reviews offers and hires with ACCEPT — both sides stay in WhatsApp.</a:t>
             </a:r>
           </a:p>
           <a:p>
@@ -6779,20 +6779,20 @@
             <a:r>
               <a:rPr sz="1450" b="1" i="0">
                 <a:solidFill>
-                  <a:srgbClr val="1F1612"/>
-                </a:solidFill>
-                <a:latin typeface="Calibri"/>
-              </a:rPr>
-              <a:t>Push alerts  </a:t>
+                  <a:srgbClr val="FAF4EC"/>
+                </a:solidFill>
+                <a:latin typeface="Calibri"/>
+              </a:rPr>
+              <a:t>Work safely.  </a:t>
             </a:r>
             <a:r>
               <a:rPr sz="1450" b="0" i="0">
                 <a:solidFill>
-                  <a:srgbClr val="4A3A30"/>
-                </a:solidFill>
-                <a:latin typeface="Calibri"/>
-              </a:rPr>
-              <a:t>when a matching job appears within 10 km of you.</a:t>
+                  <a:srgbClr val="D8CFC4"/>
+                </a:solidFill>
+                <a:latin typeface="Calibri"/>
+              </a:rPr>
+              <a:t>Doorstep start-code, live location check-ins, and SOS straight to our safety team.</a:t>
             </a:r>
           </a:p>
           <a:p>
@@ -6819,20 +6819,20 @@
             <a:r>
               <a:rPr sz="1450" b="1" i="0">
                 <a:solidFill>
-                  <a:srgbClr val="1F1612"/>
-                </a:solidFill>
-                <a:latin typeface="Calibri"/>
-              </a:rPr>
-              <a:t>POPIA-safe.  </a:t>
+                  <a:srgbClr val="FAF4EC"/>
+                </a:solidFill>
+                <a:latin typeface="Calibri"/>
+              </a:rPr>
+              <a:t>Proof of work.  </a:t>
             </a:r>
             <a:r>
               <a:rPr sz="1450" b="0" i="0">
                 <a:solidFill>
-                  <a:srgbClr val="4A3A30"/>
-                </a:solidFill>
-                <a:latin typeface="Calibri"/>
-              </a:rPr>
-              <a:t>Opt-in, free STOP anytime, and no ID or personal data is ever sent over WhatsApp.</a:t>
+                  <a:srgbClr val="D8CFC4"/>
+                </a:solidFill>
+                <a:latin typeface="Calibri"/>
+              </a:rPr>
+              <a:t>Every finished job builds a shareable Work Record — real work readiness, not just a payout.</a:t>
             </a:r>
           </a:p>
         </p:txBody>

--- a/Documents/WorkitSA - FNB Hackathon Deck.pptx
+++ b/Documents/WorkitSA - FNB Hackathon Deck.pptx
@@ -1,122 +1,63 @@
 
-<file path=ppt/presentation.xml><?xml version="1.0" encoding="utf-8"?>
-<p:presentation xmlns:a="http://schemas.openxmlformats.org/drawingml/2006/main" xmlns:r="http://schemas.openxmlformats.org/officeDocument/2006/relationships" xmlns:p="http://schemas.openxmlformats.org/presentationml/2006/main" saveSubsetFonts="1" autoCompressPictures="0">
-  <p:sldMasterIdLst>
-    <p:sldMasterId id="2147483648" r:id="rId1"/>
-  </p:sldMasterIdLst>
-  <p:sldIdLst>
-    <p:sldId id="256" r:id="rId7"/>
-    <p:sldId id="257" r:id="rId9"/>
-    <p:sldId id="258" r:id="rId10"/>
-    <p:sldId id="259" r:id="rId11"/>
-    <p:sldId id="260" r:id="rId12"/>
-    <p:sldId id="261" r:id="rId13"/>
-    <p:sldId id="262" r:id="rId14"/>
-    <p:sldId id="263" r:id="rId15"/>
-    <p:sldId id="264" r:id="rId16"/>
-    <p:sldId id="265" r:id="rId17"/>
-  </p:sldIdLst>
-  <p:sldSz cx="12191695" cy="6858000" type="screen4x3"/>
-  <p:notesSz cx="6858000" cy="9144000"/>
-  <p:defaultTextStyle>
-    <a:defPPr>
-      <a:defRPr lang="en-US"/>
-    </a:defPPr>
-    <a:lvl1pPr marL="0" algn="l" defTabSz="457200" rtl="0" eaLnBrk="1" latinLnBrk="0" hangingPunct="1">
-      <a:defRPr sz="1800" kern="1200">
-        <a:solidFill>
-          <a:schemeClr val="tx1"/>
-        </a:solidFill>
-        <a:latin typeface="+mn-lt"/>
-        <a:ea typeface="+mn-ea"/>
-        <a:cs typeface="+mn-cs"/>
-      </a:defRPr>
-    </a:lvl1pPr>
-    <a:lvl2pPr marL="457200" algn="l" defTabSz="457200" rtl="0" eaLnBrk="1" latinLnBrk="0" hangingPunct="1">
-      <a:defRPr sz="1800" kern="1200">
-        <a:solidFill>
-          <a:schemeClr val="tx1"/>
-        </a:solidFill>
-        <a:latin typeface="+mn-lt"/>
-        <a:ea typeface="+mn-ea"/>
-        <a:cs typeface="+mn-cs"/>
-      </a:defRPr>
-    </a:lvl2pPr>
-    <a:lvl3pPr marL="914400" algn="l" defTabSz="457200" rtl="0" eaLnBrk="1" latinLnBrk="0" hangingPunct="1">
-      <a:defRPr sz="1800" kern="1200">
-        <a:solidFill>
-          <a:schemeClr val="tx1"/>
-        </a:solidFill>
-        <a:latin typeface="+mn-lt"/>
-        <a:ea typeface="+mn-ea"/>
-        <a:cs typeface="+mn-cs"/>
-      </a:defRPr>
-    </a:lvl3pPr>
-    <a:lvl4pPr marL="1371600" algn="l" defTabSz="457200" rtl="0" eaLnBrk="1" latinLnBrk="0" hangingPunct="1">
-      <a:defRPr sz="1800" kern="1200">
-        <a:solidFill>
-          <a:schemeClr val="tx1"/>
-        </a:solidFill>
-        <a:latin typeface="+mn-lt"/>
-        <a:ea typeface="+mn-ea"/>
-        <a:cs typeface="+mn-cs"/>
-      </a:defRPr>
-    </a:lvl4pPr>
-    <a:lvl5pPr marL="1828800" algn="l" defTabSz="457200" rtl="0" eaLnBrk="1" latinLnBrk="0" hangingPunct="1">
-      <a:defRPr sz="1800" kern="1200">
-        <a:solidFill>
-          <a:schemeClr val="tx1"/>
-        </a:solidFill>
-        <a:latin typeface="+mn-lt"/>
-        <a:ea typeface="+mn-ea"/>
-        <a:cs typeface="+mn-cs"/>
-      </a:defRPr>
-    </a:lvl5pPr>
-    <a:lvl6pPr marL="2286000" algn="l" defTabSz="457200" rtl="0" eaLnBrk="1" latinLnBrk="0" hangingPunct="1">
-      <a:defRPr sz="1800" kern="1200">
-        <a:solidFill>
-          <a:schemeClr val="tx1"/>
-        </a:solidFill>
-        <a:latin typeface="+mn-lt"/>
-        <a:ea typeface="+mn-ea"/>
-        <a:cs typeface="+mn-cs"/>
-      </a:defRPr>
-    </a:lvl6pPr>
-    <a:lvl7pPr marL="2743200" algn="l" defTabSz="457200" rtl="0" eaLnBrk="1" latinLnBrk="0" hangingPunct="1">
-      <a:defRPr sz="1800" kern="1200">
-        <a:solidFill>
-          <a:schemeClr val="tx1"/>
-        </a:solidFill>
-        <a:latin typeface="+mn-lt"/>
-        <a:ea typeface="+mn-ea"/>
-        <a:cs typeface="+mn-cs"/>
-      </a:defRPr>
-    </a:lvl7pPr>
-    <a:lvl8pPr marL="3200400" algn="l" defTabSz="457200" rtl="0" eaLnBrk="1" latinLnBrk="0" hangingPunct="1">
-      <a:defRPr sz="1800" kern="1200">
-        <a:solidFill>
-          <a:schemeClr val="tx1"/>
-        </a:solidFill>
-        <a:latin typeface="+mn-lt"/>
-        <a:ea typeface="+mn-ea"/>
-        <a:cs typeface="+mn-cs"/>
-      </a:defRPr>
-    </a:lvl8pPr>
-    <a:lvl9pPr marL="3657600" algn="l" defTabSz="457200" rtl="0" eaLnBrk="1" latinLnBrk="0" hangingPunct="1">
-      <a:defRPr sz="1800" kern="1200">
-        <a:solidFill>
-          <a:schemeClr val="tx1"/>
-        </a:solidFill>
-        <a:latin typeface="+mn-lt"/>
-        <a:ea typeface="+mn-ea"/>
-        <a:cs typeface="+mn-cs"/>
-      </a:defRPr>
-    </a:lvl9pPr>
-  </p:defaultTextStyle>
-</p:presentation>
+<file path=docProps\app.xml><?xml version="1.0" encoding="utf-8"?>
+<Properties xmlns="http://schemas.openxmlformats.org/officeDocument/2006/extended-properties" xmlns:vt="http://schemas.openxmlformats.org/officeDocument/2006/docPropsVTypes">
+  <TotalTime>1</TotalTime>
+  <Words>0</Words>
+  <Application>Microsoft Macintosh PowerPoint</Application>
+  <PresentationFormat>On-screen Show (4:3)</PresentationFormat>
+  <Paragraphs>0</Paragraphs>
+  <Slides>0</Slides>
+  <Notes>0</Notes>
+  <HiddenSlides>0</HiddenSlides>
+  <MMClips>0</MMClips>
+  <ScaleCrop>false</ScaleCrop>
+  <HeadingPairs>
+    <vt:vector size="4" baseType="variant">
+      <vt:variant>
+        <vt:lpstr>Theme</vt:lpstr>
+      </vt:variant>
+      <vt:variant>
+        <vt:i4>1</vt:i4>
+      </vt:variant>
+      <vt:variant>
+        <vt:lpstr>Slide Titles</vt:lpstr>
+      </vt:variant>
+      <vt:variant>
+        <vt:i4>0</vt:i4>
+      </vt:variant>
+    </vt:vector>
+  </HeadingPairs>
+  <TitlesOfParts>
+    <vt:vector size="1" baseType="lpstr">
+      <vt:lpstr>Office Theme</vt:lpstr>
+    </vt:vector>
+  </TitlesOfParts>
+  <Manager/>
+  <Company/>
+  <LinksUpToDate>false</LinksUpToDate>
+  <SharedDoc>false</SharedDoc>
+  <HyperlinkBase/>
+  <HyperlinksChanged>false</HyperlinksChanged>
+  <AppVersion>14.0000</AppVersion>
+</Properties>
 </file>
 
-<file path=ppt/notesMasters/notesMaster1.xml><?xml version="1.0" encoding="utf-8"?>
+<file path=docProps\core.xml><?xml version="1.0" encoding="utf-8"?>
+<cp:coreProperties xmlns:cp="http://schemas.openxmlformats.org/package/2006/metadata/core-properties" xmlns:dc="http://purl.org/dc/elements/1.1/" xmlns:dcterms="http://purl.org/dc/terms/" xmlns:dcmitype="http://purl.org/dc/dcmitype/" xmlns:xsi="http://www.w3.org/2001/XMLSchema-instance">
+  <dc:title/>
+  <dc:subject/>
+  <dc:creator/>
+  <cp:keywords/>
+  <dc:description>generated using python-pptx</dc:description>
+  <cp:lastModifiedBy>Steve Canny</cp:lastModifiedBy>
+  <cp:revision>1</cp:revision>
+  <dcterms:created xsi:type="dcterms:W3CDTF">2013-01-27T09:14:16Z</dcterms:created>
+  <dcterms:modified xsi:type="dcterms:W3CDTF">2013-01-27T09:15:58Z</dcterms:modified>
+  <cp:category/>
+</cp:coreProperties>
+</file>
+
+<file path=ppt\notesMasters\notesMaster1.xml><?xml version="1.0" encoding="utf-8"?>
 <p:notesMaster xmlns:a="http://schemas.openxmlformats.org/drawingml/2006/main" xmlns:p="http://schemas.openxmlformats.org/presentationml/2006/main" xmlns:r="http://schemas.openxmlformats.org/officeDocument/2006/relationships">
   <p:cSld>
     <p:bg>
@@ -466,7 +407,7 @@
 </p:notesMaster>
 </file>
 
-<file path=ppt/notesSlides/notesSlide1.xml><?xml version="1.0" encoding="utf-8"?>
+<file path=ppt\notesSlides\notesSlide1.xml><?xml version="1.0" encoding="utf-8"?>
 <p:notes xmlns:a="http://schemas.openxmlformats.org/drawingml/2006/main" xmlns:p="http://schemas.openxmlformats.org/presentationml/2006/main" xmlns:r="http://schemas.openxmlformats.org/officeDocument/2006/relationships">
   <p:cSld>
     <p:spTree>
@@ -511,7 +452,7 @@
           <a:lstStyle/>
           <a:p>
             <a:r>
-              <a:t>Open in 10 seconds: 'I'm Tshepo, solo team Workitsa. WorkitSA is a live, verified gig-work marketplace that connects young South Africans to everyday work nearby. For this hackathon I built a WhatsApp job channel so even a worker with no data can find and accept work.' Say the challenge out loud: youth employment &amp; work readiness.</a:t>
+              <a:t>Workit is a live, two-sided gig-work marketplace for everyday work in South Africa, entered under Youth employment &amp; work readiness. Solo entry, Team Workitsa, live today at workitsa.co.za. Judges can log in and try it now (box on this slide; full details on the 'Try it yourself' slide). Our hackathon build this weekend: the WhatsApp Job Channel — get work with no app and no data. [Presentation]</a:t>
             </a:r>
           </a:p>
         </p:txBody>
@@ -536,7 +477,7 @@
 </p:notes>
 </file>
 
-<file path=ppt/notesSlides/notesSlide10.xml><?xml version="1.0" encoding="utf-8"?>
+<file path=ppt\notesSlides\notesSlide10.xml><?xml version="1.0" encoding="utf-8"?>
 <p:notes xmlns:a="http://schemas.openxmlformats.org/drawingml/2006/main" xmlns:p="http://schemas.openxmlformats.org/presentationml/2006/main" xmlns:r="http://schemas.openxmlformats.org/officeDocument/2006/relationships">
   <p:cSld>
     <p:spTree>
@@ -581,7 +522,7 @@
           <a:lstStyle/>
           <a:p>
             <a:r>
-              <a:t>Close on IMPACT and land the mission in one line: 'Every verified job is a young person one step closer to income.' Make sure the demo-video link is pasted here and on slide 6 before you submit.</a:t>
+              <a:t>Impact &amp; vision: real traction in Gauteng — 140+ users, 110+ workers, 25+ ID-verified (demo/seed excluded) and growing weekly. 12-month target: 3,000 verified workers, 1,500 job posters, 1,500 completed jobs. Roadmap: province-by-province rollout. Vision: a national bridge to income for South African youth. [Impact]</a:t>
             </a:r>
           </a:p>
         </p:txBody>
@@ -606,7 +547,7 @@
 </p:notes>
 </file>
 
-<file path=ppt/notesSlides/notesSlide2.xml><?xml version="1.0" encoding="utf-8"?>
+<file path=ppt\notesSlides\notesSlide11.xml><?xml version="1.0" encoding="utf-8"?>
 <p:notes xmlns:a="http://schemas.openxmlformats.org/drawingml/2006/main" xmlns:p="http://schemas.openxmlformats.org/presentationml/2006/main" xmlns:r="http://schemas.openxmlformats.org/officeDocument/2006/relationships">
   <p:cSld>
     <p:spTree>
@@ -651,7 +592,7 @@
           <a:lstStyle/>
           <a:p>
             <a:r>
-              <a:t>This slide scores IMPACT. Land the human cost: a worker spends R30 of airtime and a R40 taxi to chase a job that was already taken. Keep it to ~20 seconds, then pivot to the solution.</a:t>
+              <a:t>Summary for scoring: this slide maps Workit directly to the seven judging dimensions (Product, Creativity, Usability, Sustainability, Impact, Presentation, Intelligence) so the panel can score at a glance.</a:t>
             </a:r>
           </a:p>
         </p:txBody>
@@ -676,7 +617,7 @@
 </p:notes>
 </file>
 
-<file path=ppt/notesSlides/notesSlide3.xml><?xml version="1.0" encoding="utf-8"?>
+<file path=ppt\notesSlides\notesSlide12.xml><?xml version="1.0" encoding="utf-8"?>
 <p:notes xmlns:a="http://schemas.openxmlformats.org/drawingml/2006/main" xmlns:p="http://schemas.openxmlformats.org/presentationml/2006/main" xmlns:r="http://schemas.openxmlformats.org/officeDocument/2006/relationships">
   <p:cSld>
     <p:spTree>
@@ -721,7 +662,7 @@
           <a:lstStyle/>
           <a:p>
             <a:r>
-              <a:t>This scores PRODUCT. Stress it is LIVE, not a concept. Mention it's a PWA built for low-end Android and works in English, Afrikaans and Zulu. Screenshot: the find-work feed.</a:t>
+              <a:t>Our hackathon build log: everything here shipped Friday–Sunday on the live production stack (real commits, logged in CHANGELOG). Headline features: employer-accept-over-WhatsApp and app-less worker onboarding into the real approval &amp; verification pipeline. [Product, Creativity]</a:t>
             </a:r>
           </a:p>
         </p:txBody>
@@ -746,7 +687,7 @@
 </p:notes>
 </file>
 
-<file path=ppt/notesSlides/notesSlide4.xml><?xml version="1.0" encoding="utf-8"?>
+<file path=ppt\notesSlides\notesSlide13.xml><?xml version="1.0" encoding="utf-8"?>
 <p:notes xmlns:a="http://schemas.openxmlformats.org/drawingml/2006/main" xmlns:p="http://schemas.openxmlformats.org/presentationml/2006/main" xmlns:r="http://schemas.openxmlformats.org/officeDocument/2006/relationships">
   <p:cSld>
     <p:spTree>
@@ -791,7 +732,7 @@
           <a:lstStyle/>
           <a:p>
             <a:r>
-              <a:t>This scores CREATIVITY and ties straight back to the challenge's 'transport and data barriers'. This is the NEW feature built during the weekend (hackathon rule for an existing app). Demo it live if you can; otherwise the WhatsApp screenshot carries it.</a:t>
+              <a:t>Trust is the whole model. Real-person ID verification gates trading; a doorstep start-code confirms the right worker; live location check-ins and SOS protect people on the job; admins require TOTP MFA; POPIA-aligned with data resident in africa-south1 and an erasure runbook. [Usability, Impact]</a:t>
             </a:r>
           </a:p>
         </p:txBody>
@@ -816,7 +757,7 @@
 </p:notes>
 </file>
 
-<file path=ppt/notesSlides/notesSlide5.xml><?xml version="1.0" encoding="utf-8"?>
+<file path=ppt\notesSlides\notesSlide2.xml><?xml version="1.0" encoding="utf-8"?>
 <p:notes xmlns:a="http://schemas.openxmlformats.org/drawingml/2006/main" xmlns:p="http://schemas.openxmlformats.org/presentationml/2006/main" xmlns:r="http://schemas.openxmlformats.org/officeDocument/2006/relationships">
   <p:cSld>
     <p:spTree>
@@ -861,7 +802,7 @@
           <a:lstStyle/>
           <a:p>
             <a:r>
-              <a:t>This is the required USER-JOURNEY STORY. Tell it as one continuous sentence about a real person — judges remember a story, not a feature list. ~25 seconds.</a:t>
+              <a:t>Context: ~45% youth unemployment (StatsSA QLFS) — nearly half of South Africans aged 15-34 can't find work. The barrier isn't willingness; it's a trusted, low-data bridge to the next job. Entry-level jobseekers often lack data, a smartphone, a CV and trust signals; informal employers struggle to find vetted help nearby. Workit closes that gap. [Impact]</a:t>
             </a:r>
           </a:p>
         </p:txBody>
@@ -886,7 +827,7 @@
 </p:notes>
 </file>
 
-<file path=ppt/notesSlides/notesSlide6.xml><?xml version="1.0" encoding="utf-8"?>
+<file path=ppt\notesSlides\notesSlide3.xml><?xml version="1.0" encoding="utf-8"?>
 <p:notes xmlns:a="http://schemas.openxmlformats.org/drawingml/2006/main" xmlns:p="http://schemas.openxmlformats.org/presentationml/2006/main" xmlns:r="http://schemas.openxmlformats.org/officeDocument/2006/relationships">
   <p:cSld>
     <p:spTree>
@@ -931,7 +872,7 @@
           <a:lstStyle/>
           <a:p>
             <a:r>
-              <a:t>REQUIRED: demo account + demo video link live on a slide. Create the judge account BEFORE submitting (Part 4). Paste the final video link here and on slide 10. WhatsApp demo line is +27 67 748 2643 — the founder's personal number is never shown.</a:t>
+              <a:t>The solution, live today: employers post everyday jobs (cleaning, gardening, trades, deliveries, errands); nearby VERIFIED workers accept or counter-offer; work gets done, paid cash/EFT; both sides rate each other. A real PWA for low-end Android, launching in Gauteng, in en/af/zu. The screenshot is the real product, not a mock-up. [Product, Usability]</a:t>
             </a:r>
           </a:p>
         </p:txBody>
@@ -956,7 +897,7 @@
 </p:notes>
 </file>
 
-<file path=ppt/notesSlides/notesSlide7.xml><?xml version="1.0" encoding="utf-8"?>
+<file path=ppt\notesSlides\notesSlide4.xml><?xml version="1.0" encoding="utf-8"?>
 <p:notes xmlns:a="http://schemas.openxmlformats.org/drawingml/2006/main" xmlns:p="http://schemas.openxmlformats.org/presentationml/2006/main" xmlns:r="http://schemas.openxmlformats.org/officeDocument/2006/relationships">
   <p:cSld>
     <p:spTree>
@@ -1001,7 +942,7 @@
           <a:lstStyle/>
           <a:p>
             <a:r>
-              <a:t>This scores INTELLIGENCE (a full 10 points most entries will miss). Emphasise the app learns from data patterns — matching, the live demand heatmap, and automatic fraud detection.</a:t>
+              <a:t>Our hackathon feature: the WhatsApp Job Channel. A jobseeker with no app and no data registers in a chat, gets matched to nearby verified jobs, texts to apply or name a price, and the employer hires with ACCEPT — all inside WhatsApp. Safety is built in: doorstep start-code, live location check-ins, SOS, and a shareable Work Record as proof of work. This is our creative edge and satisfies the rule to build at least one feature during the hackathon. [Creativity, Product]</a:t>
             </a:r>
           </a:p>
         </p:txBody>
@@ -1026,7 +967,7 @@
 </p:notes>
 </file>
 
-<file path=ppt/notesSlides/notesSlide8.xml><?xml version="1.0" encoding="utf-8"?>
+<file path=ppt\notesSlides\notesSlide5.xml><?xml version="1.0" encoding="utf-8"?>
 <p:notes xmlns:a="http://schemas.openxmlformats.org/drawingml/2006/main" xmlns:p="http://schemas.openxmlformats.org/presentationml/2006/main" xmlns:r="http://schemas.openxmlformats.org/officeDocument/2006/relationships">
   <p:cSld>
     <p:spTree>
@@ -1071,7 +1012,7 @@
           <a:lstStyle/>
           <a:p>
             <a:r>
-              <a:t>Required: architecture + security. Judges from a bank care a lot about this. Hit MFA, ID verification, data residency in africa-south1, and POPIA.</a:t>
+              <a:t>Required User Journey Story — Thabo's first R450: sign up free (or via WhatsApp) -&gt; verify once (real-person ID) -&gt; get alerted to a nearby job -&gt; reply ACCEPT -&gt; do the work and mark DONE with a time-stamped photo -&gt; get paid &amp; rated, keeping a verifiable record for next time. Low-friction, trust at every step. [Presentation, Usability]</a:t>
             </a:r>
           </a:p>
         </p:txBody>
@@ -1096,7 +1037,7 @@
 </p:notes>
 </file>
 
-<file path=ppt/notesSlides/notesSlide9.xml><?xml version="1.0" encoding="utf-8"?>
+<file path=ppt\notesSlides\notesSlide6.xml><?xml version="1.0" encoding="utf-8"?>
 <p:notes xmlns:a="http://schemas.openxmlformats.org/drawingml/2006/main" xmlns:p="http://schemas.openxmlformats.org/presentationml/2006/main" xmlns:r="http://schemas.openxmlformats.org/officeDocument/2006/relationships">
   <p:cSld>
     <p:spTree>
@@ -1141,7 +1082,7 @@
           <a:lstStyle/>
           <a:p>
             <a:r>
-              <a:t>This scores SUSTAINABILITY + the required commercialisation strategy (needed because a WhatsApp bot is part of the entry). Know these four numbers cold. Break-even at ~500 jobs/month is very reachable in one metro.</a:t>
+              <a:t>Judges can log in right now. Two pre-approved, pre-verified demo accounts (employer + worker) so you can see both sides of the marketplace. It is seeded with real Gauteng activity so it is never empty. The worker WhatsApp flow is shown in the demo video because the Meta sandbox number limits who can text in; the production number is being provisioned. [Presentation]</a:t>
             </a:r>
           </a:p>
         </p:txBody>
@@ -1166,7 +1107,352 @@
 </p:notes>
 </file>
 
-<file path=ppt/slideLayouts/slideLayout1.xml><?xml version="1.0" encoding="utf-8"?>
+<file path=ppt\notesSlides\notesSlide7.xml><?xml version="1.0" encoding="utf-8"?>
+<p:notes xmlns:a="http://schemas.openxmlformats.org/drawingml/2006/main" xmlns:p="http://schemas.openxmlformats.org/presentationml/2006/main" xmlns:r="http://schemas.openxmlformats.org/officeDocument/2006/relationships">
+  <p:cSld>
+    <p:spTree>
+      <p:nvGrpSpPr>
+        <p:cNvPr id="1" name=""/>
+        <p:cNvGrpSpPr/>
+        <p:nvPr/>
+      </p:nvGrpSpPr>
+      <p:grpSpPr>
+        <a:xfrm>
+          <a:off x="0" y="0"/>
+          <a:ext cx="0" cy="0"/>
+          <a:chOff x="0" y="0"/>
+          <a:chExt cx="0" cy="0"/>
+        </a:xfrm>
+      </p:grpSpPr>
+      <p:sp>
+        <p:nvSpPr>
+          <p:cNvPr id="2" name="Slide Image Placeholder 1"/>
+          <p:cNvSpPr>
+            <a:spLocks noGrp="1"/>
+          </p:cNvSpPr>
+          <p:nvPr>
+            <p:ph type="sldImg" idx="2"/>
+          </p:nvPr>
+        </p:nvSpPr>
+        <p:spPr/>
+      </p:sp>
+      <p:sp>
+        <p:nvSpPr>
+          <p:cNvPr id="3" name="Notes Placeholder 2"/>
+          <p:cNvSpPr>
+            <a:spLocks noGrp="1"/>
+          </p:cNvSpPr>
+          <p:nvPr>
+            <p:ph type="body" idx="3" sz="quarter"/>
+          </p:nvPr>
+        </p:nvSpPr>
+        <p:spPr/>
+        <p:txBody>
+          <a:bodyPr/>
+          <a:lstStyle/>
+          <a:p>
+            <a:r>
+              <a:t>Jarvis — a Gemini-powered co-pilot in the admin console: a morning digest, dispute &amp; anomaly alerts, and ask-anything over live Firestore data, reachable over WhatsApp. Live Pulse gives real-time operations. This is applied AI that runs the marketplace, not a bolt-on. [Intelligence]</a:t>
+            </a:r>
+          </a:p>
+        </p:txBody>
+      </p:sp>
+      <p:sp>
+        <p:nvSpPr>
+          <p:cNvPr id="4" name="Slide Number Placeholder 3"/>
+          <p:cNvSpPr>
+            <a:spLocks noGrp="1"/>
+          </p:cNvSpPr>
+          <p:nvPr>
+            <p:ph type="sldNum" idx="5" sz="quarter"/>
+          </p:nvPr>
+        </p:nvSpPr>
+        <p:spPr/>
+      </p:sp>
+    </p:spTree>
+  </p:cSld>
+  <p:clrMapOvr>
+    <a:masterClrMapping/>
+  </p:clrMapOvr>
+</p:notes>
+</file>
+
+<file path=ppt\notesSlides\notesSlide8.xml><?xml version="1.0" encoding="utf-8"?>
+<p:notes xmlns:a="http://schemas.openxmlformats.org/drawingml/2006/main" xmlns:p="http://schemas.openxmlformats.org/presentationml/2006/main" xmlns:r="http://schemas.openxmlformats.org/officeDocument/2006/relationships">
+  <p:cSld>
+    <p:spTree>
+      <p:nvGrpSpPr>
+        <p:cNvPr id="1" name=""/>
+        <p:cNvGrpSpPr/>
+        <p:nvPr/>
+      </p:nvGrpSpPr>
+      <p:grpSpPr>
+        <a:xfrm>
+          <a:off x="0" y="0"/>
+          <a:ext cx="0" cy="0"/>
+          <a:chOff x="0" y="0"/>
+          <a:chExt cx="0" cy="0"/>
+        </a:xfrm>
+      </p:grpSpPr>
+      <p:sp>
+        <p:nvSpPr>
+          <p:cNvPr id="2" name="Slide Image Placeholder 1"/>
+          <p:cNvSpPr>
+            <a:spLocks noGrp="1"/>
+          </p:cNvSpPr>
+          <p:nvPr>
+            <p:ph type="sldImg" idx="2"/>
+          </p:nvPr>
+        </p:nvSpPr>
+        <p:spPr/>
+      </p:sp>
+      <p:sp>
+        <p:nvSpPr>
+          <p:cNvPr id="3" name="Notes Placeholder 2"/>
+          <p:cNvSpPr>
+            <a:spLocks noGrp="1"/>
+          </p:cNvSpPr>
+          <p:nvPr>
+            <p:ph type="body" idx="3" sz="quarter"/>
+          </p:nvPr>
+        </p:nvSpPr>
+        <p:spPr/>
+        <p:txBody>
+          <a:bodyPr/>
+          <a:lstStyle/>
+          <a:p>
+            <a:r>
+              <a:t>Technical architecture (required): Next.js PWA (static export) · Firebase Auth (phone OTP / email / Google) · Firestore + Cloud Storage · Cloud Functions in africa-south1 · FCM push · WhatsApp Cloud API · Gemini. Security &amp; SSDLC: TOTP MFA enforced for admins, real-person ID verification before you can trade, tested Firestore security rules, POPIA-aligned handling, and data resident in africa-south1. [Product, Usability]</a:t>
+            </a:r>
+          </a:p>
+        </p:txBody>
+      </p:sp>
+      <p:sp>
+        <p:nvSpPr>
+          <p:cNvPr id="4" name="Slide Number Placeholder 3"/>
+          <p:cNvSpPr>
+            <a:spLocks noGrp="1"/>
+          </p:cNvSpPr>
+          <p:nvPr>
+            <p:ph type="sldNum" idx="5" sz="quarter"/>
+          </p:nvPr>
+        </p:nvSpPr>
+        <p:spPr/>
+      </p:sp>
+    </p:spTree>
+  </p:cSld>
+  <p:clrMapOvr>
+    <a:masterClrMapping/>
+  </p:clrMapOvr>
+</p:notes>
+</file>
+
+<file path=ppt\notesSlides\notesSlide9.xml><?xml version="1.0" encoding="utf-8"?>
+<p:notes xmlns:a="http://schemas.openxmlformats.org/drawingml/2006/main" xmlns:p="http://schemas.openxmlformats.org/presentationml/2006/main" xmlns:r="http://schemas.openxmlformats.org/officeDocument/2006/relationships">
+  <p:cSld>
+    <p:spTree>
+      <p:nvGrpSpPr>
+        <p:cNvPr id="1" name=""/>
+        <p:cNvGrpSpPr/>
+        <p:nvPr/>
+      </p:nvGrpSpPr>
+      <p:grpSpPr>
+        <a:xfrm>
+          <a:off x="0" y="0"/>
+          <a:ext cx="0" cy="0"/>
+          <a:chOff x="0" y="0"/>
+          <a:chExt cx="0" cy="0"/>
+        </a:xfrm>
+      </p:grpSpPr>
+      <p:sp>
+        <p:nvSpPr>
+          <p:cNvPr id="2" name="Slide Image Placeholder 1"/>
+          <p:cNvSpPr>
+            <a:spLocks noGrp="1"/>
+          </p:cNvSpPr>
+          <p:nvPr>
+            <p:ph type="sldImg" idx="2"/>
+          </p:nvPr>
+        </p:nvSpPr>
+        <p:spPr/>
+      </p:sp>
+      <p:sp>
+        <p:nvSpPr>
+          <p:cNvPr id="3" name="Notes Placeholder 2"/>
+          <p:cNvSpPr>
+            <a:spLocks noGrp="1"/>
+          </p:cNvSpPr>
+          <p:nvPr>
+            <p:ph type="body" idx="3" sz="quarter"/>
+          </p:nvPr>
+        </p:nvSpPr>
+        <p:spPr/>
+        <p:txBody>
+          <a:bodyPr/>
+          <a:lstStyle/>
+          <a:p>
+            <a:r>
+              <a:t>Sustainability: free at launch to build liquidity (workers + jobs first), then a clear path to revenue — 8% service fee paid by the job poster, R49 Gold verification badge, R20 boosted posts, R199/month business plan. Running cost is about R14,100/month; unit economics improve as completed jobs grow. [Sustainability]</a:t>
+            </a:r>
+          </a:p>
+        </p:txBody>
+      </p:sp>
+      <p:sp>
+        <p:nvSpPr>
+          <p:cNvPr id="4" name="Slide Number Placeholder 3"/>
+          <p:cNvSpPr>
+            <a:spLocks noGrp="1"/>
+          </p:cNvSpPr>
+          <p:nvPr>
+            <p:ph type="sldNum" idx="5" sz="quarter"/>
+          </p:nvPr>
+        </p:nvSpPr>
+        <p:spPr/>
+      </p:sp>
+    </p:spTree>
+  </p:cSld>
+  <p:clrMapOvr>
+    <a:masterClrMapping/>
+  </p:clrMapOvr>
+</p:notes>
+</file>
+
+<file path=ppt\presProps.xml><?xml version="1.0" encoding="utf-8"?>
+<p:presentationPr xmlns:a="http://schemas.openxmlformats.org/drawingml/2006/main" xmlns:r="http://schemas.openxmlformats.org/officeDocument/2006/relationships" xmlns:p="http://schemas.openxmlformats.org/presentationml/2006/main">
+  <p:extLst>
+    <p:ext uri="{E76CE94A-603C-4142-B9EB-6D1370010A27}">
+      <p14:discardImageEditData xmlns:p14="http://schemas.microsoft.com/office/powerpoint/2010/main" val="0"/>
+    </p:ext>
+    <p:ext uri="{D31A062A-798A-4329-ABDD-BBA856620510}">
+      <p14:defaultImageDpi xmlns:p14="http://schemas.microsoft.com/office/powerpoint/2010/main" val="0"/>
+    </p:ext>
+  </p:extLst>
+</p:presentationPr>
+</file>
+
+<file path=ppt\presentation.xml><?xml version="1.0" encoding="utf-8"?>
+<p:presentation xmlns:a="http://schemas.openxmlformats.org/drawingml/2006/main" xmlns:r="http://schemas.openxmlformats.org/officeDocument/2006/relationships" xmlns:p="http://schemas.openxmlformats.org/presentationml/2006/main" saveSubsetFonts="1" autoCompressPictures="0">
+  <p:sldMasterIdLst>
+    <p:sldMasterId id="2147483648" r:id="rId1"/>
+  </p:sldMasterIdLst>
+  <p:sldIdLst>
+    <p:sldId id="256" r:id="rId7"/>
+    <p:sldId id="257" r:id="rId9"/>
+    <p:sldId id="258" r:id="rId10"/>
+    <p:sldId id="259" r:id="rId11"/>
+    <p:sldId id="269" r:id="rId21"/>
+    <p:sldId id="270" r:id="rId22"/>
+    <p:sldId id="267" r:id="rId19"/>
+    <p:sldId id="260" r:id="rId12"/>
+    <p:sldId id="268" r:id="rId20"/>
+    <p:sldId id="261" r:id="rId13"/>
+    <p:sldId id="262" r:id="rId14"/>
+    <p:sldId id="263" r:id="rId15"/>
+    <p:sldId id="264" r:id="rId16"/>
+    <p:sldId id="265" r:id="rId17"/>
+    <p:sldId id="266" r:id="rId18"/>
+  </p:sldIdLst>
+  <p:sldSz cx="12191695" cy="6858000" type="screen4x3"/>
+  <p:notesSz cx="6858000" cy="9144000"/>
+  <p:defaultTextStyle>
+    <a:defPPr>
+      <a:defRPr lang="en-US"/>
+    </a:defPPr>
+    <a:lvl1pPr marL="0" algn="l" defTabSz="457200" rtl="0" eaLnBrk="1" latinLnBrk="0" hangingPunct="1">
+      <a:defRPr sz="1800" kern="1200">
+        <a:solidFill>
+          <a:schemeClr val="tx1"/>
+        </a:solidFill>
+        <a:latin typeface="+mn-lt"/>
+        <a:ea typeface="+mn-ea"/>
+        <a:cs typeface="+mn-cs"/>
+      </a:defRPr>
+    </a:lvl1pPr>
+    <a:lvl2pPr marL="457200" algn="l" defTabSz="457200" rtl="0" eaLnBrk="1" latinLnBrk="0" hangingPunct="1">
+      <a:defRPr sz="1800" kern="1200">
+        <a:solidFill>
+          <a:schemeClr val="tx1"/>
+        </a:solidFill>
+        <a:latin typeface="+mn-lt"/>
+        <a:ea typeface="+mn-ea"/>
+        <a:cs typeface="+mn-cs"/>
+      </a:defRPr>
+    </a:lvl2pPr>
+    <a:lvl3pPr marL="914400" algn="l" defTabSz="457200" rtl="0" eaLnBrk="1" latinLnBrk="0" hangingPunct="1">
+      <a:defRPr sz="1800" kern="1200">
+        <a:solidFill>
+          <a:schemeClr val="tx1"/>
+        </a:solidFill>
+        <a:latin typeface="+mn-lt"/>
+        <a:ea typeface="+mn-ea"/>
+        <a:cs typeface="+mn-cs"/>
+      </a:defRPr>
+    </a:lvl3pPr>
+    <a:lvl4pPr marL="1371600" algn="l" defTabSz="457200" rtl="0" eaLnBrk="1" latinLnBrk="0" hangingPunct="1">
+      <a:defRPr sz="1800" kern="1200">
+        <a:solidFill>
+          <a:schemeClr val="tx1"/>
+        </a:solidFill>
+        <a:latin typeface="+mn-lt"/>
+        <a:ea typeface="+mn-ea"/>
+        <a:cs typeface="+mn-cs"/>
+      </a:defRPr>
+    </a:lvl4pPr>
+    <a:lvl5pPr marL="1828800" algn="l" defTabSz="457200" rtl="0" eaLnBrk="1" latinLnBrk="0" hangingPunct="1">
+      <a:defRPr sz="1800" kern="1200">
+        <a:solidFill>
+          <a:schemeClr val="tx1"/>
+        </a:solidFill>
+        <a:latin typeface="+mn-lt"/>
+        <a:ea typeface="+mn-ea"/>
+        <a:cs typeface="+mn-cs"/>
+      </a:defRPr>
+    </a:lvl5pPr>
+    <a:lvl6pPr marL="2286000" algn="l" defTabSz="457200" rtl="0" eaLnBrk="1" latinLnBrk="0" hangingPunct="1">
+      <a:defRPr sz="1800" kern="1200">
+        <a:solidFill>
+          <a:schemeClr val="tx1"/>
+        </a:solidFill>
+        <a:latin typeface="+mn-lt"/>
+        <a:ea typeface="+mn-ea"/>
+        <a:cs typeface="+mn-cs"/>
+      </a:defRPr>
+    </a:lvl6pPr>
+    <a:lvl7pPr marL="2743200" algn="l" defTabSz="457200" rtl="0" eaLnBrk="1" latinLnBrk="0" hangingPunct="1">
+      <a:defRPr sz="1800" kern="1200">
+        <a:solidFill>
+          <a:schemeClr val="tx1"/>
+        </a:solidFill>
+        <a:latin typeface="+mn-lt"/>
+        <a:ea typeface="+mn-ea"/>
+        <a:cs typeface="+mn-cs"/>
+      </a:defRPr>
+    </a:lvl7pPr>
+    <a:lvl8pPr marL="3200400" algn="l" defTabSz="457200" rtl="0" eaLnBrk="1" latinLnBrk="0" hangingPunct="1">
+      <a:defRPr sz="1800" kern="1200">
+        <a:solidFill>
+          <a:schemeClr val="tx1"/>
+        </a:solidFill>
+        <a:latin typeface="+mn-lt"/>
+        <a:ea typeface="+mn-ea"/>
+        <a:cs typeface="+mn-cs"/>
+      </a:defRPr>
+    </a:lvl8pPr>
+    <a:lvl9pPr marL="3657600" algn="l" defTabSz="457200" rtl="0" eaLnBrk="1" latinLnBrk="0" hangingPunct="1">
+      <a:defRPr sz="1800" kern="1200">
+        <a:solidFill>
+          <a:schemeClr val="tx1"/>
+        </a:solidFill>
+        <a:latin typeface="+mn-lt"/>
+        <a:ea typeface="+mn-ea"/>
+        <a:cs typeface="+mn-cs"/>
+      </a:defRPr>
+    </a:lvl9pPr>
+  </p:defaultTextStyle>
+</p:presentation>
+</file>
+
+<file path=ppt\slideLayouts\slideLayout1.xml><?xml version="1.0" encoding="utf-8"?>
 <p:sldLayout xmlns:a="http://schemas.openxmlformats.org/drawingml/2006/main" xmlns:r="http://schemas.openxmlformats.org/officeDocument/2006/relationships" xmlns:p="http://schemas.openxmlformats.org/presentationml/2006/main" type="title" preserve="1">
   <p:cSld name="Title Slide">
     <p:spTree>
@@ -1408,7 +1694,7 @@
 </p:sldLayout>
 </file>
 
-<file path=ppt/slideLayouts/slideLayout10.xml><?xml version="1.0" encoding="utf-8"?>
+<file path=ppt\slideLayouts\slideLayout10.xml><?xml version="1.0" encoding="utf-8"?>
 <p:sldLayout xmlns:a="http://schemas.openxmlformats.org/drawingml/2006/main" xmlns:r="http://schemas.openxmlformats.org/officeDocument/2006/relationships" xmlns:p="http://schemas.openxmlformats.org/presentationml/2006/main" type="vertTx" preserve="1">
   <p:cSld name="Title and Vertical Text">
     <p:spTree>
@@ -1578,7 +1864,7 @@
 </p:sldLayout>
 </file>
 
-<file path=ppt/slideLayouts/slideLayout11.xml><?xml version="1.0" encoding="utf-8"?>
+<file path=ppt\slideLayouts\slideLayout11.xml><?xml version="1.0" encoding="utf-8"?>
 <p:sldLayout xmlns:a="http://schemas.openxmlformats.org/drawingml/2006/main" xmlns:r="http://schemas.openxmlformats.org/officeDocument/2006/relationships" xmlns:p="http://schemas.openxmlformats.org/presentationml/2006/main" type="vertTitleAndTx" preserve="1">
   <p:cSld name="Vertical Title and Text">
     <p:spTree>
@@ -1758,7 +2044,7 @@
 </p:sldLayout>
 </file>
 
-<file path=ppt/slideLayouts/slideLayout2.xml><?xml version="1.0" encoding="utf-8"?>
+<file path=ppt\slideLayouts\slideLayout2.xml><?xml version="1.0" encoding="utf-8"?>
 <p:sldLayout xmlns:a="http://schemas.openxmlformats.org/drawingml/2006/main" xmlns:r="http://schemas.openxmlformats.org/officeDocument/2006/relationships" xmlns:p="http://schemas.openxmlformats.org/presentationml/2006/main" type="obj" preserve="1">
   <p:cSld name="Title and Content">
     <p:spTree>
@@ -1928,7 +2214,7 @@
 </p:sldLayout>
 </file>
 
-<file path=ppt/slideLayouts/slideLayout3.xml><?xml version="1.0" encoding="utf-8"?>
+<file path=ppt\slideLayouts\slideLayout3.xml><?xml version="1.0" encoding="utf-8"?>
 <p:sldLayout xmlns:a="http://schemas.openxmlformats.org/drawingml/2006/main" xmlns:r="http://schemas.openxmlformats.org/officeDocument/2006/relationships" xmlns:p="http://schemas.openxmlformats.org/presentationml/2006/main" type="secHead" preserve="1">
   <p:cSld name="Section Header">
     <p:spTree>
@@ -2174,7 +2460,7 @@
 </p:sldLayout>
 </file>
 
-<file path=ppt/slideLayouts/slideLayout4.xml><?xml version="1.0" encoding="utf-8"?>
+<file path=ppt\slideLayouts\slideLayout4.xml><?xml version="1.0" encoding="utf-8"?>
 <p:sldLayout xmlns:a="http://schemas.openxmlformats.org/drawingml/2006/main" xmlns:r="http://schemas.openxmlformats.org/officeDocument/2006/relationships" xmlns:p="http://schemas.openxmlformats.org/presentationml/2006/main" type="twoObj" preserve="1">
   <p:cSld name="Two Content">
     <p:spTree>
@@ -2462,7 +2748,7 @@
 </p:sldLayout>
 </file>
 
-<file path=ppt/slideLayouts/slideLayout5.xml><?xml version="1.0" encoding="utf-8"?>
+<file path=ppt\slideLayouts\slideLayout5.xml><?xml version="1.0" encoding="utf-8"?>
 <p:sldLayout xmlns:a="http://schemas.openxmlformats.org/drawingml/2006/main" xmlns:r="http://schemas.openxmlformats.org/officeDocument/2006/relationships" xmlns:p="http://schemas.openxmlformats.org/presentationml/2006/main" type="twoTxTwoObj" preserve="1">
   <p:cSld name="Comparison">
     <p:spTree>
@@ -2884,7 +3170,7 @@
 </p:sldLayout>
 </file>
 
-<file path=ppt/slideLayouts/slideLayout6.xml><?xml version="1.0" encoding="utf-8"?>
+<file path=ppt\slideLayouts\slideLayout6.xml><?xml version="1.0" encoding="utf-8"?>
 <p:sldLayout xmlns:a="http://schemas.openxmlformats.org/drawingml/2006/main" xmlns:r="http://schemas.openxmlformats.org/officeDocument/2006/relationships" xmlns:p="http://schemas.openxmlformats.org/presentationml/2006/main" type="titleOnly" preserve="1">
   <p:cSld name="Title Only">
     <p:spTree>
@@ -3002,7 +3288,7 @@
 </p:sldLayout>
 </file>
 
-<file path=ppt/slideLayouts/slideLayout7.xml><?xml version="1.0" encoding="utf-8"?>
+<file path=ppt\slideLayouts\slideLayout7.xml><?xml version="1.0" encoding="utf-8"?>
 <p:sldLayout xmlns:a="http://schemas.openxmlformats.org/drawingml/2006/main" xmlns:r="http://schemas.openxmlformats.org/officeDocument/2006/relationships" xmlns:p="http://schemas.openxmlformats.org/presentationml/2006/main" type="blank" preserve="1">
   <p:cSld name="Blank">
     <p:spTree>
@@ -3097,7 +3383,7 @@
 </p:sldLayout>
 </file>
 
-<file path=ppt/slideLayouts/slideLayout8.xml><?xml version="1.0" encoding="utf-8"?>
+<file path=ppt\slideLayouts\slideLayout8.xml><?xml version="1.0" encoding="utf-8"?>
 <p:sldLayout xmlns:a="http://schemas.openxmlformats.org/drawingml/2006/main" xmlns:r="http://schemas.openxmlformats.org/officeDocument/2006/relationships" xmlns:p="http://schemas.openxmlformats.org/presentationml/2006/main" type="objTx" preserve="1">
   <p:cSld name="Content with Caption">
     <p:spTree>
@@ -3374,7 +3660,7 @@
 </p:sldLayout>
 </file>
 
-<file path=ppt/slideLayouts/slideLayout9.xml><?xml version="1.0" encoding="utf-8"?>
+<file path=ppt\slideLayouts\slideLayout9.xml><?xml version="1.0" encoding="utf-8"?>
 <p:sldLayout xmlns:a="http://schemas.openxmlformats.org/drawingml/2006/main" xmlns:r="http://schemas.openxmlformats.org/officeDocument/2006/relationships" xmlns:p="http://schemas.openxmlformats.org/presentationml/2006/main" type="picTx" preserve="1">
   <p:cSld name="Picture with Caption">
     <p:spTree>
@@ -3627,7 +3913,7 @@
 </p:sldLayout>
 </file>
 
-<file path=ppt/slideMasters/slideMaster1.xml><?xml version="1.0" encoding="utf-8"?>
+<file path=ppt\slideMasters\slideMaster1.xml><?xml version="1.0" encoding="utf-8"?>
 <p:sldMaster xmlns:a="http://schemas.openxmlformats.org/drawingml/2006/main" xmlns:r="http://schemas.openxmlformats.org/officeDocument/2006/relationships" xmlns:p="http://schemas.openxmlformats.org/presentationml/2006/main">
   <p:cSld>
     <p:bg>
@@ -4137,7 +4423,7 @@
 </p:sldMaster>
 </file>
 
-<file path=ppt/slides/slide1.xml><?xml version="1.0" encoding="utf-8"?>
+<file path=ppt\slides\slide1.xml><?xml version="1.0" encoding="utf-8"?>
 <p:sld xmlns:a="http://schemas.openxmlformats.org/drawingml/2006/main" xmlns:p="http://schemas.openxmlformats.org/presentationml/2006/main" xmlns:r="http://schemas.openxmlformats.org/officeDocument/2006/relationships">
   <p:cSld>
     <p:spTree>
@@ -4569,6 +4855,77 @@
           </a:p>
         </p:txBody>
       </p:sp>
+      <p:sp>
+        <p:nvSpPr>
+          <p:cNvPr id="10" name="Rounded Rectangle 9"/>
+          <p:cNvSpPr/>
+          <p:nvPr/>
+        </p:nvSpPr>
+        <p:spPr>
+          <a:xfrm>
+            <a:off x="868680" y="4315968"/>
+            <a:ext cx="10451592" cy="603504"/>
+          </a:xfrm>
+          <a:prstGeom prst="roundRect">
+            <a:avLst/>
+          </a:prstGeom>
+          <a:solidFill>
+            <a:srgbClr val="2A1F18"/>
+          </a:solidFill>
+          <a:ln w="12700">
+            <a:solidFill>
+              <a:srgbClr val="D97742"/>
+            </a:solidFill>
+          </a:ln>
+        </p:spPr>
+        <p:style>
+          <a:lnRef idx="1">
+            <a:schemeClr val="accent1"/>
+          </a:lnRef>
+          <a:fillRef idx="3">
+            <a:schemeClr val="accent1"/>
+          </a:fillRef>
+          <a:effectRef idx="2">
+            <a:schemeClr val="accent1"/>
+          </a:effectRef>
+          <a:fontRef idx="minor">
+            <a:schemeClr val="lt1"/>
+          </a:fontRef>
+        </p:style>
+        <p:txBody>
+          <a:bodyPr rtlCol="0" anchor="ctr" wrap="square" lIns="164592" rIns="164592" tIns="36576" bIns="36576"/>
+          <a:lstStyle/>
+          <a:p>
+            <a:pPr algn="ctr"/>
+            <a:r>
+              <a:rPr b="1" sz="1200">
+                <a:solidFill>
+                  <a:srgbClr val="D97742"/>
+                </a:solidFill>
+              </a:rPr>
+              <a:t>JUDGES — TRY IT NOW   </a:t>
+            </a:r>
+            <a:r>
+              <a:rPr b="1" sz="1200">
+                <a:solidFill>
+                  <a:srgbClr val="FAF4EC"/>
+                </a:solidFill>
+              </a:rPr>
+              <a:t>workitsa.co.za</a:t>
+            </a:r>
+          </a:p>
+          <a:p>
+            <a:r>
+              <a:rPr sz="1050">
+                <a:solidFill>
+                  <a:srgbClr val="F5DBB5"/>
+                </a:solidFill>
+              </a:rPr>
+              <a:t>Employer  judges2610@gmail.com      Worker  judges2610+worker@gmail.com      password  Judges2026</a:t>
+            </a:r>
+          </a:p>
+        </p:txBody>
+      </p:sp>
     </p:spTree>
   </p:cSld>
   <p:clrMapOvr>
@@ -4577,7 +4934,7 @@
 </p:sld>
 </file>
 
-<file path=ppt/slides/slide10.xml><?xml version="1.0" encoding="utf-8"?>
+<file path=ppt\slides\slide10.xml><?xml version="1.0" encoding="utf-8"?>
 <p:sld xmlns:a="http://schemas.openxmlformats.org/drawingml/2006/main" xmlns:p="http://schemas.openxmlformats.org/presentationml/2006/main" xmlns:r="http://schemas.openxmlformats.org/officeDocument/2006/relationships">
   <p:cSld>
     <p:spTree>
@@ -4602,7 +4959,7 @@
             <a:avLst/>
           </a:prstGeom>
           <a:solidFill>
-            <a:srgbClr val="1F1612"/>
+            <a:srgbClr val="FAF4EC"/>
           </a:solidFill>
           <a:ln>
             <a:noFill/>
@@ -4639,8 +4996,8 @@
         </p:nvSpPr>
         <p:spPr>
           <a:xfrm>
-            <a:off x="0" y="0"/>
-            <a:ext cx="320040" cy="6858000"/>
+            <a:off x="548640" y="566928"/>
+            <a:ext cx="457200" cy="82296"/>
           </a:xfrm>
           <a:prstGeom prst="rect">
             <a:avLst/>
@@ -4677,58 +5034,14 @@
       </p:sp>
       <p:sp>
         <p:nvSpPr>
-          <p:cNvPr id="4" name="Rectangle 3"/>
-          <p:cNvSpPr/>
-          <p:nvPr/>
-        </p:nvSpPr>
-        <p:spPr>
-          <a:xfrm>
-            <a:off x="0" y="5852160"/>
-            <a:ext cx="12191695" cy="54864"/>
-          </a:xfrm>
-          <a:prstGeom prst="rect">
-            <a:avLst/>
-          </a:prstGeom>
-          <a:solidFill>
-            <a:srgbClr val="D97742"/>
-          </a:solidFill>
-          <a:ln>
-            <a:noFill/>
-          </a:ln>
-          <a:effectLst/>
-        </p:spPr>
-        <p:style>
-          <a:lnRef idx="1">
-            <a:schemeClr val="accent1"/>
-          </a:lnRef>
-          <a:fillRef idx="3">
-            <a:schemeClr val="accent1"/>
-          </a:fillRef>
-          <a:effectRef idx="2">
-            <a:schemeClr val="accent1"/>
-          </a:effectRef>
-          <a:fontRef idx="minor">
-            <a:schemeClr val="lt1"/>
-          </a:fontRef>
-        </p:style>
-        <p:txBody>
-          <a:bodyPr rtlCol="0" anchor="ctr"/>
-          <a:lstStyle/>
-          <a:p>
-            <a:pPr algn="ctr"/>
-          </a:p>
-        </p:txBody>
-      </p:sp>
-      <p:sp>
-        <p:nvSpPr>
-          <p:cNvPr id="5" name="TextBox 4"/>
+          <p:cNvPr id="4" name="TextBox 3"/>
           <p:cNvSpPr txBox="1"/>
           <p:nvPr/>
         </p:nvSpPr>
         <p:spPr>
           <a:xfrm>
-            <a:off x="548640" y="566928"/>
-            <a:ext cx="5486400" cy="365760"/>
+            <a:off x="548640" y="713232"/>
+            <a:ext cx="10058400" cy="365760"/>
           </a:xfrm>
           <a:prstGeom prst="rect">
             <a:avLst/>
@@ -4755,24 +5068,24 @@
             <a:r>
               <a:rPr sz="1500" b="1" i="0">
                 <a:solidFill>
-                  <a:srgbClr val="D97742"/>
-                </a:solidFill>
-                <a:latin typeface="Calibri"/>
-              </a:rPr>
-              <a:t>IMPACT &amp; VISION</a:t>
-            </a:r>
-          </a:p>
-        </p:txBody>
-      </p:sp>
-      <p:sp>
-        <p:nvSpPr>
-          <p:cNvPr id="6" name="TextBox 5"/>
+                  <a:srgbClr val="B45A2C"/>
+                </a:solidFill>
+                <a:latin typeface="Calibri"/>
+              </a:rPr>
+              <a:t>ARCHITECTURE &amp; SECURITY</a:t>
+            </a:r>
+          </a:p>
+        </p:txBody>
+      </p:sp>
+      <p:sp>
+        <p:nvSpPr>
+          <p:cNvPr id="5" name="TextBox 4"/>
           <p:cNvSpPr txBox="1"/>
           <p:nvPr/>
         </p:nvSpPr>
         <p:spPr>
           <a:xfrm>
-            <a:off x="548640" y="960120"/>
+            <a:off x="548640" y="1024128"/>
             <a:ext cx="11064240" cy="1097280"/>
           </a:xfrm>
           <a:prstGeom prst="rect">
@@ -4800,6 +5113,1914 @@
             <a:r>
               <a:rPr sz="3000" b="1" i="0">
                 <a:solidFill>
+                  <a:srgbClr val="1F1612"/>
+                </a:solidFill>
+                <a:latin typeface="Calibri"/>
+              </a:rPr>
+              <a:t>Built secure, built for South Africa.</a:t>
+            </a:r>
+          </a:p>
+        </p:txBody>
+      </p:sp>
+      <p:sp>
+        <p:nvSpPr>
+          <p:cNvPr id="6" name="TextBox 5"/>
+          <p:cNvSpPr txBox="1"/>
+          <p:nvPr/>
+        </p:nvSpPr>
+        <p:spPr>
+          <a:xfrm>
+            <a:off x="548640" y="1783080"/>
+            <a:ext cx="5486400" cy="365760"/>
+          </a:xfrm>
+          <a:prstGeom prst="rect">
+            <a:avLst/>
+          </a:prstGeom>
+          <a:noFill/>
+        </p:spPr>
+        <p:txBody>
+          <a:bodyPr wrap="square" anchor="t">
+            <a:spAutoFit/>
+          </a:bodyPr>
+          <a:lstStyle/>
+          <a:p>
+            <a:pPr algn="l">
+              <a:lnSpc>
+                <a:spcPct val="105000"/>
+              </a:lnSpc>
+              <a:spcBef>
+                <a:spcPts val="0"/>
+              </a:spcBef>
+              <a:spcAft>
+                <a:spcPts val="600"/>
+              </a:spcAft>
+            </a:pPr>
+            <a:r>
+              <a:rPr sz="1600" b="1" i="0">
+                <a:solidFill>
+                  <a:srgbClr val="B45A2C"/>
+                </a:solidFill>
+                <a:latin typeface="Calibri"/>
+              </a:rPr>
+              <a:t>Technical architecture</a:t>
+            </a:r>
+          </a:p>
+        </p:txBody>
+      </p:sp>
+      <p:sp>
+        <p:nvSpPr>
+          <p:cNvPr id="7" name="Rounded Rectangle 6"/>
+          <p:cNvSpPr/>
+          <p:nvPr/>
+        </p:nvSpPr>
+        <p:spPr>
+          <a:xfrm>
+            <a:off x="548640" y="2240280"/>
+            <a:ext cx="5212080" cy="457200"/>
+          </a:xfrm>
+          <a:prstGeom prst="roundRect">
+            <a:avLst/>
+          </a:prstGeom>
+          <a:solidFill>
+            <a:srgbClr val="F5DBB5"/>
+          </a:solidFill>
+          <a:ln>
+            <a:noFill/>
+          </a:ln>
+          <a:effectLst/>
+        </p:spPr>
+        <p:style>
+          <a:lnRef idx="1">
+            <a:schemeClr val="accent1"/>
+          </a:lnRef>
+          <a:fillRef idx="3">
+            <a:schemeClr val="accent1"/>
+          </a:fillRef>
+          <a:effectRef idx="2">
+            <a:schemeClr val="accent1"/>
+          </a:effectRef>
+          <a:fontRef idx="minor">
+            <a:schemeClr val="lt1"/>
+          </a:fontRef>
+        </p:style>
+        <p:txBody>
+          <a:bodyPr rtlCol="0" anchor="ctr"/>
+          <a:lstStyle/>
+          <a:p>
+            <a:pPr algn="ctr"/>
+          </a:p>
+        </p:txBody>
+      </p:sp>
+      <p:sp>
+        <p:nvSpPr>
+          <p:cNvPr id="8" name="TextBox 7"/>
+          <p:cNvSpPr txBox="1"/>
+          <p:nvPr/>
+        </p:nvSpPr>
+        <p:spPr>
+          <a:xfrm>
+            <a:off x="731520" y="2240280"/>
+            <a:ext cx="4937760" cy="457200"/>
+          </a:xfrm>
+          <a:prstGeom prst="rect">
+            <a:avLst/>
+          </a:prstGeom>
+          <a:noFill/>
+        </p:spPr>
+        <p:txBody>
+          <a:bodyPr wrap="square" anchor="ctr">
+            <a:spAutoFit/>
+          </a:bodyPr>
+          <a:lstStyle/>
+          <a:p>
+            <a:pPr algn="l">
+              <a:lnSpc>
+                <a:spcPct val="105000"/>
+              </a:lnSpc>
+              <a:spcBef>
+                <a:spcPts val="0"/>
+              </a:spcBef>
+              <a:spcAft>
+                <a:spcPts val="600"/>
+              </a:spcAft>
+            </a:pPr>
+            <a:r>
+              <a:rPr sz="1300" b="1" i="0">
+                <a:solidFill>
+                  <a:srgbClr val="1F1612"/>
+                </a:solidFill>
+                <a:latin typeface="Calibri"/>
+              </a:rPr>
+              <a:t>Next.js PWA (static export)</a:t>
+            </a:r>
+          </a:p>
+        </p:txBody>
+      </p:sp>
+      <p:sp>
+        <p:nvSpPr>
+          <p:cNvPr id="9" name="Rounded Rectangle 8"/>
+          <p:cNvSpPr/>
+          <p:nvPr/>
+        </p:nvSpPr>
+        <p:spPr>
+          <a:xfrm>
+            <a:off x="548640" y="2807208"/>
+            <a:ext cx="5212080" cy="457200"/>
+          </a:xfrm>
+          <a:prstGeom prst="roundRect">
+            <a:avLst/>
+          </a:prstGeom>
+          <a:solidFill>
+            <a:srgbClr val="F5DBB5"/>
+          </a:solidFill>
+          <a:ln>
+            <a:noFill/>
+          </a:ln>
+          <a:effectLst/>
+        </p:spPr>
+        <p:style>
+          <a:lnRef idx="1">
+            <a:schemeClr val="accent1"/>
+          </a:lnRef>
+          <a:fillRef idx="3">
+            <a:schemeClr val="accent1"/>
+          </a:fillRef>
+          <a:effectRef idx="2">
+            <a:schemeClr val="accent1"/>
+          </a:effectRef>
+          <a:fontRef idx="minor">
+            <a:schemeClr val="lt1"/>
+          </a:fontRef>
+        </p:style>
+        <p:txBody>
+          <a:bodyPr rtlCol="0" anchor="ctr"/>
+          <a:lstStyle/>
+          <a:p>
+            <a:pPr algn="ctr"/>
+          </a:p>
+        </p:txBody>
+      </p:sp>
+      <p:sp>
+        <p:nvSpPr>
+          <p:cNvPr id="10" name="TextBox 9"/>
+          <p:cNvSpPr txBox="1"/>
+          <p:nvPr/>
+        </p:nvSpPr>
+        <p:spPr>
+          <a:xfrm>
+            <a:off x="731520" y="2807208"/>
+            <a:ext cx="4937760" cy="457200"/>
+          </a:xfrm>
+          <a:prstGeom prst="rect">
+            <a:avLst/>
+          </a:prstGeom>
+          <a:noFill/>
+        </p:spPr>
+        <p:txBody>
+          <a:bodyPr wrap="square" anchor="ctr">
+            <a:spAutoFit/>
+          </a:bodyPr>
+          <a:lstStyle/>
+          <a:p>
+            <a:pPr algn="l">
+              <a:lnSpc>
+                <a:spcPct val="105000"/>
+              </a:lnSpc>
+              <a:spcBef>
+                <a:spcPts val="0"/>
+              </a:spcBef>
+              <a:spcAft>
+                <a:spcPts val="600"/>
+              </a:spcAft>
+            </a:pPr>
+            <a:r>
+              <a:rPr sz="1300" b="1" i="0">
+                <a:solidFill>
+                  <a:srgbClr val="1F1612"/>
+                </a:solidFill>
+                <a:latin typeface="Calibri"/>
+              </a:rPr>
+              <a:t>Firebase Auth — phone OTP / email / Google</a:t>
+            </a:r>
+          </a:p>
+        </p:txBody>
+      </p:sp>
+      <p:sp>
+        <p:nvSpPr>
+          <p:cNvPr id="11" name="Rounded Rectangle 10"/>
+          <p:cNvSpPr/>
+          <p:nvPr/>
+        </p:nvSpPr>
+        <p:spPr>
+          <a:xfrm>
+            <a:off x="548640" y="3374136"/>
+            <a:ext cx="5212080" cy="457200"/>
+          </a:xfrm>
+          <a:prstGeom prst="roundRect">
+            <a:avLst/>
+          </a:prstGeom>
+          <a:solidFill>
+            <a:srgbClr val="F5DBB5"/>
+          </a:solidFill>
+          <a:ln>
+            <a:noFill/>
+          </a:ln>
+          <a:effectLst/>
+        </p:spPr>
+        <p:style>
+          <a:lnRef idx="1">
+            <a:schemeClr val="accent1"/>
+          </a:lnRef>
+          <a:fillRef idx="3">
+            <a:schemeClr val="accent1"/>
+          </a:fillRef>
+          <a:effectRef idx="2">
+            <a:schemeClr val="accent1"/>
+          </a:effectRef>
+          <a:fontRef idx="minor">
+            <a:schemeClr val="lt1"/>
+          </a:fontRef>
+        </p:style>
+        <p:txBody>
+          <a:bodyPr rtlCol="0" anchor="ctr"/>
+          <a:lstStyle/>
+          <a:p>
+            <a:pPr algn="ctr"/>
+          </a:p>
+        </p:txBody>
+      </p:sp>
+      <p:sp>
+        <p:nvSpPr>
+          <p:cNvPr id="12" name="TextBox 11"/>
+          <p:cNvSpPr txBox="1"/>
+          <p:nvPr/>
+        </p:nvSpPr>
+        <p:spPr>
+          <a:xfrm>
+            <a:off x="731520" y="3374136"/>
+            <a:ext cx="4937760" cy="457200"/>
+          </a:xfrm>
+          <a:prstGeom prst="rect">
+            <a:avLst/>
+          </a:prstGeom>
+          <a:noFill/>
+        </p:spPr>
+        <p:txBody>
+          <a:bodyPr wrap="square" anchor="ctr">
+            <a:spAutoFit/>
+          </a:bodyPr>
+          <a:lstStyle/>
+          <a:p>
+            <a:pPr algn="l">
+              <a:lnSpc>
+                <a:spcPct val="105000"/>
+              </a:lnSpc>
+              <a:spcBef>
+                <a:spcPts val="0"/>
+              </a:spcBef>
+              <a:spcAft>
+                <a:spcPts val="600"/>
+              </a:spcAft>
+            </a:pPr>
+            <a:r>
+              <a:rPr sz="1300" b="1" i="0">
+                <a:solidFill>
+                  <a:srgbClr val="1F1612"/>
+                </a:solidFill>
+                <a:latin typeface="Calibri"/>
+              </a:rPr>
+              <a:t>Firestore + Cloud Storage</a:t>
+            </a:r>
+          </a:p>
+        </p:txBody>
+      </p:sp>
+      <p:sp>
+        <p:nvSpPr>
+          <p:cNvPr id="13" name="Rounded Rectangle 12"/>
+          <p:cNvSpPr/>
+          <p:nvPr/>
+        </p:nvSpPr>
+        <p:spPr>
+          <a:xfrm>
+            <a:off x="548640" y="3941064"/>
+            <a:ext cx="5212080" cy="457200"/>
+          </a:xfrm>
+          <a:prstGeom prst="roundRect">
+            <a:avLst/>
+          </a:prstGeom>
+          <a:solidFill>
+            <a:srgbClr val="F5DBB5"/>
+          </a:solidFill>
+          <a:ln>
+            <a:noFill/>
+          </a:ln>
+          <a:effectLst/>
+        </p:spPr>
+        <p:style>
+          <a:lnRef idx="1">
+            <a:schemeClr val="accent1"/>
+          </a:lnRef>
+          <a:fillRef idx="3">
+            <a:schemeClr val="accent1"/>
+          </a:fillRef>
+          <a:effectRef idx="2">
+            <a:schemeClr val="accent1"/>
+          </a:effectRef>
+          <a:fontRef idx="minor">
+            <a:schemeClr val="lt1"/>
+          </a:fontRef>
+        </p:style>
+        <p:txBody>
+          <a:bodyPr rtlCol="0" anchor="ctr"/>
+          <a:lstStyle/>
+          <a:p>
+            <a:pPr algn="ctr"/>
+          </a:p>
+        </p:txBody>
+      </p:sp>
+      <p:sp>
+        <p:nvSpPr>
+          <p:cNvPr id="14" name="TextBox 13"/>
+          <p:cNvSpPr txBox="1"/>
+          <p:nvPr/>
+        </p:nvSpPr>
+        <p:spPr>
+          <a:xfrm>
+            <a:off x="731520" y="3941064"/>
+            <a:ext cx="4937760" cy="457200"/>
+          </a:xfrm>
+          <a:prstGeom prst="rect">
+            <a:avLst/>
+          </a:prstGeom>
+          <a:noFill/>
+        </p:spPr>
+        <p:txBody>
+          <a:bodyPr wrap="square" anchor="ctr">
+            <a:spAutoFit/>
+          </a:bodyPr>
+          <a:lstStyle/>
+          <a:p>
+            <a:pPr algn="l">
+              <a:lnSpc>
+                <a:spcPct val="105000"/>
+              </a:lnSpc>
+              <a:spcBef>
+                <a:spcPts val="0"/>
+              </a:spcBef>
+              <a:spcAft>
+                <a:spcPts val="600"/>
+              </a:spcAft>
+            </a:pPr>
+            <a:r>
+              <a:rPr sz="1300" b="1" i="0">
+                <a:solidFill>
+                  <a:srgbClr val="1F1612"/>
+                </a:solidFill>
+                <a:latin typeface="Calibri"/>
+              </a:rPr>
+              <a:t>Cloud Functions (africa-south1)</a:t>
+            </a:r>
+          </a:p>
+        </p:txBody>
+      </p:sp>
+      <p:sp>
+        <p:nvSpPr>
+          <p:cNvPr id="15" name="Rounded Rectangle 14"/>
+          <p:cNvSpPr/>
+          <p:nvPr/>
+        </p:nvSpPr>
+        <p:spPr>
+          <a:xfrm>
+            <a:off x="548640" y="4507992"/>
+            <a:ext cx="5212080" cy="457200"/>
+          </a:xfrm>
+          <a:prstGeom prst="roundRect">
+            <a:avLst/>
+          </a:prstGeom>
+          <a:solidFill>
+            <a:srgbClr val="F5DBB5"/>
+          </a:solidFill>
+          <a:ln>
+            <a:noFill/>
+          </a:ln>
+          <a:effectLst/>
+        </p:spPr>
+        <p:style>
+          <a:lnRef idx="1">
+            <a:schemeClr val="accent1"/>
+          </a:lnRef>
+          <a:fillRef idx="3">
+            <a:schemeClr val="accent1"/>
+          </a:fillRef>
+          <a:effectRef idx="2">
+            <a:schemeClr val="accent1"/>
+          </a:effectRef>
+          <a:fontRef idx="minor">
+            <a:schemeClr val="lt1"/>
+          </a:fontRef>
+        </p:style>
+        <p:txBody>
+          <a:bodyPr rtlCol="0" anchor="ctr"/>
+          <a:lstStyle/>
+          <a:p>
+            <a:pPr algn="ctr"/>
+          </a:p>
+        </p:txBody>
+      </p:sp>
+      <p:sp>
+        <p:nvSpPr>
+          <p:cNvPr id="16" name="TextBox 15"/>
+          <p:cNvSpPr txBox="1"/>
+          <p:nvPr/>
+        </p:nvSpPr>
+        <p:spPr>
+          <a:xfrm>
+            <a:off x="731520" y="4507992"/>
+            <a:ext cx="4937760" cy="457200"/>
+          </a:xfrm>
+          <a:prstGeom prst="rect">
+            <a:avLst/>
+          </a:prstGeom>
+          <a:noFill/>
+        </p:spPr>
+        <p:txBody>
+          <a:bodyPr wrap="square" anchor="ctr">
+            <a:spAutoFit/>
+          </a:bodyPr>
+          <a:lstStyle/>
+          <a:p>
+            <a:pPr algn="l">
+              <a:lnSpc>
+                <a:spcPct val="105000"/>
+              </a:lnSpc>
+              <a:spcBef>
+                <a:spcPts val="0"/>
+              </a:spcBef>
+              <a:spcAft>
+                <a:spcPts val="600"/>
+              </a:spcAft>
+            </a:pPr>
+            <a:r>
+              <a:rPr sz="1300" b="1" i="0">
+                <a:solidFill>
+                  <a:srgbClr val="1F1612"/>
+                </a:solidFill>
+                <a:latin typeface="Calibri"/>
+              </a:rPr>
+              <a:t>FCM push · WhatsApp Cloud API · Gemini</a:t>
+            </a:r>
+          </a:p>
+        </p:txBody>
+      </p:sp>
+      <p:sp>
+        <p:nvSpPr>
+          <p:cNvPr id="17" name="Rounded Rectangle 16"/>
+          <p:cNvSpPr/>
+          <p:nvPr/>
+        </p:nvSpPr>
+        <p:spPr>
+          <a:xfrm>
+            <a:off x="548640" y="5303520"/>
+            <a:ext cx="3355848" cy="329184"/>
+          </a:xfrm>
+          <a:prstGeom prst="roundRect">
+            <a:avLst/>
+          </a:prstGeom>
+          <a:solidFill>
+            <a:srgbClr val="2F8F83"/>
+          </a:solidFill>
+          <a:ln>
+            <a:noFill/>
+          </a:ln>
+          <a:effectLst/>
+        </p:spPr>
+        <p:style>
+          <a:lnRef idx="1">
+            <a:schemeClr val="accent1"/>
+          </a:lnRef>
+          <a:fillRef idx="3">
+            <a:schemeClr val="accent1"/>
+          </a:fillRef>
+          <a:effectRef idx="2">
+            <a:schemeClr val="accent1"/>
+          </a:effectRef>
+          <a:fontRef idx="minor">
+            <a:schemeClr val="lt1"/>
+          </a:fontRef>
+        </p:style>
+        <p:txBody>
+          <a:bodyPr rtlCol="0" anchor="ctr" wrap="none" tIns="18288" bIns="18288"/>
+          <a:lstStyle/>
+          <a:p>
+            <a:pPr algn="ctr"/>
+            <a:r>
+              <a:rPr sz="1200" b="1">
+                <a:solidFill>
+                  <a:srgbClr val="FFFFFF"/>
+                </a:solidFill>
+                <a:latin typeface="Calibri"/>
+              </a:rPr>
+              <a:t>All data resident in africa-south1</a:t>
+            </a:r>
+          </a:p>
+        </p:txBody>
+      </p:sp>
+      <p:sp>
+        <p:nvSpPr>
+          <p:cNvPr id="18" name="TextBox 17"/>
+          <p:cNvSpPr txBox="1"/>
+          <p:nvPr/>
+        </p:nvSpPr>
+        <p:spPr>
+          <a:xfrm>
+            <a:off x="6309360" y="1783080"/>
+            <a:ext cx="5486400" cy="365760"/>
+          </a:xfrm>
+          <a:prstGeom prst="rect">
+            <a:avLst/>
+          </a:prstGeom>
+          <a:noFill/>
+        </p:spPr>
+        <p:txBody>
+          <a:bodyPr wrap="square" anchor="t">
+            <a:spAutoFit/>
+          </a:bodyPr>
+          <a:lstStyle/>
+          <a:p>
+            <a:pPr algn="l">
+              <a:lnSpc>
+                <a:spcPct val="105000"/>
+              </a:lnSpc>
+              <a:spcBef>
+                <a:spcPts val="0"/>
+              </a:spcBef>
+              <a:spcAft>
+                <a:spcPts val="600"/>
+              </a:spcAft>
+            </a:pPr>
+            <a:r>
+              <a:rPr sz="1600" b="1" i="0">
+                <a:solidFill>
+                  <a:srgbClr val="B45A2C"/>
+                </a:solidFill>
+                <a:latin typeface="Calibri"/>
+              </a:rPr>
+              <a:t>Security &amp; compliance</a:t>
+            </a:r>
+          </a:p>
+        </p:txBody>
+      </p:sp>
+      <p:sp>
+        <p:nvSpPr>
+          <p:cNvPr id="19" name="TextBox 18"/>
+          <p:cNvSpPr txBox="1"/>
+          <p:nvPr/>
+        </p:nvSpPr>
+        <p:spPr>
+          <a:xfrm>
+            <a:off x="6309360" y="2240280"/>
+            <a:ext cx="5303520" cy="4572000"/>
+          </a:xfrm>
+          <a:prstGeom prst="rect">
+            <a:avLst/>
+          </a:prstGeom>
+          <a:noFill/>
+        </p:spPr>
+        <p:txBody>
+          <a:bodyPr wrap="square" anchor="t">
+            <a:spAutoFit/>
+          </a:bodyPr>
+          <a:lstStyle/>
+          <a:p>
+            <a:pPr algn="l">
+              <a:lnSpc>
+                <a:spcPct val="104000"/>
+              </a:lnSpc>
+              <a:spcBef>
+                <a:spcPts val="0"/>
+              </a:spcBef>
+              <a:spcAft>
+                <a:spcPts val="900"/>
+              </a:spcAft>
+            </a:pPr>
+            <a:r>
+              <a:rPr sz="1350" b="1" i="0">
+                <a:solidFill>
+                  <a:srgbClr val="A93226"/>
+                </a:solidFill>
+                <a:latin typeface="Calibri"/>
+              </a:rPr>
+              <a:t>▸  </a:t>
+            </a:r>
+            <a:r>
+              <a:rPr sz="1350" b="0" i="0">
+                <a:solidFill>
+                  <a:srgbClr val="4A3A30"/>
+                </a:solidFill>
+                <a:latin typeface="Calibri"/>
+              </a:rPr>
+              <a:t>TOTP MFA enforced for all admins</a:t>
+            </a:r>
+          </a:p>
+          <a:p>
+            <a:pPr algn="l">
+              <a:lnSpc>
+                <a:spcPct val="104000"/>
+              </a:lnSpc>
+              <a:spcBef>
+                <a:spcPts val="0"/>
+              </a:spcBef>
+              <a:spcAft>
+                <a:spcPts val="900"/>
+              </a:spcAft>
+            </a:pPr>
+            <a:r>
+              <a:rPr sz="1350" b="1" i="0">
+                <a:solidFill>
+                  <a:srgbClr val="A93226"/>
+                </a:solidFill>
+                <a:latin typeface="Calibri"/>
+              </a:rPr>
+              <a:t>▸  </a:t>
+            </a:r>
+            <a:r>
+              <a:rPr sz="1350" b="0" i="0">
+                <a:solidFill>
+                  <a:srgbClr val="4A3A30"/>
+                </a:solidFill>
+                <a:latin typeface="Calibri"/>
+              </a:rPr>
+              <a:t>Real-person ID verification before you can trade</a:t>
+            </a:r>
+          </a:p>
+          <a:p>
+            <a:pPr algn="l">
+              <a:lnSpc>
+                <a:spcPct val="104000"/>
+              </a:lnSpc>
+              <a:spcBef>
+                <a:spcPts val="0"/>
+              </a:spcBef>
+              <a:spcAft>
+                <a:spcPts val="900"/>
+              </a:spcAft>
+            </a:pPr>
+            <a:r>
+              <a:rPr sz="1350" b="1" i="0">
+                <a:solidFill>
+                  <a:srgbClr val="A93226"/>
+                </a:solidFill>
+                <a:latin typeface="Calibri"/>
+              </a:rPr>
+              <a:t>▸  </a:t>
+            </a:r>
+            <a:r>
+              <a:rPr sz="1350" b="0" i="0">
+                <a:solidFill>
+                  <a:srgbClr val="4A3A30"/>
+                </a:solidFill>
+                <a:latin typeface="Calibri"/>
+              </a:rPr>
+              <a:t>Firestore security rules + automated rules tests</a:t>
+            </a:r>
+          </a:p>
+          <a:p>
+            <a:pPr algn="l">
+              <a:lnSpc>
+                <a:spcPct val="104000"/>
+              </a:lnSpc>
+              <a:spcBef>
+                <a:spcPts val="0"/>
+              </a:spcBef>
+              <a:spcAft>
+                <a:spcPts val="900"/>
+              </a:spcAft>
+            </a:pPr>
+            <a:r>
+              <a:rPr sz="1350" b="1" i="0">
+                <a:solidFill>
+                  <a:srgbClr val="A93226"/>
+                </a:solidFill>
+                <a:latin typeface="Calibri"/>
+              </a:rPr>
+              <a:t>▸  </a:t>
+            </a:r>
+            <a:r>
+              <a:rPr sz="1350" b="0" i="0">
+                <a:solidFill>
+                  <a:srgbClr val="4A3A30"/>
+                </a:solidFill>
+                <a:latin typeface="Calibri"/>
+              </a:rPr>
+              <a:t>Sensitive ID docs isolated in a private subcollection</a:t>
+            </a:r>
+          </a:p>
+          <a:p>
+            <a:pPr algn="l">
+              <a:lnSpc>
+                <a:spcPct val="104000"/>
+              </a:lnSpc>
+              <a:spcBef>
+                <a:spcPts val="0"/>
+              </a:spcBef>
+              <a:spcAft>
+                <a:spcPts val="900"/>
+              </a:spcAft>
+            </a:pPr>
+            <a:r>
+              <a:rPr sz="1350" b="1" i="0">
+                <a:solidFill>
+                  <a:srgbClr val="A93226"/>
+                </a:solidFill>
+                <a:latin typeface="Calibri"/>
+              </a:rPr>
+              <a:t>▸  </a:t>
+            </a:r>
+            <a:r>
+              <a:rPr sz="1350" b="0" i="0">
+                <a:solidFill>
+                  <a:srgbClr val="4A3A30"/>
+                </a:solidFill>
+                <a:latin typeface="Calibri"/>
+              </a:rPr>
+              <a:t>HMAC-signed WhatsApp webhook (rejects forged calls)</a:t>
+            </a:r>
+          </a:p>
+          <a:p>
+            <a:pPr algn="l">
+              <a:lnSpc>
+                <a:spcPct val="104000"/>
+              </a:lnSpc>
+              <a:spcBef>
+                <a:spcPts val="0"/>
+              </a:spcBef>
+              <a:spcAft>
+                <a:spcPts val="900"/>
+              </a:spcAft>
+            </a:pPr>
+            <a:r>
+              <a:rPr sz="1350" b="1" i="0">
+                <a:solidFill>
+                  <a:srgbClr val="A93226"/>
+                </a:solidFill>
+                <a:latin typeface="Calibri"/>
+              </a:rPr>
+              <a:t>▸  </a:t>
+            </a:r>
+            <a:r>
+              <a:rPr sz="1350" b="0" i="0">
+                <a:solidFill>
+                  <a:srgbClr val="4A3A30"/>
+                </a:solidFill>
+                <a:latin typeface="Calibri"/>
+              </a:rPr>
+              <a:t>POPIA: consent, opt-in, and a documented erasure runbook</a:t>
+            </a:r>
+          </a:p>
+        </p:txBody>
+      </p:sp>
+    </p:spTree>
+  </p:cSld>
+  <p:clrMapOvr>
+    <a:masterClrMapping/>
+  </p:clrMapOvr>
+</p:sld>
+</file>
+
+<file path=ppt\slides\slide11.xml><?xml version="1.0" encoding="utf-8"?>
+<p:sld xmlns:a="http://schemas.openxmlformats.org/drawingml/2006/main" xmlns:p="http://schemas.openxmlformats.org/presentationml/2006/main" xmlns:r="http://schemas.openxmlformats.org/officeDocument/2006/relationships">
+  <p:cSld>
+    <p:spTree>
+      <p:nvGrpSpPr>
+        <p:cNvPr id="1" name=""/>
+        <p:cNvGrpSpPr/>
+        <p:nvPr/>
+      </p:nvGrpSpPr>
+      <p:grpSpPr/>
+      <p:sp>
+        <p:nvSpPr>
+          <p:cNvPr id="2" name="Rectangle 1"/>
+          <p:cNvSpPr/>
+          <p:nvPr/>
+        </p:nvSpPr>
+        <p:spPr>
+          <a:xfrm>
+            <a:off x="0" y="0"/>
+            <a:ext cx="12191695" cy="6858000"/>
+          </a:xfrm>
+          <a:prstGeom prst="rect">
+            <a:avLst/>
+          </a:prstGeom>
+          <a:solidFill>
+            <a:srgbClr val="FAF4EC"/>
+          </a:solidFill>
+          <a:ln>
+            <a:noFill/>
+          </a:ln>
+          <a:effectLst/>
+        </p:spPr>
+        <p:style>
+          <a:lnRef idx="1">
+            <a:schemeClr val="accent1"/>
+          </a:lnRef>
+          <a:fillRef idx="3">
+            <a:schemeClr val="accent1"/>
+          </a:fillRef>
+          <a:effectRef idx="2">
+            <a:schemeClr val="accent1"/>
+          </a:effectRef>
+          <a:fontRef idx="minor">
+            <a:schemeClr val="lt1"/>
+          </a:fontRef>
+        </p:style>
+        <p:txBody>
+          <a:bodyPr rtlCol="0" anchor="ctr"/>
+          <a:lstStyle/>
+          <a:p>
+            <a:pPr algn="ctr"/>
+          </a:p>
+        </p:txBody>
+      </p:sp>
+      <p:sp>
+        <p:nvSpPr>
+          <p:cNvPr id="3" name="Rectangle 2"/>
+          <p:cNvSpPr/>
+          <p:nvPr/>
+        </p:nvSpPr>
+        <p:spPr>
+          <a:xfrm>
+            <a:off x="548640" y="566928"/>
+            <a:ext cx="457200" cy="82296"/>
+          </a:xfrm>
+          <a:prstGeom prst="rect">
+            <a:avLst/>
+          </a:prstGeom>
+          <a:solidFill>
+            <a:srgbClr val="D97742"/>
+          </a:solidFill>
+          <a:ln>
+            <a:noFill/>
+          </a:ln>
+          <a:effectLst/>
+        </p:spPr>
+        <p:style>
+          <a:lnRef idx="1">
+            <a:schemeClr val="accent1"/>
+          </a:lnRef>
+          <a:fillRef idx="3">
+            <a:schemeClr val="accent1"/>
+          </a:fillRef>
+          <a:effectRef idx="2">
+            <a:schemeClr val="accent1"/>
+          </a:effectRef>
+          <a:fontRef idx="minor">
+            <a:schemeClr val="lt1"/>
+          </a:fontRef>
+        </p:style>
+        <p:txBody>
+          <a:bodyPr rtlCol="0" anchor="ctr"/>
+          <a:lstStyle/>
+          <a:p>
+            <a:pPr algn="ctr"/>
+          </a:p>
+        </p:txBody>
+      </p:sp>
+      <p:sp>
+        <p:nvSpPr>
+          <p:cNvPr id="4" name="TextBox 3"/>
+          <p:cNvSpPr txBox="1"/>
+          <p:nvPr/>
+        </p:nvSpPr>
+        <p:spPr>
+          <a:xfrm>
+            <a:off x="548640" y="713232"/>
+            <a:ext cx="10058400" cy="365760"/>
+          </a:xfrm>
+          <a:prstGeom prst="rect">
+            <a:avLst/>
+          </a:prstGeom>
+          <a:noFill/>
+        </p:spPr>
+        <p:txBody>
+          <a:bodyPr wrap="square" anchor="t">
+            <a:spAutoFit/>
+          </a:bodyPr>
+          <a:lstStyle/>
+          <a:p>
+            <a:pPr algn="l">
+              <a:lnSpc>
+                <a:spcPct val="105000"/>
+              </a:lnSpc>
+              <a:spcBef>
+                <a:spcPts val="0"/>
+              </a:spcBef>
+              <a:spcAft>
+                <a:spcPts val="600"/>
+              </a:spcAft>
+            </a:pPr>
+            <a:r>
+              <a:rPr sz="1500" b="1" i="0">
+                <a:solidFill>
+                  <a:srgbClr val="B45A2C"/>
+                </a:solidFill>
+                <a:latin typeface="Calibri"/>
+              </a:rPr>
+              <a:t>SUSTAINABILITY — PATH TO REVENUE</a:t>
+            </a:r>
+          </a:p>
+        </p:txBody>
+      </p:sp>
+      <p:sp>
+        <p:nvSpPr>
+          <p:cNvPr id="5" name="TextBox 4"/>
+          <p:cNvSpPr txBox="1"/>
+          <p:nvPr/>
+        </p:nvSpPr>
+        <p:spPr>
+          <a:xfrm>
+            <a:off x="548640" y="1024128"/>
+            <a:ext cx="11064240" cy="1097280"/>
+          </a:xfrm>
+          <a:prstGeom prst="rect">
+            <a:avLst/>
+          </a:prstGeom>
+          <a:noFill/>
+        </p:spPr>
+        <p:txBody>
+          <a:bodyPr wrap="square" anchor="t">
+            <a:spAutoFit/>
+          </a:bodyPr>
+          <a:lstStyle/>
+          <a:p>
+            <a:pPr algn="l">
+              <a:lnSpc>
+                <a:spcPct val="100000"/>
+              </a:lnSpc>
+              <a:spcBef>
+                <a:spcPts val="0"/>
+              </a:spcBef>
+              <a:spcAft>
+                <a:spcPts val="600"/>
+              </a:spcAft>
+            </a:pPr>
+            <a:r>
+              <a:rPr sz="3000" b="1" i="0">
+                <a:solidFill>
+                  <a:srgbClr val="1F1612"/>
+                </a:solidFill>
+                <a:latin typeface="Calibri"/>
+              </a:rPr>
+              <a:t>Free to grow, then a clear path to revenue.</a:t>
+            </a:r>
+          </a:p>
+        </p:txBody>
+      </p:sp>
+      <p:sp>
+        <p:nvSpPr>
+          <p:cNvPr id="6" name="Rounded Rectangle 5"/>
+          <p:cNvSpPr/>
+          <p:nvPr/>
+        </p:nvSpPr>
+        <p:spPr>
+          <a:xfrm>
+            <a:off x="548640" y="1828800"/>
+            <a:ext cx="2606040" cy="1737360"/>
+          </a:xfrm>
+          <a:prstGeom prst="roundRect">
+            <a:avLst/>
+          </a:prstGeom>
+          <a:solidFill>
+            <a:srgbClr val="1F1612"/>
+          </a:solidFill>
+          <a:ln>
+            <a:noFill/>
+          </a:ln>
+          <a:effectLst/>
+        </p:spPr>
+        <p:style>
+          <a:lnRef idx="1">
+            <a:schemeClr val="accent1"/>
+          </a:lnRef>
+          <a:fillRef idx="3">
+            <a:schemeClr val="accent1"/>
+          </a:fillRef>
+          <a:effectRef idx="2">
+            <a:schemeClr val="accent1"/>
+          </a:effectRef>
+          <a:fontRef idx="minor">
+            <a:schemeClr val="lt1"/>
+          </a:fontRef>
+        </p:style>
+        <p:txBody>
+          <a:bodyPr rtlCol="0" anchor="ctr"/>
+          <a:lstStyle/>
+          <a:p>
+            <a:pPr algn="ctr"/>
+          </a:p>
+        </p:txBody>
+      </p:sp>
+      <p:sp>
+        <p:nvSpPr>
+          <p:cNvPr id="7" name="TextBox 6"/>
+          <p:cNvSpPr txBox="1"/>
+          <p:nvPr/>
+        </p:nvSpPr>
+        <p:spPr>
+          <a:xfrm>
+            <a:off x="548640" y="1965960"/>
+            <a:ext cx="2606040" cy="1554480"/>
+          </a:xfrm>
+          <a:prstGeom prst="rect">
+            <a:avLst/>
+          </a:prstGeom>
+          <a:noFill/>
+        </p:spPr>
+        <p:txBody>
+          <a:bodyPr wrap="square" anchor="t">
+            <a:spAutoFit/>
+          </a:bodyPr>
+          <a:lstStyle/>
+          <a:p>
+            <a:pPr algn="ctr">
+              <a:lnSpc>
+                <a:spcPct val="100000"/>
+              </a:lnSpc>
+              <a:spcBef>
+                <a:spcPts val="0"/>
+              </a:spcBef>
+              <a:spcAft>
+                <a:spcPts val="300"/>
+              </a:spcAft>
+            </a:pPr>
+            <a:r>
+              <a:rPr sz="3400" b="1" i="0">
+                <a:solidFill>
+                  <a:srgbClr val="D97742"/>
+                </a:solidFill>
+                <a:latin typeface="Calibri"/>
+              </a:rPr>
+              <a:t>8%</a:t>
+            </a:r>
+          </a:p>
+          <a:p>
+            <a:pPr algn="ctr">
+              <a:lnSpc>
+                <a:spcPct val="100000"/>
+              </a:lnSpc>
+              <a:spcBef>
+                <a:spcPts val="0"/>
+              </a:spcBef>
+              <a:spcAft>
+                <a:spcPts val="300"/>
+              </a:spcAft>
+            </a:pPr>
+            <a:r>
+              <a:rPr sz="1500" b="1" i="0">
+                <a:solidFill>
+                  <a:srgbClr val="FAF4EC"/>
+                </a:solidFill>
+                <a:latin typeface="Calibri"/>
+              </a:rPr>
+              <a:t>service fee</a:t>
+            </a:r>
+          </a:p>
+          <a:p>
+            <a:pPr algn="ctr">
+              <a:lnSpc>
+                <a:spcPct val="100000"/>
+              </a:lnSpc>
+              <a:spcBef>
+                <a:spcPts val="0"/>
+              </a:spcBef>
+              <a:spcAft>
+                <a:spcPts val="300"/>
+              </a:spcAft>
+            </a:pPr>
+            <a:r>
+              <a:rPr sz="1200" b="0" i="0">
+                <a:solidFill>
+                  <a:srgbClr val="F5DBB5"/>
+                </a:solidFill>
+                <a:latin typeface="Calibri"/>
+              </a:rPr>
+              <a:t>paid by the job poster</a:t>
+            </a:r>
+          </a:p>
+        </p:txBody>
+      </p:sp>
+      <p:sp>
+        <p:nvSpPr>
+          <p:cNvPr id="8" name="Rounded Rectangle 7"/>
+          <p:cNvSpPr/>
+          <p:nvPr/>
+        </p:nvSpPr>
+        <p:spPr>
+          <a:xfrm>
+            <a:off x="3364992" y="1828800"/>
+            <a:ext cx="2606040" cy="1737360"/>
+          </a:xfrm>
+          <a:prstGeom prst="roundRect">
+            <a:avLst/>
+          </a:prstGeom>
+          <a:solidFill>
+            <a:srgbClr val="1F1612"/>
+          </a:solidFill>
+          <a:ln>
+            <a:noFill/>
+          </a:ln>
+          <a:effectLst/>
+        </p:spPr>
+        <p:style>
+          <a:lnRef idx="1">
+            <a:schemeClr val="accent1"/>
+          </a:lnRef>
+          <a:fillRef idx="3">
+            <a:schemeClr val="accent1"/>
+          </a:fillRef>
+          <a:effectRef idx="2">
+            <a:schemeClr val="accent1"/>
+          </a:effectRef>
+          <a:fontRef idx="minor">
+            <a:schemeClr val="lt1"/>
+          </a:fontRef>
+        </p:style>
+        <p:txBody>
+          <a:bodyPr rtlCol="0" anchor="ctr"/>
+          <a:lstStyle/>
+          <a:p>
+            <a:pPr algn="ctr"/>
+          </a:p>
+        </p:txBody>
+      </p:sp>
+      <p:sp>
+        <p:nvSpPr>
+          <p:cNvPr id="9" name="TextBox 8"/>
+          <p:cNvSpPr txBox="1"/>
+          <p:nvPr/>
+        </p:nvSpPr>
+        <p:spPr>
+          <a:xfrm>
+            <a:off x="3364992" y="1965960"/>
+            <a:ext cx="2606040" cy="1554480"/>
+          </a:xfrm>
+          <a:prstGeom prst="rect">
+            <a:avLst/>
+          </a:prstGeom>
+          <a:noFill/>
+        </p:spPr>
+        <p:txBody>
+          <a:bodyPr wrap="square" anchor="t">
+            <a:spAutoFit/>
+          </a:bodyPr>
+          <a:lstStyle/>
+          <a:p>
+            <a:pPr algn="ctr">
+              <a:lnSpc>
+                <a:spcPct val="100000"/>
+              </a:lnSpc>
+              <a:spcBef>
+                <a:spcPts val="0"/>
+              </a:spcBef>
+              <a:spcAft>
+                <a:spcPts val="300"/>
+              </a:spcAft>
+            </a:pPr>
+            <a:r>
+              <a:rPr sz="3400" b="1" i="0">
+                <a:solidFill>
+                  <a:srgbClr val="D97742"/>
+                </a:solidFill>
+                <a:latin typeface="Calibri"/>
+              </a:rPr>
+              <a:t>R49</a:t>
+            </a:r>
+          </a:p>
+          <a:p>
+            <a:pPr algn="ctr">
+              <a:lnSpc>
+                <a:spcPct val="100000"/>
+              </a:lnSpc>
+              <a:spcBef>
+                <a:spcPts val="0"/>
+              </a:spcBef>
+              <a:spcAft>
+                <a:spcPts val="300"/>
+              </a:spcAft>
+            </a:pPr>
+            <a:r>
+              <a:rPr sz="1500" b="1" i="0">
+                <a:solidFill>
+                  <a:srgbClr val="FAF4EC"/>
+                </a:solidFill>
+                <a:latin typeface="Calibri"/>
+              </a:rPr>
+              <a:t>Gold badge</a:t>
+            </a:r>
+          </a:p>
+          <a:p>
+            <a:pPr algn="ctr">
+              <a:lnSpc>
+                <a:spcPct val="100000"/>
+              </a:lnSpc>
+              <a:spcBef>
+                <a:spcPts val="0"/>
+              </a:spcBef>
+              <a:spcAft>
+                <a:spcPts val="300"/>
+              </a:spcAft>
+            </a:pPr>
+            <a:r>
+              <a:rPr sz="1200" b="0" i="0">
+                <a:solidFill>
+                  <a:srgbClr val="F5DBB5"/>
+                </a:solidFill>
+                <a:latin typeface="Calibri"/>
+              </a:rPr>
+              <a:t>premium verification</a:t>
+            </a:r>
+          </a:p>
+        </p:txBody>
+      </p:sp>
+      <p:sp>
+        <p:nvSpPr>
+          <p:cNvPr id="10" name="Rounded Rectangle 9"/>
+          <p:cNvSpPr/>
+          <p:nvPr/>
+        </p:nvSpPr>
+        <p:spPr>
+          <a:xfrm>
+            <a:off x="6181344" y="1828800"/>
+            <a:ext cx="2606040" cy="1737360"/>
+          </a:xfrm>
+          <a:prstGeom prst="roundRect">
+            <a:avLst/>
+          </a:prstGeom>
+          <a:solidFill>
+            <a:srgbClr val="1F1612"/>
+          </a:solidFill>
+          <a:ln>
+            <a:noFill/>
+          </a:ln>
+          <a:effectLst/>
+        </p:spPr>
+        <p:style>
+          <a:lnRef idx="1">
+            <a:schemeClr val="accent1"/>
+          </a:lnRef>
+          <a:fillRef idx="3">
+            <a:schemeClr val="accent1"/>
+          </a:fillRef>
+          <a:effectRef idx="2">
+            <a:schemeClr val="accent1"/>
+          </a:effectRef>
+          <a:fontRef idx="minor">
+            <a:schemeClr val="lt1"/>
+          </a:fontRef>
+        </p:style>
+        <p:txBody>
+          <a:bodyPr rtlCol="0" anchor="ctr"/>
+          <a:lstStyle/>
+          <a:p>
+            <a:pPr algn="ctr"/>
+          </a:p>
+        </p:txBody>
+      </p:sp>
+      <p:sp>
+        <p:nvSpPr>
+          <p:cNvPr id="11" name="TextBox 10"/>
+          <p:cNvSpPr txBox="1"/>
+          <p:nvPr/>
+        </p:nvSpPr>
+        <p:spPr>
+          <a:xfrm>
+            <a:off x="6181344" y="1965960"/>
+            <a:ext cx="2606040" cy="1554480"/>
+          </a:xfrm>
+          <a:prstGeom prst="rect">
+            <a:avLst/>
+          </a:prstGeom>
+          <a:noFill/>
+        </p:spPr>
+        <p:txBody>
+          <a:bodyPr wrap="square" anchor="t">
+            <a:spAutoFit/>
+          </a:bodyPr>
+          <a:lstStyle/>
+          <a:p>
+            <a:pPr algn="ctr">
+              <a:lnSpc>
+                <a:spcPct val="100000"/>
+              </a:lnSpc>
+              <a:spcBef>
+                <a:spcPts val="0"/>
+              </a:spcBef>
+              <a:spcAft>
+                <a:spcPts val="300"/>
+              </a:spcAft>
+            </a:pPr>
+            <a:r>
+              <a:rPr sz="3400" b="1" i="0">
+                <a:solidFill>
+                  <a:srgbClr val="D97742"/>
+                </a:solidFill>
+                <a:latin typeface="Calibri"/>
+              </a:rPr>
+              <a:t>R20</a:t>
+            </a:r>
+          </a:p>
+          <a:p>
+            <a:pPr algn="ctr">
+              <a:lnSpc>
+                <a:spcPct val="100000"/>
+              </a:lnSpc>
+              <a:spcBef>
+                <a:spcPts val="0"/>
+              </a:spcBef>
+              <a:spcAft>
+                <a:spcPts val="300"/>
+              </a:spcAft>
+            </a:pPr>
+            <a:r>
+              <a:rPr sz="1500" b="1" i="0">
+                <a:solidFill>
+                  <a:srgbClr val="FAF4EC"/>
+                </a:solidFill>
+                <a:latin typeface="Calibri"/>
+              </a:rPr>
+              <a:t>boosted post</a:t>
+            </a:r>
+          </a:p>
+          <a:p>
+            <a:pPr algn="ctr">
+              <a:lnSpc>
+                <a:spcPct val="100000"/>
+              </a:lnSpc>
+              <a:spcBef>
+                <a:spcPts val="0"/>
+              </a:spcBef>
+              <a:spcAft>
+                <a:spcPts val="300"/>
+              </a:spcAft>
+            </a:pPr>
+            <a:r>
+              <a:rPr sz="1200" b="0" i="0">
+                <a:solidFill>
+                  <a:srgbClr val="F5DBB5"/>
+                </a:solidFill>
+                <a:latin typeface="Calibri"/>
+              </a:rPr>
+              <a:t>more visibility</a:t>
+            </a:r>
+          </a:p>
+        </p:txBody>
+      </p:sp>
+      <p:sp>
+        <p:nvSpPr>
+          <p:cNvPr id="12" name="Rounded Rectangle 11"/>
+          <p:cNvSpPr/>
+          <p:nvPr/>
+        </p:nvSpPr>
+        <p:spPr>
+          <a:xfrm>
+            <a:off x="8997696" y="1828800"/>
+            <a:ext cx="2606040" cy="1737360"/>
+          </a:xfrm>
+          <a:prstGeom prst="roundRect">
+            <a:avLst/>
+          </a:prstGeom>
+          <a:solidFill>
+            <a:srgbClr val="1F1612"/>
+          </a:solidFill>
+          <a:ln>
+            <a:noFill/>
+          </a:ln>
+          <a:effectLst/>
+        </p:spPr>
+        <p:style>
+          <a:lnRef idx="1">
+            <a:schemeClr val="accent1"/>
+          </a:lnRef>
+          <a:fillRef idx="3">
+            <a:schemeClr val="accent1"/>
+          </a:fillRef>
+          <a:effectRef idx="2">
+            <a:schemeClr val="accent1"/>
+          </a:effectRef>
+          <a:fontRef idx="minor">
+            <a:schemeClr val="lt1"/>
+          </a:fontRef>
+        </p:style>
+        <p:txBody>
+          <a:bodyPr rtlCol="0" anchor="ctr"/>
+          <a:lstStyle/>
+          <a:p>
+            <a:pPr algn="ctr"/>
+          </a:p>
+        </p:txBody>
+      </p:sp>
+      <p:sp>
+        <p:nvSpPr>
+          <p:cNvPr id="13" name="TextBox 12"/>
+          <p:cNvSpPr txBox="1"/>
+          <p:nvPr/>
+        </p:nvSpPr>
+        <p:spPr>
+          <a:xfrm>
+            <a:off x="8997696" y="1965960"/>
+            <a:ext cx="2606040" cy="1554480"/>
+          </a:xfrm>
+          <a:prstGeom prst="rect">
+            <a:avLst/>
+          </a:prstGeom>
+          <a:noFill/>
+        </p:spPr>
+        <p:txBody>
+          <a:bodyPr wrap="square" anchor="t">
+            <a:spAutoFit/>
+          </a:bodyPr>
+          <a:lstStyle/>
+          <a:p>
+            <a:pPr algn="ctr">
+              <a:lnSpc>
+                <a:spcPct val="100000"/>
+              </a:lnSpc>
+              <a:spcBef>
+                <a:spcPts val="0"/>
+              </a:spcBef>
+              <a:spcAft>
+                <a:spcPts val="300"/>
+              </a:spcAft>
+            </a:pPr>
+            <a:r>
+              <a:rPr sz="3400" b="1" i="0">
+                <a:solidFill>
+                  <a:srgbClr val="D97742"/>
+                </a:solidFill>
+                <a:latin typeface="Calibri"/>
+              </a:rPr>
+              <a:t>R199</a:t>
+            </a:r>
+          </a:p>
+          <a:p>
+            <a:pPr algn="ctr">
+              <a:lnSpc>
+                <a:spcPct val="100000"/>
+              </a:lnSpc>
+              <a:spcBef>
+                <a:spcPts val="0"/>
+              </a:spcBef>
+              <a:spcAft>
+                <a:spcPts val="300"/>
+              </a:spcAft>
+            </a:pPr>
+            <a:r>
+              <a:rPr sz="1500" b="1" i="0">
+                <a:solidFill>
+                  <a:srgbClr val="FAF4EC"/>
+                </a:solidFill>
+                <a:latin typeface="Calibri"/>
+              </a:rPr>
+              <a:t>/ month</a:t>
+            </a:r>
+          </a:p>
+          <a:p>
+            <a:pPr algn="ctr">
+              <a:lnSpc>
+                <a:spcPct val="100000"/>
+              </a:lnSpc>
+              <a:spcBef>
+                <a:spcPts val="0"/>
+              </a:spcBef>
+              <a:spcAft>
+                <a:spcPts val="300"/>
+              </a:spcAft>
+            </a:pPr>
+            <a:r>
+              <a:rPr sz="1200" b="0" i="0">
+                <a:solidFill>
+                  <a:srgbClr val="F5DBB5"/>
+                </a:solidFill>
+                <a:latin typeface="Calibri"/>
+              </a:rPr>
+              <a:t>business plan</a:t>
+            </a:r>
+          </a:p>
+        </p:txBody>
+      </p:sp>
+      <p:sp>
+        <p:nvSpPr>
+          <p:cNvPr id="14" name="TextBox 13"/>
+          <p:cNvSpPr txBox="1"/>
+          <p:nvPr/>
+        </p:nvSpPr>
+        <p:spPr>
+          <a:xfrm>
+            <a:off x="548640" y="3931920"/>
+            <a:ext cx="10972800" cy="4572000"/>
+          </a:xfrm>
+          <a:prstGeom prst="rect">
+            <a:avLst/>
+          </a:prstGeom>
+          <a:noFill/>
+        </p:spPr>
+        <p:txBody>
+          <a:bodyPr wrap="square" anchor="t">
+            <a:spAutoFit/>
+          </a:bodyPr>
+          <a:lstStyle/>
+          <a:p>
+            <a:pPr algn="l">
+              <a:lnSpc>
+                <a:spcPct val="104000"/>
+              </a:lnSpc>
+              <a:spcBef>
+                <a:spcPts val="0"/>
+              </a:spcBef>
+              <a:spcAft>
+                <a:spcPts val="1100"/>
+              </a:spcAft>
+            </a:pPr>
+            <a:r>
+              <a:rPr sz="1500" b="1" i="0">
+                <a:solidFill>
+                  <a:srgbClr val="D97742"/>
+                </a:solidFill>
+                <a:latin typeface="Calibri"/>
+              </a:rPr>
+              <a:t>▸  </a:t>
+            </a:r>
+            <a:r>
+              <a:rPr sz="1500" b="1" i="0">
+                <a:solidFill>
+                  <a:srgbClr val="1F1612"/>
+                </a:solidFill>
+                <a:latin typeface="Calibri"/>
+              </a:rPr>
+              <a:t>Launch is free  </a:t>
+            </a:r>
+            <a:r>
+              <a:rPr sz="1500" b="0" i="0">
+                <a:solidFill>
+                  <a:srgbClr val="4A3A30"/>
+                </a:solidFill>
+                <a:latin typeface="Calibri"/>
+              </a:rPr>
+              <a:t>— the priority is marketplace liquidity (workers + jobs) first.</a:t>
+            </a:r>
+          </a:p>
+          <a:p>
+            <a:pPr algn="l">
+              <a:lnSpc>
+                <a:spcPct val="104000"/>
+              </a:lnSpc>
+              <a:spcBef>
+                <a:spcPts val="0"/>
+              </a:spcBef>
+              <a:spcAft>
+                <a:spcPts val="1100"/>
+              </a:spcAft>
+            </a:pPr>
+            <a:r>
+              <a:rPr sz="1500" b="1" i="0">
+                <a:solidFill>
+                  <a:srgbClr val="D97742"/>
+                </a:solidFill>
+                <a:latin typeface="Calibri"/>
+              </a:rPr>
+              <a:t>▸  </a:t>
+            </a:r>
+            <a:r>
+              <a:rPr sz="1500" b="1" i="0">
+                <a:solidFill>
+                  <a:srgbClr val="1F1612"/>
+                </a:solidFill>
+                <a:latin typeface="Calibri"/>
+              </a:rPr>
+              <a:t>Running cost ≈ R14,100 / month  </a:t>
+            </a:r>
+            <a:r>
+              <a:rPr sz="1500" b="0" i="0">
+                <a:solidFill>
+                  <a:srgbClr val="4A3A30"/>
+                </a:solidFill>
+                <a:latin typeface="Calibri"/>
+              </a:rPr>
+              <a:t>· break-even ≈ 500 completed jobs / month.</a:t>
+            </a:r>
+          </a:p>
+          <a:p>
+            <a:pPr algn="l">
+              <a:lnSpc>
+                <a:spcPct val="104000"/>
+              </a:lnSpc>
+              <a:spcBef>
+                <a:spcPts val="0"/>
+              </a:spcBef>
+              <a:spcAft>
+                <a:spcPts val="1100"/>
+              </a:spcAft>
+            </a:pPr>
+            <a:r>
+              <a:rPr sz="1500" b="1" i="0">
+                <a:solidFill>
+                  <a:srgbClr val="D97742"/>
+                </a:solidFill>
+                <a:latin typeface="Calibri"/>
+              </a:rPr>
+              <a:t>▸  </a:t>
+            </a:r>
+            <a:r>
+              <a:rPr sz="1500" b="1" i="0">
+                <a:solidFill>
+                  <a:srgbClr val="1F1612"/>
+                </a:solidFill>
+                <a:latin typeface="Calibri"/>
+              </a:rPr>
+              <a:t>The moat is data.  </a:t>
+            </a:r>
+            <a:r>
+              <a:rPr sz="1500" b="0" i="0">
+                <a:solidFill>
+                  <a:srgbClr val="4A3A30"/>
+                </a:solidFill>
+                <a:latin typeface="Calibri"/>
+              </a:rPr>
+              <a:t>We own POPIA-compliant verified-worker and work-record data no feed can replicate.</a:t>
+            </a:r>
+          </a:p>
+        </p:txBody>
+      </p:sp>
+    </p:spTree>
+  </p:cSld>
+  <p:clrMapOvr>
+    <a:masterClrMapping/>
+  </p:clrMapOvr>
+</p:sld>
+</file>
+
+<file path=ppt\slides\slide12.xml><?xml version="1.0" encoding="utf-8"?>
+<p:sld xmlns:a="http://schemas.openxmlformats.org/drawingml/2006/main" xmlns:p="http://schemas.openxmlformats.org/presentationml/2006/main" xmlns:r="http://schemas.openxmlformats.org/officeDocument/2006/relationships">
+  <p:cSld>
+    <p:spTree>
+      <p:nvGrpSpPr>
+        <p:cNvPr id="1" name=""/>
+        <p:cNvGrpSpPr/>
+        <p:nvPr/>
+      </p:nvGrpSpPr>
+      <p:grpSpPr/>
+      <p:sp>
+        <p:nvSpPr>
+          <p:cNvPr id="2" name="Rectangle 1"/>
+          <p:cNvSpPr/>
+          <p:nvPr/>
+        </p:nvSpPr>
+        <p:spPr>
+          <a:xfrm>
+            <a:off x="0" y="0"/>
+            <a:ext cx="12191695" cy="6858000"/>
+          </a:xfrm>
+          <a:prstGeom prst="rect">
+            <a:avLst/>
+          </a:prstGeom>
+          <a:solidFill>
+            <a:srgbClr val="1F1612"/>
+          </a:solidFill>
+          <a:ln>
+            <a:noFill/>
+          </a:ln>
+          <a:effectLst/>
+        </p:spPr>
+        <p:style>
+          <a:lnRef idx="1">
+            <a:schemeClr val="accent1"/>
+          </a:lnRef>
+          <a:fillRef idx="3">
+            <a:schemeClr val="accent1"/>
+          </a:fillRef>
+          <a:effectRef idx="2">
+            <a:schemeClr val="accent1"/>
+          </a:effectRef>
+          <a:fontRef idx="minor">
+            <a:schemeClr val="lt1"/>
+          </a:fontRef>
+        </p:style>
+        <p:txBody>
+          <a:bodyPr rtlCol="0" anchor="ctr"/>
+          <a:lstStyle/>
+          <a:p>
+            <a:pPr algn="ctr"/>
+          </a:p>
+        </p:txBody>
+      </p:sp>
+      <p:sp>
+        <p:nvSpPr>
+          <p:cNvPr id="3" name="Rectangle 2"/>
+          <p:cNvSpPr/>
+          <p:nvPr/>
+        </p:nvSpPr>
+        <p:spPr>
+          <a:xfrm>
+            <a:off x="0" y="0"/>
+            <a:ext cx="320040" cy="6858000"/>
+          </a:xfrm>
+          <a:prstGeom prst="rect">
+            <a:avLst/>
+          </a:prstGeom>
+          <a:solidFill>
+            <a:srgbClr val="D97742"/>
+          </a:solidFill>
+          <a:ln>
+            <a:noFill/>
+          </a:ln>
+          <a:effectLst/>
+        </p:spPr>
+        <p:style>
+          <a:lnRef idx="1">
+            <a:schemeClr val="accent1"/>
+          </a:lnRef>
+          <a:fillRef idx="3">
+            <a:schemeClr val="accent1"/>
+          </a:fillRef>
+          <a:effectRef idx="2">
+            <a:schemeClr val="accent1"/>
+          </a:effectRef>
+          <a:fontRef idx="minor">
+            <a:schemeClr val="lt1"/>
+          </a:fontRef>
+        </p:style>
+        <p:txBody>
+          <a:bodyPr rtlCol="0" anchor="ctr"/>
+          <a:lstStyle/>
+          <a:p>
+            <a:pPr algn="ctr"/>
+          </a:p>
+        </p:txBody>
+      </p:sp>
+      <p:sp>
+        <p:nvSpPr>
+          <p:cNvPr id="4" name="Rectangle 3"/>
+          <p:cNvSpPr/>
+          <p:nvPr/>
+        </p:nvSpPr>
+        <p:spPr>
+          <a:xfrm>
+            <a:off x="0" y="5852160"/>
+            <a:ext cx="12191695" cy="54864"/>
+          </a:xfrm>
+          <a:prstGeom prst="rect">
+            <a:avLst/>
+          </a:prstGeom>
+          <a:solidFill>
+            <a:srgbClr val="D97742"/>
+          </a:solidFill>
+          <a:ln>
+            <a:noFill/>
+          </a:ln>
+          <a:effectLst/>
+        </p:spPr>
+        <p:style>
+          <a:lnRef idx="1">
+            <a:schemeClr val="accent1"/>
+          </a:lnRef>
+          <a:fillRef idx="3">
+            <a:schemeClr val="accent1"/>
+          </a:fillRef>
+          <a:effectRef idx="2">
+            <a:schemeClr val="accent1"/>
+          </a:effectRef>
+          <a:fontRef idx="minor">
+            <a:schemeClr val="lt1"/>
+          </a:fontRef>
+        </p:style>
+        <p:txBody>
+          <a:bodyPr rtlCol="0" anchor="ctr"/>
+          <a:lstStyle/>
+          <a:p>
+            <a:pPr algn="ctr"/>
+          </a:p>
+        </p:txBody>
+      </p:sp>
+      <p:sp>
+        <p:nvSpPr>
+          <p:cNvPr id="5" name="TextBox 4"/>
+          <p:cNvSpPr txBox="1"/>
+          <p:nvPr/>
+        </p:nvSpPr>
+        <p:spPr>
+          <a:xfrm>
+            <a:off x="548640" y="566928"/>
+            <a:ext cx="5486400" cy="365760"/>
+          </a:xfrm>
+          <a:prstGeom prst="rect">
+            <a:avLst/>
+          </a:prstGeom>
+          <a:noFill/>
+        </p:spPr>
+        <p:txBody>
+          <a:bodyPr wrap="square" anchor="t">
+            <a:spAutoFit/>
+          </a:bodyPr>
+          <a:lstStyle/>
+          <a:p>
+            <a:pPr algn="l">
+              <a:lnSpc>
+                <a:spcPct val="105000"/>
+              </a:lnSpc>
+              <a:spcBef>
+                <a:spcPts val="0"/>
+              </a:spcBef>
+              <a:spcAft>
+                <a:spcPts val="600"/>
+              </a:spcAft>
+            </a:pPr>
+            <a:r>
+              <a:rPr sz="1500" b="1" i="0">
+                <a:solidFill>
+                  <a:srgbClr val="D97742"/>
+                </a:solidFill>
+                <a:latin typeface="Calibri"/>
+              </a:rPr>
+              <a:t>IMPACT &amp; VISION</a:t>
+            </a:r>
+          </a:p>
+        </p:txBody>
+      </p:sp>
+      <p:sp>
+        <p:nvSpPr>
+          <p:cNvPr id="6" name="TextBox 5"/>
+          <p:cNvSpPr txBox="1"/>
+          <p:nvPr/>
+        </p:nvSpPr>
+        <p:spPr>
+          <a:xfrm>
+            <a:off x="548640" y="960120"/>
+            <a:ext cx="11064240" cy="1097280"/>
+          </a:xfrm>
+          <a:prstGeom prst="rect">
+            <a:avLst/>
+          </a:prstGeom>
+          <a:noFill/>
+        </p:spPr>
+        <p:txBody>
+          <a:bodyPr wrap="square" anchor="t">
+            <a:spAutoFit/>
+          </a:bodyPr>
+          <a:lstStyle/>
+          <a:p>
+            <a:pPr algn="l">
+              <a:lnSpc>
+                <a:spcPct val="100000"/>
+              </a:lnSpc>
+              <a:spcBef>
+                <a:spcPts val="0"/>
+              </a:spcBef>
+              <a:spcAft>
+                <a:spcPts val="600"/>
+              </a:spcAft>
+            </a:pPr>
+            <a:r>
+              <a:rPr sz="3000" b="1" i="0">
+                <a:solidFill>
                   <a:srgbClr val="FAF4EC"/>
                 </a:solidFill>
                 <a:latin typeface="Calibri"/>
@@ -5339,7 +7560,1990 @@
 </p:sld>
 </file>
 
-<file path=ppt/slides/slide2.xml><?xml version="1.0" encoding="utf-8"?>
+<file path=ppt\slides\slide13.xml><?xml version="1.0" encoding="utf-8"?>
+<p:sld xmlns:a="http://schemas.openxmlformats.org/drawingml/2006/main" xmlns:p="http://schemas.openxmlformats.org/presentationml/2006/main" xmlns:r="http://schemas.openxmlformats.org/officeDocument/2006/relationships">
+  <p:cSld>
+    <p:spTree>
+      <p:nvGrpSpPr>
+        <p:cNvPr id="1" name=""/>
+        <p:cNvGrpSpPr/>
+        <p:nvPr/>
+      </p:nvGrpSpPr>
+      <p:grpSpPr/>
+      <p:sp>
+        <p:nvSpPr>
+          <p:cNvPr id="2" name="Rectangle 1"/>
+          <p:cNvSpPr/>
+          <p:nvPr/>
+        </p:nvSpPr>
+        <p:spPr>
+          <a:xfrm>
+            <a:off x="0" y="0"/>
+            <a:ext cx="12191695" cy="6858000"/>
+          </a:xfrm>
+          <a:prstGeom prst="rect">
+            <a:avLst/>
+          </a:prstGeom>
+          <a:solidFill>
+            <a:srgbClr val="FAF4EC"/>
+          </a:solidFill>
+          <a:ln>
+            <a:noFill/>
+          </a:ln>
+        </p:spPr>
+        <p:style>
+          <a:lnRef idx="1">
+            <a:schemeClr val="accent1"/>
+          </a:lnRef>
+          <a:fillRef idx="3">
+            <a:schemeClr val="accent1"/>
+          </a:fillRef>
+          <a:effectRef idx="2">
+            <a:schemeClr val="accent1"/>
+          </a:effectRef>
+          <a:fontRef idx="minor">
+            <a:schemeClr val="lt1"/>
+          </a:fontRef>
+        </p:style>
+        <p:txBody>
+          <a:bodyPr rtlCol="0" anchor="ctr"/>
+          <a:lstStyle/>
+          <a:p>
+            <a:pPr algn="ctr"/>
+          </a:p>
+        </p:txBody>
+      </p:sp>
+      <p:sp>
+        <p:nvSpPr>
+          <p:cNvPr id="3" name="Rectangle 2"/>
+          <p:cNvSpPr/>
+          <p:nvPr/>
+        </p:nvSpPr>
+        <p:spPr>
+          <a:xfrm>
+            <a:off x="0" y="0"/>
+            <a:ext cx="320040" cy="6858000"/>
+          </a:xfrm>
+          <a:prstGeom prst="rect">
+            <a:avLst/>
+          </a:prstGeom>
+          <a:solidFill>
+            <a:srgbClr val="D97742"/>
+          </a:solidFill>
+          <a:ln>
+            <a:noFill/>
+          </a:ln>
+        </p:spPr>
+        <p:style>
+          <a:lnRef idx="1">
+            <a:schemeClr val="accent1"/>
+          </a:lnRef>
+          <a:fillRef idx="3">
+            <a:schemeClr val="accent1"/>
+          </a:fillRef>
+          <a:effectRef idx="2">
+            <a:schemeClr val="accent1"/>
+          </a:effectRef>
+          <a:fontRef idx="minor">
+            <a:schemeClr val="lt1"/>
+          </a:fontRef>
+        </p:style>
+        <p:txBody>
+          <a:bodyPr rtlCol="0" anchor="ctr"/>
+          <a:lstStyle/>
+          <a:p>
+            <a:pPr algn="ctr"/>
+          </a:p>
+        </p:txBody>
+      </p:sp>
+      <p:sp>
+        <p:nvSpPr>
+          <p:cNvPr id="4" name="TextBox 3"/>
+          <p:cNvSpPr txBox="1"/>
+          <p:nvPr/>
+        </p:nvSpPr>
+        <p:spPr>
+          <a:xfrm>
+            <a:off x="548640" y="502920"/>
+            <a:ext cx="7315200" cy="365760"/>
+          </a:xfrm>
+          <a:prstGeom prst="rect">
+            <a:avLst/>
+          </a:prstGeom>
+          <a:noFill/>
+        </p:spPr>
+        <p:txBody>
+          <a:bodyPr wrap="square" anchor="t">
+            <a:spAutoFit/>
+          </a:bodyPr>
+          <a:lstStyle/>
+          <a:p>
+            <a:pPr algn="l"/>
+            <a:r>
+              <a:rPr sz="1500" b="1">
+                <a:solidFill>
+                  <a:srgbClr val="D97742"/>
+                </a:solidFill>
+              </a:rPr>
+              <a:t>HOW WE SCORE</a:t>
+            </a:r>
+          </a:p>
+        </p:txBody>
+      </p:sp>
+      <p:sp>
+        <p:nvSpPr>
+          <p:cNvPr id="5" name="TextBox 4"/>
+          <p:cNvSpPr txBox="1"/>
+          <p:nvPr/>
+        </p:nvSpPr>
+        <p:spPr>
+          <a:xfrm>
+            <a:off x="548640" y="896112"/>
+            <a:ext cx="11155680" cy="822960"/>
+          </a:xfrm>
+          <a:prstGeom prst="rect">
+            <a:avLst/>
+          </a:prstGeom>
+          <a:noFill/>
+        </p:spPr>
+        <p:txBody>
+          <a:bodyPr wrap="square" anchor="t">
+            <a:spAutoFit/>
+          </a:bodyPr>
+          <a:lstStyle/>
+          <a:p>
+            <a:pPr algn="l"/>
+            <a:r>
+              <a:rPr sz="2900" b="1">
+                <a:solidFill>
+                  <a:srgbClr val="1F1612"/>
+                </a:solidFill>
+              </a:rPr>
+              <a:t>Mapped to the 7 judging criteria.</a:t>
+            </a:r>
+          </a:p>
+        </p:txBody>
+      </p:sp>
+      <p:sp>
+        <p:nvSpPr>
+          <p:cNvPr id="6" name="Rounded Rectangle 5"/>
+          <p:cNvSpPr/>
+          <p:nvPr/>
+        </p:nvSpPr>
+        <p:spPr>
+          <a:xfrm>
+            <a:off x="548640" y="1783080"/>
+            <a:ext cx="2148840" cy="512064"/>
+          </a:xfrm>
+          <a:prstGeom prst="roundRect">
+            <a:avLst/>
+          </a:prstGeom>
+          <a:solidFill>
+            <a:srgbClr val="D97742"/>
+          </a:solidFill>
+          <a:ln>
+            <a:noFill/>
+          </a:ln>
+        </p:spPr>
+        <p:style>
+          <a:lnRef idx="1">
+            <a:schemeClr val="accent1"/>
+          </a:lnRef>
+          <a:fillRef idx="3">
+            <a:schemeClr val="accent1"/>
+          </a:fillRef>
+          <a:effectRef idx="2">
+            <a:schemeClr val="accent1"/>
+          </a:effectRef>
+          <a:fontRef idx="minor">
+            <a:schemeClr val="lt1"/>
+          </a:fontRef>
+        </p:style>
+        <p:txBody>
+          <a:bodyPr rtlCol="0" anchor="ctr" tIns="18288" bIns="18288"/>
+          <a:lstStyle/>
+          <a:p>
+            <a:pPr algn="ctr"/>
+            <a:r>
+              <a:rPr sz="1300" b="1">
+                <a:solidFill>
+                  <a:srgbClr val="FAF4EC"/>
+                </a:solidFill>
+              </a:rPr>
+              <a:t>Product</a:t>
+            </a:r>
+          </a:p>
+        </p:txBody>
+      </p:sp>
+      <p:sp>
+        <p:nvSpPr>
+          <p:cNvPr id="7" name="TextBox 6"/>
+          <p:cNvSpPr txBox="1"/>
+          <p:nvPr/>
+        </p:nvSpPr>
+        <p:spPr>
+          <a:xfrm>
+            <a:off x="2880360" y="1764792"/>
+            <a:ext cx="8778240" cy="548640"/>
+          </a:xfrm>
+          <a:prstGeom prst="rect">
+            <a:avLst/>
+          </a:prstGeom>
+          <a:noFill/>
+        </p:spPr>
+        <p:txBody>
+          <a:bodyPr wrap="square" anchor="ctr">
+            <a:spAutoFit/>
+          </a:bodyPr>
+          <a:lstStyle/>
+          <a:p>
+            <a:pPr algn="l"/>
+            <a:r>
+              <a:rPr sz="1150" b="0">
+                <a:solidFill>
+                  <a:srgbClr val="1F1612"/>
+                </a:solidFill>
+              </a:rPr>
+              <a:t>Live two-sided marketplace at workitsa.co.za + a WhatsApp Job Channel built this weekend. Real jobs, verified workers, working today.</a:t>
+            </a:r>
+          </a:p>
+        </p:txBody>
+      </p:sp>
+      <p:sp>
+        <p:nvSpPr>
+          <p:cNvPr id="8" name="Rounded Rectangle 7"/>
+          <p:cNvSpPr/>
+          <p:nvPr/>
+        </p:nvSpPr>
+        <p:spPr>
+          <a:xfrm>
+            <a:off x="548640" y="2423160"/>
+            <a:ext cx="2148840" cy="512064"/>
+          </a:xfrm>
+          <a:prstGeom prst="roundRect">
+            <a:avLst/>
+          </a:prstGeom>
+          <a:solidFill>
+            <a:srgbClr val="D97742"/>
+          </a:solidFill>
+          <a:ln>
+            <a:noFill/>
+          </a:ln>
+        </p:spPr>
+        <p:style>
+          <a:lnRef idx="1">
+            <a:schemeClr val="accent1"/>
+          </a:lnRef>
+          <a:fillRef idx="3">
+            <a:schemeClr val="accent1"/>
+          </a:fillRef>
+          <a:effectRef idx="2">
+            <a:schemeClr val="accent1"/>
+          </a:effectRef>
+          <a:fontRef idx="minor">
+            <a:schemeClr val="lt1"/>
+          </a:fontRef>
+        </p:style>
+        <p:txBody>
+          <a:bodyPr rtlCol="0" anchor="ctr" tIns="18288" bIns="18288"/>
+          <a:lstStyle/>
+          <a:p>
+            <a:pPr algn="ctr"/>
+            <a:r>
+              <a:rPr sz="1300" b="1">
+                <a:solidFill>
+                  <a:srgbClr val="FAF4EC"/>
+                </a:solidFill>
+              </a:rPr>
+              <a:t>Creativity</a:t>
+            </a:r>
+          </a:p>
+        </p:txBody>
+      </p:sp>
+      <p:sp>
+        <p:nvSpPr>
+          <p:cNvPr id="9" name="TextBox 8"/>
+          <p:cNvSpPr txBox="1"/>
+          <p:nvPr/>
+        </p:nvSpPr>
+        <p:spPr>
+          <a:xfrm>
+            <a:off x="2880360" y="2404872"/>
+            <a:ext cx="8778240" cy="548640"/>
+          </a:xfrm>
+          <a:prstGeom prst="rect">
+            <a:avLst/>
+          </a:prstGeom>
+          <a:noFill/>
+        </p:spPr>
+        <p:txBody>
+          <a:bodyPr wrap="square" anchor="ctr">
+            <a:spAutoFit/>
+          </a:bodyPr>
+          <a:lstStyle/>
+          <a:p>
+            <a:pPr algn="l"/>
+            <a:r>
+              <a:rPr sz="1150" b="0">
+                <a:solidFill>
+                  <a:srgbClr val="1F1612"/>
+                </a:solidFill>
+              </a:rPr>
+              <a:t>App-less onboarding: register, get matched and get hired entirely inside WhatsApp — no app, no data. A path almost no marketplace offers.</a:t>
+            </a:r>
+          </a:p>
+        </p:txBody>
+      </p:sp>
+      <p:sp>
+        <p:nvSpPr>
+          <p:cNvPr id="10" name="Rounded Rectangle 9"/>
+          <p:cNvSpPr/>
+          <p:nvPr/>
+        </p:nvSpPr>
+        <p:spPr>
+          <a:xfrm>
+            <a:off x="548640" y="3063239"/>
+            <a:ext cx="2148840" cy="512064"/>
+          </a:xfrm>
+          <a:prstGeom prst="roundRect">
+            <a:avLst/>
+          </a:prstGeom>
+          <a:solidFill>
+            <a:srgbClr val="D97742"/>
+          </a:solidFill>
+          <a:ln>
+            <a:noFill/>
+          </a:ln>
+        </p:spPr>
+        <p:style>
+          <a:lnRef idx="1">
+            <a:schemeClr val="accent1"/>
+          </a:lnRef>
+          <a:fillRef idx="3">
+            <a:schemeClr val="accent1"/>
+          </a:fillRef>
+          <a:effectRef idx="2">
+            <a:schemeClr val="accent1"/>
+          </a:effectRef>
+          <a:fontRef idx="minor">
+            <a:schemeClr val="lt1"/>
+          </a:fontRef>
+        </p:style>
+        <p:txBody>
+          <a:bodyPr rtlCol="0" anchor="ctr" tIns="18288" bIns="18288"/>
+          <a:lstStyle/>
+          <a:p>
+            <a:pPr algn="ctr"/>
+            <a:r>
+              <a:rPr sz="1300" b="1">
+                <a:solidFill>
+                  <a:srgbClr val="FAF4EC"/>
+                </a:solidFill>
+              </a:rPr>
+              <a:t>Usability</a:t>
+            </a:r>
+          </a:p>
+        </p:txBody>
+      </p:sp>
+      <p:sp>
+        <p:nvSpPr>
+          <p:cNvPr id="11" name="TextBox 10"/>
+          <p:cNvSpPr txBox="1"/>
+          <p:nvPr/>
+        </p:nvSpPr>
+        <p:spPr>
+          <a:xfrm>
+            <a:off x="2880360" y="3044951"/>
+            <a:ext cx="8778240" cy="548640"/>
+          </a:xfrm>
+          <a:prstGeom prst="rect">
+            <a:avLst/>
+          </a:prstGeom>
+          <a:noFill/>
+        </p:spPr>
+        <p:txBody>
+          <a:bodyPr wrap="square" anchor="ctr">
+            <a:spAutoFit/>
+          </a:bodyPr>
+          <a:lstStyle/>
+          <a:p>
+            <a:pPr algn="l"/>
+            <a:r>
+              <a:rPr sz="1150" b="0">
+                <a:solidFill>
+                  <a:srgbClr val="1F1612"/>
+                </a:solidFill>
+              </a:rPr>
+              <a:t>Low-data PWA for low-end Android, in en / af / zu, plus a zero-install WhatsApp route for anyone with just a chat.</a:t>
+            </a:r>
+          </a:p>
+        </p:txBody>
+      </p:sp>
+      <p:sp>
+        <p:nvSpPr>
+          <p:cNvPr id="12" name="Rounded Rectangle 11"/>
+          <p:cNvSpPr/>
+          <p:nvPr/>
+        </p:nvSpPr>
+        <p:spPr>
+          <a:xfrm>
+            <a:off x="548640" y="3703320"/>
+            <a:ext cx="2148840" cy="512064"/>
+          </a:xfrm>
+          <a:prstGeom prst="roundRect">
+            <a:avLst/>
+          </a:prstGeom>
+          <a:solidFill>
+            <a:srgbClr val="D97742"/>
+          </a:solidFill>
+          <a:ln>
+            <a:noFill/>
+          </a:ln>
+        </p:spPr>
+        <p:style>
+          <a:lnRef idx="1">
+            <a:schemeClr val="accent1"/>
+          </a:lnRef>
+          <a:fillRef idx="3">
+            <a:schemeClr val="accent1"/>
+          </a:fillRef>
+          <a:effectRef idx="2">
+            <a:schemeClr val="accent1"/>
+          </a:effectRef>
+          <a:fontRef idx="minor">
+            <a:schemeClr val="lt1"/>
+          </a:fontRef>
+        </p:style>
+        <p:txBody>
+          <a:bodyPr rtlCol="0" anchor="ctr" tIns="18288" bIns="18288"/>
+          <a:lstStyle/>
+          <a:p>
+            <a:pPr algn="ctr"/>
+            <a:r>
+              <a:rPr sz="1300" b="1">
+                <a:solidFill>
+                  <a:srgbClr val="FAF4EC"/>
+                </a:solidFill>
+              </a:rPr>
+              <a:t>Sustainability</a:t>
+            </a:r>
+          </a:p>
+        </p:txBody>
+      </p:sp>
+      <p:sp>
+        <p:nvSpPr>
+          <p:cNvPr id="13" name="TextBox 12"/>
+          <p:cNvSpPr txBox="1"/>
+          <p:nvPr/>
+        </p:nvSpPr>
+        <p:spPr>
+          <a:xfrm>
+            <a:off x="2880360" y="3685032"/>
+            <a:ext cx="8778240" cy="548640"/>
+          </a:xfrm>
+          <a:prstGeom prst="rect">
+            <a:avLst/>
+          </a:prstGeom>
+          <a:noFill/>
+        </p:spPr>
+        <p:txBody>
+          <a:bodyPr wrap="square" anchor="ctr">
+            <a:spAutoFit/>
+          </a:bodyPr>
+          <a:lstStyle/>
+          <a:p>
+            <a:pPr algn="l"/>
+            <a:r>
+              <a:rPr sz="1150" b="0">
+                <a:solidFill>
+                  <a:srgbClr val="1F1612"/>
+                </a:solidFill>
+              </a:rPr>
+              <a:t>8% poster fee · R49 Gold verification · R20 boosted posts · R199/mo business plan. Running cost ≈ R14,100/mo; scales with completed jobs.</a:t>
+            </a:r>
+          </a:p>
+        </p:txBody>
+      </p:sp>
+      <p:sp>
+        <p:nvSpPr>
+          <p:cNvPr id="14" name="Rounded Rectangle 13"/>
+          <p:cNvSpPr/>
+          <p:nvPr/>
+        </p:nvSpPr>
+        <p:spPr>
+          <a:xfrm>
+            <a:off x="548640" y="4343400"/>
+            <a:ext cx="2148840" cy="512064"/>
+          </a:xfrm>
+          <a:prstGeom prst="roundRect">
+            <a:avLst/>
+          </a:prstGeom>
+          <a:solidFill>
+            <a:srgbClr val="D97742"/>
+          </a:solidFill>
+          <a:ln>
+            <a:noFill/>
+          </a:ln>
+        </p:spPr>
+        <p:style>
+          <a:lnRef idx="1">
+            <a:schemeClr val="accent1"/>
+          </a:lnRef>
+          <a:fillRef idx="3">
+            <a:schemeClr val="accent1"/>
+          </a:fillRef>
+          <a:effectRef idx="2">
+            <a:schemeClr val="accent1"/>
+          </a:effectRef>
+          <a:fontRef idx="minor">
+            <a:schemeClr val="lt1"/>
+          </a:fontRef>
+        </p:style>
+        <p:txBody>
+          <a:bodyPr rtlCol="0" anchor="ctr" tIns="18288" bIns="18288"/>
+          <a:lstStyle/>
+          <a:p>
+            <a:pPr algn="ctr"/>
+            <a:r>
+              <a:rPr sz="1300" b="1">
+                <a:solidFill>
+                  <a:srgbClr val="FAF4EC"/>
+                </a:solidFill>
+              </a:rPr>
+              <a:t>Impact</a:t>
+            </a:r>
+          </a:p>
+        </p:txBody>
+      </p:sp>
+      <p:sp>
+        <p:nvSpPr>
+          <p:cNvPr id="15" name="TextBox 14"/>
+          <p:cNvSpPr txBox="1"/>
+          <p:nvPr/>
+        </p:nvSpPr>
+        <p:spPr>
+          <a:xfrm>
+            <a:off x="2880360" y="4325112"/>
+            <a:ext cx="8778240" cy="548640"/>
+          </a:xfrm>
+          <a:prstGeom prst="rect">
+            <a:avLst/>
+          </a:prstGeom>
+          <a:noFill/>
+        </p:spPr>
+        <p:txBody>
+          <a:bodyPr wrap="square" anchor="ctr">
+            <a:spAutoFit/>
+          </a:bodyPr>
+          <a:lstStyle/>
+          <a:p>
+            <a:pPr algn="l"/>
+            <a:r>
+              <a:rPr sz="1150" b="0">
+                <a:solidFill>
+                  <a:srgbClr val="1F1612"/>
+                </a:solidFill>
+              </a:rPr>
+              <a:t>A direct bridge to youth income: 140+ users, 110+ workers, 25+ ID-verified in Gauteng. 12-month target: 3,000 verified workers.</a:t>
+            </a:r>
+          </a:p>
+        </p:txBody>
+      </p:sp>
+      <p:sp>
+        <p:nvSpPr>
+          <p:cNvPr id="16" name="Rounded Rectangle 15"/>
+          <p:cNvSpPr/>
+          <p:nvPr/>
+        </p:nvSpPr>
+        <p:spPr>
+          <a:xfrm>
+            <a:off x="548640" y="4983480"/>
+            <a:ext cx="2148840" cy="512064"/>
+          </a:xfrm>
+          <a:prstGeom prst="roundRect">
+            <a:avLst/>
+          </a:prstGeom>
+          <a:solidFill>
+            <a:srgbClr val="D97742"/>
+          </a:solidFill>
+          <a:ln>
+            <a:noFill/>
+          </a:ln>
+        </p:spPr>
+        <p:style>
+          <a:lnRef idx="1">
+            <a:schemeClr val="accent1"/>
+          </a:lnRef>
+          <a:fillRef idx="3">
+            <a:schemeClr val="accent1"/>
+          </a:fillRef>
+          <a:effectRef idx="2">
+            <a:schemeClr val="accent1"/>
+          </a:effectRef>
+          <a:fontRef idx="minor">
+            <a:schemeClr val="lt1"/>
+          </a:fontRef>
+        </p:style>
+        <p:txBody>
+          <a:bodyPr rtlCol="0" anchor="ctr" tIns="18288" bIns="18288"/>
+          <a:lstStyle/>
+          <a:p>
+            <a:pPr algn="ctr"/>
+            <a:r>
+              <a:rPr sz="1300" b="1">
+                <a:solidFill>
+                  <a:srgbClr val="FAF4EC"/>
+                </a:solidFill>
+              </a:rPr>
+              <a:t>Presentation</a:t>
+            </a:r>
+          </a:p>
+        </p:txBody>
+      </p:sp>
+      <p:sp>
+        <p:nvSpPr>
+          <p:cNvPr id="17" name="TextBox 16"/>
+          <p:cNvSpPr txBox="1"/>
+          <p:nvPr/>
+        </p:nvSpPr>
+        <p:spPr>
+          <a:xfrm>
+            <a:off x="2880360" y="4965192"/>
+            <a:ext cx="8778240" cy="548640"/>
+          </a:xfrm>
+          <a:prstGeom prst="rect">
+            <a:avLst/>
+          </a:prstGeom>
+          <a:noFill/>
+        </p:spPr>
+        <p:txBody>
+          <a:bodyPr wrap="square" anchor="ctr">
+            <a:spAutoFit/>
+          </a:bodyPr>
+          <a:lstStyle/>
+          <a:p>
+            <a:pPr algn="l"/>
+            <a:r>
+              <a:rPr sz="1150" b="0">
+                <a:solidFill>
+                  <a:srgbClr val="1F1612"/>
+                </a:solidFill>
+              </a:rPr>
+              <a:t>Live app + two judge logins + demo video, and this deck maps straight to your scorecard.</a:t>
+            </a:r>
+          </a:p>
+        </p:txBody>
+      </p:sp>
+      <p:sp>
+        <p:nvSpPr>
+          <p:cNvPr id="18" name="Rounded Rectangle 17"/>
+          <p:cNvSpPr/>
+          <p:nvPr/>
+        </p:nvSpPr>
+        <p:spPr>
+          <a:xfrm>
+            <a:off x="548640" y="5623560"/>
+            <a:ext cx="2148840" cy="512064"/>
+          </a:xfrm>
+          <a:prstGeom prst="roundRect">
+            <a:avLst/>
+          </a:prstGeom>
+          <a:solidFill>
+            <a:srgbClr val="D97742"/>
+          </a:solidFill>
+          <a:ln>
+            <a:noFill/>
+          </a:ln>
+        </p:spPr>
+        <p:style>
+          <a:lnRef idx="1">
+            <a:schemeClr val="accent1"/>
+          </a:lnRef>
+          <a:fillRef idx="3">
+            <a:schemeClr val="accent1"/>
+          </a:fillRef>
+          <a:effectRef idx="2">
+            <a:schemeClr val="accent1"/>
+          </a:effectRef>
+          <a:fontRef idx="minor">
+            <a:schemeClr val="lt1"/>
+          </a:fontRef>
+        </p:style>
+        <p:txBody>
+          <a:bodyPr rtlCol="0" anchor="ctr" tIns="18288" bIns="18288"/>
+          <a:lstStyle/>
+          <a:p>
+            <a:pPr algn="ctr"/>
+            <a:r>
+              <a:rPr sz="1300" b="1">
+                <a:solidFill>
+                  <a:srgbClr val="FAF4EC"/>
+                </a:solidFill>
+              </a:rPr>
+              <a:t>Intelligence</a:t>
+            </a:r>
+          </a:p>
+        </p:txBody>
+      </p:sp>
+      <p:sp>
+        <p:nvSpPr>
+          <p:cNvPr id="19" name="TextBox 18"/>
+          <p:cNvSpPr txBox="1"/>
+          <p:nvPr/>
+        </p:nvSpPr>
+        <p:spPr>
+          <a:xfrm>
+            <a:off x="2880360" y="5605272"/>
+            <a:ext cx="8778240" cy="548640"/>
+          </a:xfrm>
+          <a:prstGeom prst="rect">
+            <a:avLst/>
+          </a:prstGeom>
+          <a:noFill/>
+        </p:spPr>
+        <p:txBody>
+          <a:bodyPr wrap="square" anchor="ctr">
+            <a:spAutoFit/>
+          </a:bodyPr>
+          <a:lstStyle/>
+          <a:p>
+            <a:pPr algn="l"/>
+            <a:r>
+              <a:rPr sz="1150" b="0">
+                <a:solidFill>
+                  <a:srgbClr val="1F1612"/>
+                </a:solidFill>
+              </a:rPr>
+              <a:t>Jarvis — a Gemini co-pilot: morning digest, dispute &amp; anomaly alerts, ask-anything over live data, reachable on WhatsApp.</a:t>
+            </a:r>
+          </a:p>
+        </p:txBody>
+      </p:sp>
+    </p:spTree>
+  </p:cSld>
+  <p:clrMapOvr>
+    <a:masterClrMapping/>
+  </p:clrMapOvr>
+</p:sld>
+</file>
+
+<file path=ppt\slides\slide14.xml><?xml version="1.0" encoding="utf-8"?>
+<p:sld xmlns:a="http://schemas.openxmlformats.org/drawingml/2006/main" xmlns:p="http://schemas.openxmlformats.org/presentationml/2006/main" xmlns:r="http://schemas.openxmlformats.org/officeDocument/2006/relationships">
+  <p:cSld>
+    <p:spTree>
+      <p:nvGrpSpPr>
+        <p:cNvPr id="1" name=""/>
+        <p:cNvGrpSpPr/>
+        <p:nvPr/>
+      </p:nvGrpSpPr>
+      <p:grpSpPr/>
+      <p:sp>
+        <p:nvSpPr>
+          <p:cNvPr id="2" name="Rectangle 1"/>
+          <p:cNvSpPr/>
+          <p:nvPr/>
+        </p:nvSpPr>
+        <p:spPr>
+          <a:xfrm>
+            <a:off x="0" y="0"/>
+            <a:ext cx="12191695" cy="6858000"/>
+          </a:xfrm>
+          <a:prstGeom prst="rect">
+            <a:avLst/>
+          </a:prstGeom>
+          <a:solidFill>
+            <a:srgbClr val="1F1612"/>
+          </a:solidFill>
+          <a:ln>
+            <a:noFill/>
+          </a:ln>
+        </p:spPr>
+        <p:txBody>
+          <a:bodyPr/>
+          <a:lstStyle/>
+          <a:p>
+            <a:endParaRPr/>
+          </a:p>
+        </p:txBody>
+      </p:sp>
+      <p:sp>
+        <p:nvSpPr>
+          <p:cNvPr id="3" name="Rectangle 2"/>
+          <p:cNvSpPr/>
+          <p:nvPr/>
+        </p:nvSpPr>
+        <p:spPr>
+          <a:xfrm>
+            <a:off x="0" y="0"/>
+            <a:ext cx="320040" cy="6858000"/>
+          </a:xfrm>
+          <a:prstGeom prst="rect">
+            <a:avLst/>
+          </a:prstGeom>
+          <a:solidFill>
+            <a:srgbClr val="D97742"/>
+          </a:solidFill>
+          <a:ln>
+            <a:noFill/>
+          </a:ln>
+        </p:spPr>
+        <p:txBody>
+          <a:bodyPr/>
+          <a:lstStyle/>
+          <a:p>
+            <a:endParaRPr/>
+          </a:p>
+        </p:txBody>
+      </p:sp>
+      <p:sp>
+        <p:nvSpPr>
+          <p:cNvPr id="4" name="Eyebrow"/>
+          <p:cNvSpPr txBox="1"/>
+          <p:nvPr/>
+        </p:nvSpPr>
+        <p:spPr>
+          <a:xfrm>
+            <a:off x="548640" y="274320"/>
+            <a:ext cx="11000000" cy="320040"/>
+          </a:xfrm>
+          <a:prstGeom prst="rect">
+            <a:avLst/>
+          </a:prstGeom>
+          <a:noFill/>
+        </p:spPr>
+        <p:txBody>
+          <a:bodyPr wrap="square" anchor="t">
+            <a:spAutoFit/>
+          </a:bodyPr>
+          <a:lstStyle/>
+          <a:p>
+            <a:pPr algn="l"/>
+            <a:r>
+              <a:rPr sz="1500" b="1">
+                <a:solidFill>
+                  <a:srgbClr val="D97742"/>
+                </a:solidFill>
+                <a:latin typeface="Calibri"/>
+              </a:rPr>
+              <a:t>THE WHATSAPP JOURNEY</a:t>
+            </a:r>
+          </a:p>
+        </p:txBody>
+      </p:sp>
+      <p:sp>
+        <p:nvSpPr>
+          <p:cNvPr id="5" name="Title"/>
+          <p:cNvSpPr txBox="1"/>
+          <p:nvPr/>
+        </p:nvSpPr>
+        <p:spPr>
+          <a:xfrm>
+            <a:off x="548640" y="594360"/>
+            <a:ext cx="11000000" cy="548640"/>
+          </a:xfrm>
+          <a:prstGeom prst="rect">
+            <a:avLst/>
+          </a:prstGeom>
+          <a:noFill/>
+        </p:spPr>
+        <p:txBody>
+          <a:bodyPr wrap="square" anchor="t">
+            <a:spAutoFit/>
+          </a:bodyPr>
+          <a:lstStyle/>
+          <a:p>
+            <a:pPr algn="l"/>
+            <a:r>
+              <a:rPr sz="2400" b="1">
+                <a:solidFill>
+                  <a:srgbClr val="FAF4EC"/>
+                </a:solidFill>
+                <a:latin typeface="Calibri"/>
+              </a:rPr>
+              <a:t>From HI to hired — the complete flow, tested live.</a:t>
+            </a:r>
+          </a:p>
+        </p:txBody>
+      </p:sp>
+      <p:pic>
+        <p:nvPicPr>
+          <p:cNvPr id="10" name="Screenshot 1" descr="WhatsApp onboarding: Hi, full name, area, categories"/>
+          <p:cNvPicPr>
+            <a:picLocks noChangeAspect="1"/>
+          </p:cNvPicPr>
+          <p:nvPr/>
+        </p:nvPicPr>
+        <p:blipFill>
+          <a:blip r:embed="rId3"/>
+          <a:stretch>
+            <a:fillRect/>
+          </a:stretch>
+        </p:blipFill>
+        <p:spPr>
+          <a:xfrm>
+            <a:off x="457200" y="1554480"/>
+            <a:ext cx="1783080" cy="3886200"/>
+          </a:xfrm>
+          <a:prstGeom prst="roundRect">
+            <a:avLst>
+              <a:gd name="adj" fmla="val 5000"/>
+            </a:avLst>
+          </a:prstGeom>
+          <a:ln w="12700">
+            <a:solidFill>
+              <a:srgbClr val="C9BCAF"/>
+            </a:solidFill>
+          </a:ln>
+        </p:spPr>
+      </p:pic>
+      <p:sp>
+        <p:nvSpPr>
+          <p:cNvPr id="20" name="Label 1"/>
+          <p:cNvSpPr txBox="1"/>
+          <p:nvPr/>
+        </p:nvSpPr>
+        <p:spPr>
+          <a:xfrm>
+            <a:off x="457200" y="1234440"/>
+            <a:ext cx="1783080" cy="320040"/>
+          </a:xfrm>
+          <a:prstGeom prst="rect">
+            <a:avLst/>
+          </a:prstGeom>
+          <a:noFill/>
+        </p:spPr>
+        <p:txBody>
+          <a:bodyPr wrap="square">
+            <a:spAutoFit/>
+          </a:bodyPr>
+          <a:lstStyle/>
+          <a:p>
+            <a:pPr algn="ctr"/>
+            <a:r>
+              <a:rPr sz="1050" b="1">
+                <a:solidFill>
+                  <a:srgbClr val="D97742"/>
+                </a:solidFill>
+                <a:latin typeface="Calibri"/>
+              </a:rPr>
+              <a:t>1</a:t>
+            </a:r>
+            <a:r>
+              <a:rPr sz="1050" b="0">
+                <a:solidFill>
+                  <a:srgbClr val="D8CFC4"/>
+                </a:solidFill>
+                <a:latin typeface="Calibri"/>
+              </a:rPr>
+              <a:t>  Sign up</a:t>
+            </a:r>
+          </a:p>
+        </p:txBody>
+      </p:sp>
+      <p:pic>
+        <p:nvPicPr>
+          <p:cNvPr id="11" name="Screenshot 2" descr="WhatsApp categories, consent, registration"/>
+          <p:cNvPicPr>
+            <a:picLocks noChangeAspect="1"/>
+          </p:cNvPicPr>
+          <p:nvPr/>
+        </p:nvPicPr>
+        <p:blipFill>
+          <a:blip r:embed="rId4"/>
+          <a:stretch>
+            <a:fillRect/>
+          </a:stretch>
+        </p:blipFill>
+        <p:spPr>
+          <a:xfrm>
+            <a:off x="2560320" y="1554480"/>
+            <a:ext cx="1783080" cy="3886200"/>
+          </a:xfrm>
+          <a:prstGeom prst="roundRect">
+            <a:avLst>
+              <a:gd name="adj" fmla="val 5000"/>
+            </a:avLst>
+          </a:prstGeom>
+          <a:ln w="12700">
+            <a:solidFill>
+              <a:srgbClr val="C9BCAF"/>
+            </a:solidFill>
+          </a:ln>
+        </p:spPr>
+      </p:pic>
+      <p:sp>
+        <p:nvSpPr>
+          <p:cNvPr id="21" name="Label 2"/>
+          <p:cNvSpPr txBox="1"/>
+          <p:nvPr/>
+        </p:nvSpPr>
+        <p:spPr>
+          <a:xfrm>
+            <a:off x="2560320" y="1234440"/>
+            <a:ext cx="1783080" cy="320040"/>
+          </a:xfrm>
+          <a:prstGeom prst="rect">
+            <a:avLst/>
+          </a:prstGeom>
+          <a:noFill/>
+        </p:spPr>
+        <p:txBody>
+          <a:bodyPr wrap="square">
+            <a:spAutoFit/>
+          </a:bodyPr>
+          <a:lstStyle/>
+          <a:p>
+            <a:pPr algn="ctr"/>
+            <a:r>
+              <a:rPr sz="1050" b="1">
+                <a:solidFill>
+                  <a:srgbClr val="D97742"/>
+                </a:solidFill>
+                <a:latin typeface="Calibri"/>
+              </a:rPr>
+              <a:t>2</a:t>
+            </a:r>
+            <a:r>
+              <a:rPr sz="1050" b="0">
+                <a:solidFill>
+                  <a:srgbClr val="D8CFC4"/>
+                </a:solidFill>
+                <a:latin typeface="Calibri"/>
+              </a:rPr>
+              <a:t>  Choose skills</a:t>
+            </a:r>
+          </a:p>
+        </p:txBody>
+      </p:sp>
+      <p:pic>
+        <p:nvPicPr>
+          <p:cNvPr id="12" name="Screenshot 3" descr="WhatsApp registration confirmation, magic link, approval"/>
+          <p:cNvPicPr>
+            <a:picLocks noChangeAspect="1"/>
+          </p:cNvPicPr>
+          <p:nvPr/>
+        </p:nvPicPr>
+        <p:blipFill>
+          <a:blip r:embed="rId5"/>
+          <a:stretch>
+            <a:fillRect/>
+          </a:stretch>
+        </p:blipFill>
+        <p:spPr>
+          <a:xfrm>
+            <a:off x="4663440" y="1554480"/>
+            <a:ext cx="1783080" cy="3886200"/>
+          </a:xfrm>
+          <a:prstGeom prst="roundRect">
+            <a:avLst>
+              <a:gd name="adj" fmla="val 5000"/>
+            </a:avLst>
+          </a:prstGeom>
+          <a:ln w="12700">
+            <a:solidFill>
+              <a:srgbClr val="C9BCAF"/>
+            </a:solidFill>
+          </a:ln>
+        </p:spPr>
+      </p:pic>
+      <p:sp>
+        <p:nvSpPr>
+          <p:cNvPr id="22" name="Label 3"/>
+          <p:cNvSpPr txBox="1"/>
+          <p:nvPr/>
+        </p:nvSpPr>
+        <p:spPr>
+          <a:xfrm>
+            <a:off x="4663440" y="1234440"/>
+            <a:ext cx="1783080" cy="320040"/>
+          </a:xfrm>
+          <a:prstGeom prst="rect">
+            <a:avLst/>
+          </a:prstGeom>
+          <a:noFill/>
+        </p:spPr>
+        <p:txBody>
+          <a:bodyPr wrap="square">
+            <a:spAutoFit/>
+          </a:bodyPr>
+          <a:lstStyle/>
+          <a:p>
+            <a:pPr algn="ctr"/>
+            <a:r>
+              <a:rPr sz="1050" b="1">
+                <a:solidFill>
+                  <a:srgbClr val="D97742"/>
+                </a:solidFill>
+                <a:latin typeface="Calibri"/>
+              </a:rPr>
+              <a:t>3</a:t>
+            </a:r>
+            <a:r>
+              <a:rPr sz="1050" b="0">
+                <a:solidFill>
+                  <a:srgbClr val="D8CFC4"/>
+                </a:solidFill>
+                <a:latin typeface="Calibri"/>
+              </a:rPr>
+              <a:t>  Verify &amp; approve</a:t>
+            </a:r>
+          </a:p>
+        </p:txBody>
+      </p:sp>
+      <p:pic>
+        <p:nvPicPr>
+          <p:cNvPr id="13" name="Screenshot 4" descr="WhatsApp approval notification, instruction manual, AVAILABLE, JOBS"/>
+          <p:cNvPicPr>
+            <a:picLocks noChangeAspect="1"/>
+          </p:cNvPicPr>
+          <p:nvPr/>
+        </p:nvPicPr>
+        <p:blipFill>
+          <a:blip r:embed="rId6"/>
+          <a:stretch>
+            <a:fillRect/>
+          </a:stretch>
+        </p:blipFill>
+        <p:spPr>
+          <a:xfrm>
+            <a:off x="6766560" y="1554480"/>
+            <a:ext cx="1783080" cy="3886200"/>
+          </a:xfrm>
+          <a:prstGeom prst="roundRect">
+            <a:avLst>
+              <a:gd name="adj" fmla="val 5000"/>
+            </a:avLst>
+          </a:prstGeom>
+          <a:ln w="12700">
+            <a:solidFill>
+              <a:srgbClr val="C9BCAF"/>
+            </a:solidFill>
+          </a:ln>
+        </p:spPr>
+      </p:pic>
+      <p:sp>
+        <p:nvSpPr>
+          <p:cNvPr id="23" name="Label 4"/>
+          <p:cNvSpPr txBox="1"/>
+          <p:nvPr/>
+        </p:nvSpPr>
+        <p:spPr>
+          <a:xfrm>
+            <a:off x="6766560" y="1234440"/>
+            <a:ext cx="1783080" cy="320040"/>
+          </a:xfrm>
+          <a:prstGeom prst="rect">
+            <a:avLst/>
+          </a:prstGeom>
+          <a:noFill/>
+        </p:spPr>
+        <p:txBody>
+          <a:bodyPr wrap="square">
+            <a:spAutoFit/>
+          </a:bodyPr>
+          <a:lstStyle/>
+          <a:p>
+            <a:pPr algn="ctr"/>
+            <a:r>
+              <a:rPr sz="1050" b="1">
+                <a:solidFill>
+                  <a:srgbClr val="D97742"/>
+                </a:solidFill>
+                <a:latin typeface="Calibri"/>
+              </a:rPr>
+              <a:t>4</a:t>
+            </a:r>
+            <a:r>
+              <a:rPr sz="1050" b="0">
+                <a:solidFill>
+                  <a:srgbClr val="D8CFC4"/>
+                </a:solidFill>
+                <a:latin typeface="Calibri"/>
+              </a:rPr>
+              <a:t>  Browse jobs</a:t>
+            </a:r>
+          </a:p>
+        </p:txBody>
+      </p:sp>
+      <p:pic>
+        <p:nvPicPr>
+          <p:cNvPr id="14" name="Screenshot 5" descr="WhatsApp JOBS list, counter-offer R1300, offer sent"/>
+          <p:cNvPicPr>
+            <a:picLocks noChangeAspect="1"/>
+          </p:cNvPicPr>
+          <p:nvPr/>
+        </p:nvPicPr>
+        <p:blipFill>
+          <a:blip r:embed="rId7"/>
+          <a:stretch>
+            <a:fillRect/>
+          </a:stretch>
+        </p:blipFill>
+        <p:spPr>
+          <a:xfrm>
+            <a:off x="8869680" y="1554480"/>
+            <a:ext cx="1783080" cy="3886200"/>
+          </a:xfrm>
+          <a:prstGeom prst="roundRect">
+            <a:avLst>
+              <a:gd name="adj" fmla="val 5000"/>
+            </a:avLst>
+          </a:prstGeom>
+          <a:ln w="12700">
+            <a:solidFill>
+              <a:srgbClr val="C9BCAF"/>
+            </a:solidFill>
+          </a:ln>
+        </p:spPr>
+      </p:pic>
+      <p:sp>
+        <p:nvSpPr>
+          <p:cNvPr id="24" name="Label 5"/>
+          <p:cNvSpPr txBox="1"/>
+          <p:nvPr/>
+        </p:nvSpPr>
+        <p:spPr>
+          <a:xfrm>
+            <a:off x="8869680" y="1234440"/>
+            <a:ext cx="1783080" cy="320040"/>
+          </a:xfrm>
+          <a:prstGeom prst="rect">
+            <a:avLst/>
+          </a:prstGeom>
+          <a:noFill/>
+        </p:spPr>
+        <p:txBody>
+          <a:bodyPr wrap="square">
+            <a:spAutoFit/>
+          </a:bodyPr>
+          <a:lstStyle/>
+          <a:p>
+            <a:pPr algn="ctr"/>
+            <a:r>
+              <a:rPr sz="1050" b="1">
+                <a:solidFill>
+                  <a:srgbClr val="D97742"/>
+                </a:solidFill>
+                <a:latin typeface="Calibri"/>
+              </a:rPr>
+              <a:t>5</a:t>
+            </a:r>
+            <a:r>
+              <a:rPr sz="1050" b="0">
+                <a:solidFill>
+                  <a:srgbClr val="D8CFC4"/>
+                </a:solidFill>
+                <a:latin typeface="Calibri"/>
+              </a:rPr>
+              <a:t>  Apply &amp; offer</a:t>
+            </a:r>
+          </a:p>
+        </p:txBody>
+      </p:sp>
+      <p:sp>
+        <p:nvSpPr>
+          <p:cNvPr id="30" name="Footer"/>
+          <p:cNvSpPr txBox="1"/>
+          <p:nvPr/>
+        </p:nvSpPr>
+        <p:spPr>
+          <a:xfrm>
+            <a:off x="548640" y="5669280"/>
+            <a:ext cx="11000000" cy="914400"/>
+          </a:xfrm>
+          <a:prstGeom prst="rect">
+            <a:avLst/>
+          </a:prstGeom>
+          <a:noFill/>
+        </p:spPr>
+        <p:txBody>
+          <a:bodyPr wrap="square" anchor="t">
+            <a:spAutoFit/>
+          </a:bodyPr>
+          <a:lstStyle/>
+          <a:p>
+            <a:pPr algn="l"/>
+            <a:r>
+              <a:rPr sz="1200" b="0">
+                <a:solidFill>
+                  <a:srgbClr val="D8CFC4"/>
+                </a:solidFill>
+                <a:latin typeface="Calibri"/>
+              </a:rPr>
+              <a:t>Real screenshots from a live test — Simphiwe registered, got approved, browsed jobs, and counter-offered R1 300 on a waitering gig — all inside WhatsApp, no app installed.</a:t>
+            </a:r>
+          </a:p>
+          <a:p>
+            <a:pPr algn="l"/>
+            <a:r>
+              <a:rPr sz="1200" b="1">
+                <a:solidFill>
+                  <a:srgbClr val="D97742"/>
+                </a:solidFill>
+                <a:latin typeface="Calibri"/>
+              </a:rPr>
+              <a:t>Try it yourself:  text HI to +27 74 320 7131 on WhatsApp</a:t>
+            </a:r>
+          </a:p>
+        </p:txBody>
+      </p:sp>
+    </p:spTree>
+  </p:cSld>
+  <p:clrMapOvr>
+    <a:masterClrMapping/>
+  </p:clrMapOvr>
+</p:sld>
+</file>
+
+<file path=ppt\slides\slide15.xml><?xml version="1.0" encoding="utf-8"?>
+<p:sld xmlns:a="http://schemas.openxmlformats.org/drawingml/2006/main" xmlns:p="http://schemas.openxmlformats.org/presentationml/2006/main" xmlns:r="http://schemas.openxmlformats.org/officeDocument/2006/relationships">
+  <p:cSld>
+    <p:spTree>
+      <p:nvGrpSpPr>
+        <p:cNvPr id="1" name=""/>
+        <p:cNvGrpSpPr/>
+        <p:nvPr/>
+      </p:nvGrpSpPr>
+      <p:grpSpPr/>
+      <p:sp>
+        <p:nvSpPr>
+          <p:cNvPr id="2" name="Background"/>
+          <p:cNvSpPr/>
+          <p:nvPr/>
+        </p:nvSpPr>
+        <p:spPr>
+          <a:xfrm>
+            <a:off x="0" y="0"/>
+            <a:ext cx="12191695" cy="6858000"/>
+          </a:xfrm>
+          <a:prstGeom prst="rect">
+            <a:avLst/>
+          </a:prstGeom>
+          <a:solidFill>
+            <a:srgbClr val="1F1612"/>
+          </a:solidFill>
+          <a:ln>
+            <a:noFill/>
+          </a:ln>
+        </p:spPr>
+        <p:txBody>
+          <a:bodyPr/>
+          <a:lstStyle/>
+          <a:p>
+            <a:endParaRPr/>
+          </a:p>
+        </p:txBody>
+      </p:sp>
+      <p:sp>
+        <p:nvSpPr>
+          <p:cNvPr id="3" name="Accent"/>
+          <p:cNvSpPr/>
+          <p:nvPr/>
+        </p:nvSpPr>
+        <p:spPr>
+          <a:xfrm>
+            <a:off x="0" y="0"/>
+            <a:ext cx="320040" cy="6858000"/>
+          </a:xfrm>
+          <a:prstGeom prst="rect">
+            <a:avLst/>
+          </a:prstGeom>
+          <a:solidFill>
+            <a:srgbClr val="D97742"/>
+          </a:solidFill>
+          <a:ln>
+            <a:noFill/>
+          </a:ln>
+        </p:spPr>
+        <p:txBody>
+          <a:bodyPr/>
+          <a:lstStyle/>
+          <a:p>
+            <a:endParaRPr/>
+          </a:p>
+        </p:txBody>
+      </p:sp>
+      <p:sp>
+        <p:nvSpPr>
+          <p:cNvPr id="4" name="Eyebrow"/>
+          <p:cNvSpPr txBox="1"/>
+          <p:nvPr/>
+        </p:nvSpPr>
+        <p:spPr>
+          <a:xfrm>
+            <a:off x="548640" y="274320"/>
+            <a:ext cx="11000000" cy="320040"/>
+          </a:xfrm>
+          <a:prstGeom prst="rect">
+            <a:avLst/>
+          </a:prstGeom>
+          <a:noFill/>
+        </p:spPr>
+        <p:txBody>
+          <a:bodyPr wrap="square" anchor="t">
+            <a:spAutoFit/>
+          </a:bodyPr>
+          <a:lstStyle/>
+          <a:p>
+            <a:pPr algn="l"/>
+            <a:r>
+              <a:rPr sz="1500" b="1">
+                <a:solidFill>
+                  <a:srgbClr val="D97742"/>
+                </a:solidFill>
+                <a:latin typeface="Calibri"/>
+              </a:rPr>
+              <a:t>PROTECTING PEOPLE &amp; DATA</a:t>
+            </a:r>
+          </a:p>
+        </p:txBody>
+      </p:sp>
+      <p:sp>
+        <p:nvSpPr>
+          <p:cNvPr id="5" name="Title"/>
+          <p:cNvSpPr txBox="1"/>
+          <p:nvPr/>
+        </p:nvSpPr>
+        <p:spPr>
+          <a:xfrm>
+            <a:off x="548640" y="594360"/>
+            <a:ext cx="11000000" cy="548640"/>
+          </a:xfrm>
+          <a:prstGeom prst="rect">
+            <a:avLst/>
+          </a:prstGeom>
+          <a:noFill/>
+        </p:spPr>
+        <p:txBody>
+          <a:bodyPr wrap="square" anchor="t">
+            <a:spAutoFit/>
+          </a:bodyPr>
+          <a:lstStyle/>
+          <a:p>
+            <a:pPr algn="l"/>
+            <a:r>
+              <a:rPr sz="2600" b="1">
+                <a:solidFill>
+                  <a:srgbClr val="FAF4EC"/>
+                </a:solidFill>
+                <a:latin typeface="Calibri"/>
+              </a:rPr>
+              <a:t>Verification, safety, disputes &amp; data privacy.</a:t>
+            </a:r>
+          </a:p>
+        </p:txBody>
+      </p:sp>
+      <p:sp>
+        <p:nvSpPr>
+          <p:cNvPr id="6" name="Col1"/>
+          <p:cNvSpPr txBox="1"/>
+          <p:nvPr/>
+        </p:nvSpPr>
+        <p:spPr>
+          <a:xfrm>
+            <a:off x="548640" y="1371600"/>
+            <a:ext cx="5486400" cy="5120640"/>
+          </a:xfrm>
+          <a:prstGeom prst="rect">
+            <a:avLst/>
+          </a:prstGeom>
+          <a:noFill/>
+        </p:spPr>
+        <p:txBody>
+          <a:bodyPr wrap="square" anchor="t">
+            <a:spAutoFit/>
+          </a:bodyPr>
+          <a:lstStyle/>
+          <a:p>
+            <a:pPr algn="l">
+              <a:spcAft>
+                <a:spcPts val="400"/>
+              </a:spcAft>
+            </a:pPr>
+            <a:r>
+              <a:rPr sz="1400" b="1">
+                <a:solidFill>
+                  <a:srgbClr val="D97742"/>
+                </a:solidFill>
+                <a:latin typeface="Calibri"/>
+              </a:rPr>
+              <a:t>Identity &amp; skills verification</a:t>
+            </a:r>
+          </a:p>
+          <a:p>
+            <a:pPr algn="l">
+              <a:spcAft>
+                <a:spcPts val="200"/>
+              </a:spcAft>
+            </a:pPr>
+            <a:r>
+              <a:rPr sz="1200" b="0">
+                <a:solidFill>
+                  <a:srgbClr val="D8CFC4"/>
+                </a:solidFill>
+                <a:latin typeface="Calibri"/>
+              </a:rPr>
+              <a:t>● SA ID number validated (Luhn + DOB cross-check)</a:t>
+            </a:r>
+          </a:p>
+          <a:p>
+            <a:pPr algn="l">
+              <a:spcAft>
+                <a:spcPts val="200"/>
+              </a:spcAft>
+            </a:pPr>
+            <a:r>
+              <a:rPr sz="1200" b="0">
+                <a:solidFill>
+                  <a:srgbClr val="D8CFC4"/>
+                </a:solidFill>
+                <a:latin typeface="Calibri"/>
+              </a:rPr>
+              <a:t>● ID photo + selfie video uploaded</a:t>
+            </a:r>
+          </a:p>
+          <a:p>
+            <a:pPr algn="l">
+              <a:spcAft>
+                <a:spcPts val="200"/>
+              </a:spcAft>
+            </a:pPr>
+            <a:r>
+              <a:rPr sz="1200" b="0">
+                <a:solidFill>
+                  <a:srgbClr val="D8CFC4"/>
+                </a:solidFill>
+                <a:latin typeface="Calibri"/>
+              </a:rPr>
+              <a:t>● Proof of address required</a:t>
+            </a:r>
+          </a:p>
+          <a:p>
+            <a:pPr algn="l">
+              <a:spcAft>
+                <a:spcPts val="200"/>
+              </a:spcAft>
+            </a:pPr>
+            <a:r>
+              <a:rPr sz="1200" b="0">
+                <a:solidFill>
+                  <a:srgbClr val="D8CFC4"/>
+                </a:solidFill>
+                <a:latin typeface="Calibri"/>
+              </a:rPr>
+              <a:t>● Police clearance earns a Gold verified badge</a:t>
+            </a:r>
+          </a:p>
+          <a:p>
+            <a:pPr algn="l">
+              <a:spcAft>
+                <a:spcPts val="200"/>
+              </a:spcAft>
+            </a:pPr>
+            <a:r>
+              <a:rPr sz="1200" b="0">
+                <a:solidFill>
+                  <a:srgbClr val="D8CFC4"/>
+                </a:solidFill>
+                <a:latin typeface="Calibri"/>
+              </a:rPr>
+              <a:t>● Admin reviews every submission manually</a:t>
+            </a:r>
+          </a:p>
+          <a:p>
+            <a:pPr algn="l">
+              <a:spcAft>
+                <a:spcPts val="200"/>
+              </a:spcAft>
+            </a:pPr>
+            <a:r>
+              <a:rPr sz="1200" b="0">
+                <a:solidFill>
+                  <a:srgbClr val="D8CFC4"/>
+                </a:solidFill>
+                <a:latin typeface="Calibri"/>
+              </a:rPr>
+              <a:t>● Duplicate-document &amp; ban-registry fraud checks</a:t>
+            </a:r>
+          </a:p>
+          <a:p>
+            <a:pPr algn="l">
+              <a:spcAft>
+                <a:spcPts val="200"/>
+              </a:spcAft>
+            </a:pPr>
+            <a:r>
+              <a:rPr sz="1200" b="0">
+                <a:solidFill>
+                  <a:srgbClr val="D8CFC4"/>
+                </a:solidFill>
+                <a:latin typeface="Calibri"/>
+              </a:rPr>
+              <a:t>● Both employers AND workers must verify</a:t>
+            </a:r>
+          </a:p>
+          <a:p>
+            <a:pPr algn="l">
+              <a:spcAft>
+                <a:spcPts val="800"/>
+              </a:spcAft>
+            </a:pPr>
+            <a:endParaRPr sz="600">
+              <a:solidFill>
+                <a:srgbClr val="D8CFC4"/>
+              </a:solidFill>
+            </a:endParaRPr>
+          </a:p>
+          <a:p>
+            <a:pPr algn="l">
+              <a:spcAft>
+                <a:spcPts val="400"/>
+              </a:spcAft>
+            </a:pPr>
+            <a:r>
+              <a:rPr sz="1400" b="1">
+                <a:solidFill>
+                  <a:srgbClr val="D97742"/>
+                </a:solidFill>
+                <a:latin typeface="Calibri"/>
+              </a:rPr>
+              <a:t>Customer &amp; worker safety</a:t>
+            </a:r>
+          </a:p>
+          <a:p>
+            <a:pPr algn="l">
+              <a:spcAft>
+                <a:spcPts val="200"/>
+              </a:spcAft>
+            </a:pPr>
+            <a:r>
+              <a:rPr sz="1200" b="0">
+                <a:solidFill>
+                  <a:srgbClr val="D8CFC4"/>
+                </a:solidFill>
+                <a:latin typeface="Calibri"/>
+              </a:rPr>
+              <a:t>● Doorstep start-code confirms the right worker</a:t>
+            </a:r>
+          </a:p>
+          <a:p>
+            <a:pPr algn="l">
+              <a:spcAft>
+                <a:spcPts val="200"/>
+              </a:spcAft>
+            </a:pPr>
+            <a:r>
+              <a:rPr sz="1200" b="0">
+                <a:solidFill>
+                  <a:srgbClr val="D8CFC4"/>
+                </a:solidFill>
+                <a:latin typeface="Calibri"/>
+              </a:rPr>
+              <a:t>● SOS button — one tap alerts our safety team with location</a:t>
+            </a:r>
+          </a:p>
+          <a:p>
+            <a:pPr algn="l">
+              <a:spcAft>
+                <a:spcPts val="200"/>
+              </a:spcAft>
+            </a:pPr>
+            <a:r>
+              <a:rPr sz="1200" b="0">
+                <a:solidFill>
+                  <a:srgbClr val="D8CFC4"/>
+                </a:solidFill>
+                <a:latin typeface="Calibri"/>
+              </a:rPr>
+              <a:t>● Two-way ratings after every job</a:t>
+            </a:r>
+          </a:p>
+          <a:p>
+            <a:pPr algn="l">
+              <a:spcAft>
+                <a:spcPts val="200"/>
+              </a:spcAft>
+            </a:pPr>
+            <a:r>
+              <a:rPr sz="1200" b="0">
+                <a:solidFill>
+                  <a:srgbClr val="D8CFC4"/>
+                </a:solidFill>
+                <a:latin typeface="Calibri"/>
+              </a:rPr>
+              <a:t>● Jarvis flags anomalies + disputes in real time</a:t>
+            </a:r>
+          </a:p>
+        </p:txBody>
+      </p:sp>
+      <p:sp>
+        <p:nvSpPr>
+          <p:cNvPr id="7" name="Col2"/>
+          <p:cNvSpPr txBox="1"/>
+          <p:nvPr/>
+        </p:nvSpPr>
+        <p:spPr>
+          <a:xfrm>
+            <a:off x="6400800" y="1371600"/>
+            <a:ext cx="5486400" cy="5120640"/>
+          </a:xfrm>
+          <a:prstGeom prst="rect">
+            <a:avLst/>
+          </a:prstGeom>
+          <a:noFill/>
+        </p:spPr>
+        <p:txBody>
+          <a:bodyPr wrap="square" anchor="t">
+            <a:spAutoFit/>
+          </a:bodyPr>
+          <a:lstStyle/>
+          <a:p>
+            <a:pPr algn="l">
+              <a:spcAft>
+                <a:spcPts val="400"/>
+              </a:spcAft>
+            </a:pPr>
+            <a:r>
+              <a:rPr sz="1400" b="1">
+                <a:solidFill>
+                  <a:srgbClr val="D97742"/>
+                </a:solidFill>
+                <a:latin typeface="Calibri"/>
+              </a:rPr>
+              <a:t>Disputes, non-payment &amp; fraud</a:t>
+            </a:r>
+          </a:p>
+          <a:p>
+            <a:pPr algn="l">
+              <a:spcAft>
+                <a:spcPts val="200"/>
+              </a:spcAft>
+            </a:pPr>
+            <a:r>
+              <a:rPr sz="1200" b="0">
+                <a:solidFill>
+                  <a:srgbClr val="D8CFC4"/>
+                </a:solidFill>
+                <a:latin typeface="Calibri"/>
+              </a:rPr>
+              <a:t>● In-app dispute flow with admin mediation</a:t>
+            </a:r>
+          </a:p>
+          <a:p>
+            <a:pPr algn="l">
+              <a:spcAft>
+                <a:spcPts val="200"/>
+              </a:spcAft>
+            </a:pPr>
+            <a:r>
+              <a:rPr sz="1200" b="0">
+                <a:solidFill>
+                  <a:srgbClr val="D8CFC4"/>
+                </a:solidFill>
+                <a:latin typeface="Calibri"/>
+              </a:rPr>
+              <a:t>● Time-stamped proof-of-work photos for evidence</a:t>
+            </a:r>
+          </a:p>
+          <a:p>
+            <a:pPr algn="l">
+              <a:spcAft>
+                <a:spcPts val="200"/>
+              </a:spcAft>
+            </a:pPr>
+            <a:r>
+              <a:rPr sz="1200" b="0">
+                <a:solidFill>
+                  <a:srgbClr val="D8CFC4"/>
+                </a:solidFill>
+                <a:latin typeface="Calibri"/>
+              </a:rPr>
+              <a:t>● Job text auto-screened for scam patterns</a:t>
+            </a:r>
+          </a:p>
+          <a:p>
+            <a:pPr algn="l">
+              <a:spcAft>
+                <a:spcPts val="200"/>
+              </a:spcAft>
+            </a:pPr>
+            <a:r>
+              <a:rPr sz="1200" b="0">
+                <a:solidFill>
+                  <a:srgbClr val="D8CFC4"/>
+                </a:solidFill>
+                <a:latin typeface="Calibri"/>
+              </a:rPr>
+              <a:t>● Uploaded images moderated by Vision API</a:t>
+            </a:r>
+          </a:p>
+          <a:p>
+            <a:pPr algn="l">
+              <a:spcAft>
+                <a:spcPts val="200"/>
+              </a:spcAft>
+            </a:pPr>
+            <a:r>
+              <a:rPr sz="1200" b="0">
+                <a:solidFill>
+                  <a:srgbClr val="D8CFC4"/>
+                </a:solidFill>
+                <a:latin typeface="Calibri"/>
+              </a:rPr>
+              <a:t>● Rate limiting on job posts (anti-spam)</a:t>
+            </a:r>
+          </a:p>
+          <a:p>
+            <a:pPr algn="l">
+              <a:spcAft>
+                <a:spcPts val="200"/>
+              </a:spcAft>
+            </a:pPr>
+            <a:r>
+              <a:rPr sz="1200" b="0">
+                <a:solidFill>
+                  <a:srgbClr val="D8CFC4"/>
+                </a:solidFill>
+                <a:latin typeface="Calibri"/>
+              </a:rPr>
+              <a:t>● Accounts suspended instantly on report</a:t>
+            </a:r>
+          </a:p>
+          <a:p>
+            <a:pPr algn="l">
+              <a:spcAft>
+                <a:spcPts val="800"/>
+              </a:spcAft>
+            </a:pPr>
+            <a:endParaRPr sz="600">
+              <a:solidFill>
+                <a:srgbClr val="D8CFC4"/>
+              </a:solidFill>
+            </a:endParaRPr>
+          </a:p>
+          <a:p>
+            <a:pPr algn="l">
+              <a:spcAft>
+                <a:spcPts val="400"/>
+              </a:spcAft>
+            </a:pPr>
+            <a:r>
+              <a:rPr sz="1400" b="1">
+                <a:solidFill>
+                  <a:srgbClr val="D97742"/>
+                </a:solidFill>
+                <a:latin typeface="Calibri"/>
+              </a:rPr>
+              <a:t>Personal info &amp; location data</a:t>
+            </a:r>
+          </a:p>
+          <a:p>
+            <a:pPr algn="l">
+              <a:spcAft>
+                <a:spcPts val="200"/>
+              </a:spcAft>
+            </a:pPr>
+            <a:r>
+              <a:rPr sz="1200" b="0">
+                <a:solidFill>
+                  <a:srgbClr val="D8CFC4"/>
+                </a:solidFill>
+                <a:latin typeface="Calibri"/>
+              </a:rPr>
+              <a:t>● POPIA consent captured at signup + WhatsApp onboarding</a:t>
+            </a:r>
+          </a:p>
+          <a:p>
+            <a:pPr algn="l">
+              <a:spcAft>
+                <a:spcPts val="200"/>
+              </a:spcAft>
+            </a:pPr>
+            <a:r>
+              <a:rPr sz="1200" b="0">
+                <a:solidFill>
+                  <a:srgbClr val="D8CFC4"/>
+                </a:solidFill>
+                <a:latin typeface="Calibri"/>
+              </a:rPr>
+              <a:t>● ID docs in private subcollection (owner + admin only)</a:t>
+            </a:r>
+          </a:p>
+          <a:p>
+            <a:pPr algn="l">
+              <a:spcAft>
+                <a:spcPts val="200"/>
+              </a:spcAft>
+            </a:pPr>
+            <a:r>
+              <a:rPr sz="1200" b="0">
+                <a:solidFill>
+                  <a:srgbClr val="D8CFC4"/>
+                </a:solidFill>
+                <a:latin typeface="Calibri"/>
+              </a:rPr>
+              <a:t>● Worker location rounded to ~1 km (never exact)</a:t>
+            </a:r>
+          </a:p>
+          <a:p>
+            <a:pPr algn="l">
+              <a:spcAft>
+                <a:spcPts val="200"/>
+              </a:spcAft>
+            </a:pPr>
+            <a:r>
+              <a:rPr sz="1200" b="0">
+                <a:solidFill>
+                  <a:srgbClr val="D8CFC4"/>
+                </a:solidFill>
+                <a:latin typeface="Calibri"/>
+              </a:rPr>
+              <a:t>● Documented POPIA erasure runbook</a:t>
+            </a:r>
+          </a:p>
+          <a:p>
+            <a:pPr algn="l">
+              <a:spcAft>
+                <a:spcPts val="200"/>
+              </a:spcAft>
+            </a:pPr>
+            <a:r>
+              <a:rPr sz="1200" b="0">
+                <a:solidFill>
+                  <a:srgbClr val="D8CFC4"/>
+                </a:solidFill>
+                <a:latin typeface="Calibri"/>
+              </a:rPr>
+              <a:t>● All data resident in africa-south1</a:t>
+            </a:r>
+          </a:p>
+          <a:p>
+            <a:pPr algn="l">
+              <a:spcAft>
+                <a:spcPts val="200"/>
+              </a:spcAft>
+            </a:pPr>
+            <a:r>
+              <a:rPr sz="1200" b="0">
+                <a:solidFill>
+                  <a:srgbClr val="D8CFC4"/>
+                </a:solidFill>
+                <a:latin typeface="Calibri"/>
+              </a:rPr>
+              <a:t>● HMAC-signed WhatsApp webhook (rejects forged calls)</a:t>
+            </a:r>
+          </a:p>
+        </p:txBody>
+      </p:sp>
+    </p:spTree>
+  </p:cSld>
+  <p:clrMapOvr>
+    <a:masterClrMapping/>
+  </p:clrMapOvr>
+</p:sld>
+</file>
+
+<file path=ppt\slides\slide2.xml><?xml version="1.0" encoding="utf-8"?>
 <p:sld xmlns:a="http://schemas.openxmlformats.org/drawingml/2006/main" xmlns:p="http://schemas.openxmlformats.org/presentationml/2006/main" xmlns:r="http://schemas.openxmlformats.org/officeDocument/2006/relationships">
   <p:cSld>
     <p:spTree>
@@ -5851,7 +10055,7 @@
 </p:sld>
 </file>
 
-<file path=ppt/slides/slide3.xml><?xml version="1.0" encoding="utf-8"?>
+<file path=ppt\slides\slide3.xml><?xml version="1.0" encoding="utf-8"?>
 <p:sld xmlns:a="http://schemas.openxmlformats.org/drawingml/2006/main" xmlns:p="http://schemas.openxmlformats.org/presentationml/2006/main" xmlns:r="http://schemas.openxmlformats.org/officeDocument/2006/relationships">
   <p:cSld>
     <p:spTree>
@@ -6331,15 +10535,15 @@
         </p:blipFill>
         <p:spPr>
           <a:xfrm>
-            <a:off x="6812280" y="2376011"/>
-            <a:ext cx="4800600" cy="2700338"/>
+            <a:off x="6583680" y="2697480"/>
+            <a:ext cx="5029200" cy="2828571"/>
           </a:xfrm>
           <a:prstGeom prst="rect">
             <a:avLst/>
           </a:prstGeom>
-          <a:ln w="12700">
+          <a:ln w="15875">
             <a:solidFill>
-              <a:srgbClr val="C9BCAF"/>
+              <a:srgbClr val="FAF4EC"/>
             </a:solidFill>
           </a:ln>
         </p:spPr>
@@ -6352,8 +10556,8 @@
         </p:nvSpPr>
         <p:spPr>
           <a:xfrm>
-            <a:off x="6812280" y="5186076"/>
-            <a:ext cx="4800600" cy="365760"/>
+            <a:off x="6583680" y="5599203"/>
+            <a:ext cx="5029200" cy="365760"/>
           </a:xfrm>
           <a:prstGeom prst="rect">
             <a:avLst/>
@@ -6386,7 +10590,7 @@
 </p:sld>
 </file>
 
-<file path=ppt/slides/slide4.xml><?xml version="1.0" encoding="utf-8"?>
+<file path=ppt\slides\slide4.xml><?xml version="1.0" encoding="utf-8"?>
 <p:sld xmlns:a="http://schemas.openxmlformats.org/drawingml/2006/main" xmlns:p="http://schemas.openxmlformats.org/presentationml/2006/main" xmlns:r="http://schemas.openxmlformats.org/officeDocument/2006/relationships">
   <p:cSld>
     <p:spTree>
@@ -6971,7 +11175,419 @@
 </p:sld>
 </file>
 
-<file path=ppt/slides/slide5.xml><?xml version="1.0" encoding="utf-8"?>
+<file path=ppt\slides\slide5.xml><?xml version="1.0" encoding="utf-8"?>
+<p:sld xmlns:a="http://schemas.openxmlformats.org/drawingml/2006/main" xmlns:p="http://schemas.openxmlformats.org/presentationml/2006/main" xmlns:r="http://schemas.openxmlformats.org/officeDocument/2006/relationships">
+  <p:cSld>
+    <p:spTree>
+      <p:nvGrpSpPr>
+        <p:cNvPr id="1" name=""/>
+        <p:cNvGrpSpPr/>
+        <p:nvPr/>
+      </p:nvGrpSpPr>
+      <p:grpSpPr/>
+      <p:sp>
+        <p:nvSpPr>
+          <p:cNvPr id="2" name="Rectangle 1"/>
+          <p:cNvSpPr/>
+          <p:nvPr/>
+        </p:nvSpPr>
+        <p:spPr>
+          <a:xfrm>
+            <a:off x="0" y="0"/>
+            <a:ext cx="12191695" cy="6858000"/>
+          </a:xfrm>
+          <a:prstGeom prst="rect">
+            <a:avLst/>
+          </a:prstGeom>
+          <a:solidFill>
+            <a:srgbClr val="1F1612"/>
+          </a:solidFill>
+          <a:ln>
+            <a:noFill/>
+          </a:ln>
+        </p:spPr>
+        <p:style>
+          <a:lnRef idx="1">
+            <a:schemeClr val="accent1"/>
+          </a:lnRef>
+          <a:fillRef idx="3">
+            <a:schemeClr val="accent1"/>
+          </a:fillRef>
+          <a:effectRef idx="2">
+            <a:schemeClr val="accent1"/>
+          </a:effectRef>
+          <a:fontRef idx="minor">
+            <a:schemeClr val="lt1"/>
+          </a:fontRef>
+        </p:style>
+        <p:txBody>
+          <a:bodyPr rtlCol="0" anchor="ctr"/>
+          <a:lstStyle/>
+          <a:p>
+            <a:pPr algn="ctr"/>
+          </a:p>
+        </p:txBody>
+      </p:sp>
+      <p:sp>
+        <p:nvSpPr>
+          <p:cNvPr id="3" name="Rectangle 2"/>
+          <p:cNvSpPr/>
+          <p:nvPr/>
+        </p:nvSpPr>
+        <p:spPr>
+          <a:xfrm>
+            <a:off x="0" y="0"/>
+            <a:ext cx="320040" cy="6858000"/>
+          </a:xfrm>
+          <a:prstGeom prst="rect">
+            <a:avLst/>
+          </a:prstGeom>
+          <a:solidFill>
+            <a:srgbClr val="D97742"/>
+          </a:solidFill>
+          <a:ln>
+            <a:noFill/>
+          </a:ln>
+        </p:spPr>
+        <p:style>
+          <a:lnRef idx="1">
+            <a:schemeClr val="accent1"/>
+          </a:lnRef>
+          <a:fillRef idx="3">
+            <a:schemeClr val="accent1"/>
+          </a:fillRef>
+          <a:effectRef idx="2">
+            <a:schemeClr val="accent1"/>
+          </a:effectRef>
+          <a:fontRef idx="minor">
+            <a:schemeClr val="lt1"/>
+          </a:fontRef>
+        </p:style>
+        <p:txBody>
+          <a:bodyPr rtlCol="0" anchor="ctr"/>
+          <a:lstStyle/>
+          <a:p>
+            <a:pPr algn="ctr"/>
+          </a:p>
+        </p:txBody>
+      </p:sp>
+      <p:sp>
+        <p:nvSpPr>
+          <p:cNvPr id="4" name="TextBox 3"/>
+          <p:cNvSpPr txBox="1"/>
+          <p:nvPr/>
+        </p:nvSpPr>
+        <p:spPr>
+          <a:xfrm>
+            <a:off x="548640" y="548640"/>
+            <a:ext cx="8229600" cy="365760"/>
+          </a:xfrm>
+          <a:prstGeom prst="rect">
+            <a:avLst/>
+          </a:prstGeom>
+          <a:noFill/>
+        </p:spPr>
+        <p:txBody>
+          <a:bodyPr wrap="none">
+            <a:spAutoFit/>
+          </a:bodyPr>
+          <a:lstStyle/>
+          <a:p>
+            <a:r>
+              <a:rPr sz="1500" b="1">
+                <a:solidFill>
+                  <a:srgbClr val="D97742"/>
+                </a:solidFill>
+              </a:rPr>
+              <a:t>SHIPPED THIS WEEKEND</a:t>
+            </a:r>
+          </a:p>
+        </p:txBody>
+      </p:sp>
+      <p:sp>
+        <p:nvSpPr>
+          <p:cNvPr id="5" name="TextBox 4"/>
+          <p:cNvSpPr txBox="1"/>
+          <p:nvPr/>
+        </p:nvSpPr>
+        <p:spPr>
+          <a:xfrm>
+            <a:off x="548640" y="932688"/>
+            <a:ext cx="11064240" cy="914400"/>
+          </a:xfrm>
+          <a:prstGeom prst="rect">
+            <a:avLst/>
+          </a:prstGeom>
+          <a:noFill/>
+        </p:spPr>
+        <p:txBody>
+          <a:bodyPr wrap="none">
+            <a:spAutoFit/>
+          </a:bodyPr>
+          <a:lstStyle/>
+          <a:p>
+            <a:r>
+              <a:rPr sz="2900" b="1">
+                <a:solidFill>
+                  <a:srgbClr val="FAF4EC"/>
+                </a:solidFill>
+              </a:rPr>
+              <a:t>What we built at the hackathon.</a:t>
+            </a:r>
+          </a:p>
+        </p:txBody>
+      </p:sp>
+      <p:sp>
+        <p:nvSpPr>
+          <p:cNvPr id="6" name="TextBox 5"/>
+          <p:cNvSpPr txBox="1"/>
+          <p:nvPr/>
+        </p:nvSpPr>
+        <p:spPr>
+          <a:xfrm>
+            <a:off x="548640" y="1874519"/>
+            <a:ext cx="11155680" cy="4206240"/>
+          </a:xfrm>
+          <a:prstGeom prst="rect">
+            <a:avLst/>
+          </a:prstGeom>
+          <a:noFill/>
+        </p:spPr>
+        <p:txBody>
+          <a:bodyPr wrap="square">
+            <a:spAutoFit/>
+          </a:bodyPr>
+          <a:lstStyle/>
+          <a:p>
+            <a:pPr>
+              <a:spcAft>
+                <a:spcPts val="900"/>
+              </a:spcAft>
+            </a:pPr>
+            <a:r>
+              <a:rPr sz="1300" b="1">
+                <a:solidFill>
+                  <a:srgbClr val="D97742"/>
+                </a:solidFill>
+              </a:rPr>
+              <a:t>▸  </a:t>
+            </a:r>
+            <a:r>
+              <a:rPr sz="1300" b="1">
+                <a:solidFill>
+                  <a:srgbClr val="FAF4EC"/>
+                </a:solidFill>
+              </a:rPr>
+              <a:t>Employer hire over WhatsApp.  </a:t>
+            </a:r>
+            <a:r>
+              <a:rPr sz="1250">
+                <a:solidFill>
+                  <a:srgbClr val="F5DBB5"/>
+                </a:solidFill>
+              </a:rPr>
+              <a:t>Employers reply OFFERS to see applicants and ACCEPT to hire — the whole deal closes inside WhatsApp.</a:t>
+            </a:r>
+          </a:p>
+          <a:p>
+            <a:pPr>
+              <a:spcAft>
+                <a:spcPts val="900"/>
+              </a:spcAft>
+            </a:pPr>
+            <a:r>
+              <a:rPr sz="1300" b="1">
+                <a:solidFill>
+                  <a:srgbClr val="D97742"/>
+                </a:solidFill>
+              </a:rPr>
+              <a:t>▸  </a:t>
+            </a:r>
+            <a:r>
+              <a:rPr sz="1300" b="1">
+                <a:solidFill>
+                  <a:srgbClr val="FAF4EC"/>
+                </a:solidFill>
+              </a:rPr>
+              <a:t>App-less worker onboarding.  </a:t>
+            </a:r>
+            <a:r>
+              <a:rPr sz="1250">
+                <a:solidFill>
+                  <a:srgbClr val="F5DBB5"/>
+                </a:solidFill>
+              </a:rPr>
+              <a:t>A WhatsApp sign-up flow that feeds the real approval + verification pipeline — no auto-approval shortcuts.</a:t>
+            </a:r>
+          </a:p>
+          <a:p>
+            <a:pPr>
+              <a:spcAft>
+                <a:spcPts val="900"/>
+              </a:spcAft>
+            </a:pPr>
+            <a:r>
+              <a:rPr sz="1300" b="1">
+                <a:solidFill>
+                  <a:srgbClr val="D97742"/>
+                </a:solidFill>
+              </a:rPr>
+              <a:t>▸  </a:t>
+            </a:r>
+            <a:r>
+              <a:rPr sz="1300" b="1">
+                <a:solidFill>
+                  <a:srgbClr val="FAF4EC"/>
+                </a:solidFill>
+              </a:rPr>
+              <a:t>HELP / MENU command.  </a:t>
+            </a:r>
+            <a:r>
+              <a:rPr sz="1250">
+                <a:solidFill>
+                  <a:srgbClr val="F5DBB5"/>
+                </a:solidFill>
+              </a:rPr>
+              <a:t>First-time users can always ask what to text, so nobody gets stuck.</a:t>
+            </a:r>
+          </a:p>
+          <a:p>
+            <a:pPr>
+              <a:spcAft>
+                <a:spcPts val="900"/>
+              </a:spcAft>
+            </a:pPr>
+            <a:r>
+              <a:rPr sz="1300" b="1">
+                <a:solidFill>
+                  <a:srgbClr val="D97742"/>
+                </a:solidFill>
+              </a:rPr>
+              <a:t>▸  </a:t>
+            </a:r>
+            <a:r>
+              <a:rPr sz="1300" b="1">
+                <a:solidFill>
+                  <a:srgbClr val="FAF4EC"/>
+                </a:solidFill>
+              </a:rPr>
+              <a:t>Cold-window templates.  </a:t>
+            </a:r>
+            <a:r>
+              <a:rPr sz="1250">
+                <a:solidFill>
+                  <a:srgbClr val="F5DBB5"/>
+                </a:solidFill>
+              </a:rPr>
+              <a:t>Approved offer_received / offer_accepted templates so notifications still land outside the 24-hour window.</a:t>
+            </a:r>
+          </a:p>
+          <a:p>
+            <a:pPr>
+              <a:spcAft>
+                <a:spcPts val="900"/>
+              </a:spcAft>
+            </a:pPr>
+            <a:r>
+              <a:rPr sz="1300" b="1">
+                <a:solidFill>
+                  <a:srgbClr val="D97742"/>
+                </a:solidFill>
+              </a:rPr>
+              <a:t>▸  </a:t>
+            </a:r>
+            <a:r>
+              <a:rPr sz="1300" b="1">
+                <a:solidFill>
+                  <a:srgbClr val="FAF4EC"/>
+                </a:solidFill>
+              </a:rPr>
+              <a:t>Hardened reliability.  </a:t>
+            </a:r>
+            <a:r>
+              <a:rPr sz="1250">
+                <a:solidFill>
+                  <a:srgbClr val="F5DBB5"/>
+                </a:solidFill>
+              </a:rPr>
+              <a:t>Traced and fixed a live messaging-number fault; webhook, database and send path verified end-to-end.</a:t>
+            </a:r>
+          </a:p>
+          <a:p>
+            <a:pPr>
+              <a:spcAft>
+                <a:spcPts val="900"/>
+              </a:spcAft>
+            </a:pPr>
+            <a:r>
+              <a:rPr sz="1300" b="1">
+                <a:solidFill>
+                  <a:srgbClr val="D97742"/>
+                </a:solidFill>
+              </a:rPr>
+              <a:t>▸  </a:t>
+            </a:r>
+            <a:r>
+              <a:rPr sz="1300" b="1">
+                <a:solidFill>
+                  <a:srgbClr val="FAF4EC"/>
+                </a:solidFill>
+              </a:rPr>
+              <a:t>One app, one webhook.  </a:t>
+            </a:r>
+            <a:r>
+              <a:rPr sz="1250">
+                <a:solidFill>
+                  <a:srgbClr val="F5DBB5"/>
+                </a:solidFill>
+              </a:rPr>
+              <a:t>Jarvis, support and the Job Channel run on a single Meta app and webhook — clean to operate and scale.</a:t>
+            </a:r>
+          </a:p>
+        </p:txBody>
+      </p:sp>
+      <p:sp>
+        <p:nvSpPr>
+          <p:cNvPr id="7" name="TextBox 6"/>
+          <p:cNvSpPr txBox="1"/>
+          <p:nvPr/>
+        </p:nvSpPr>
+        <p:spPr>
+          <a:xfrm>
+            <a:off x="548640" y="6199632"/>
+            <a:ext cx="11064240" cy="411480"/>
+          </a:xfrm>
+          <a:prstGeom prst="rect">
+            <a:avLst/>
+          </a:prstGeom>
+          <a:noFill/>
+        </p:spPr>
+        <p:txBody>
+          <a:bodyPr wrap="none">
+            <a:spAutoFit/>
+          </a:bodyPr>
+          <a:lstStyle/>
+          <a:p>
+            <a:r>
+              <a:rPr sz="1250" i="1">
+                <a:solidFill>
+                  <a:srgbClr val="A7C5A0"/>
+                </a:solidFill>
+              </a:rPr>
+              <a:t>Shipped Friday–Sunday on the live production stack — real commits, logged in CHANGELOG.</a:t>
+            </a:r>
+          </a:p>
+        </p:txBody>
+      </p:sp>
+    </p:spTree>
+  </p:cSld>
+  <p:clrMapOvr>
+    <a:masterClrMapping/>
+  </p:clrMapOvr>
+</p:sld>
+</file>
+
+<file path=ppt\slides\slide6.xml><?xml version="1.0" encoding="utf-8"?>
 <p:sld xmlns:a="http://schemas.openxmlformats.org/drawingml/2006/main" xmlns:p="http://schemas.openxmlformats.org/presentationml/2006/main" xmlns:r="http://schemas.openxmlformats.org/officeDocument/2006/relationships">
   <p:cSld>
     <p:spTree>
@@ -8157,7 +12773,419 @@
 </p:sld>
 </file>
 
-<file path=ppt/slides/slide6.xml><?xml version="1.0" encoding="utf-8"?>
+<file path=ppt\slides\slide7.xml><?xml version="1.0" encoding="utf-8"?>
+<p:sld xmlns:a="http://schemas.openxmlformats.org/drawingml/2006/main" xmlns:p="http://schemas.openxmlformats.org/presentationml/2006/main" xmlns:r="http://schemas.openxmlformats.org/officeDocument/2006/relationships">
+  <p:cSld>
+    <p:spTree>
+      <p:nvGrpSpPr>
+        <p:cNvPr id="1" name=""/>
+        <p:cNvGrpSpPr/>
+        <p:nvPr/>
+      </p:nvGrpSpPr>
+      <p:grpSpPr/>
+      <p:sp>
+        <p:nvSpPr>
+          <p:cNvPr id="2" name="Rectangle 1"/>
+          <p:cNvSpPr/>
+          <p:nvPr/>
+        </p:nvSpPr>
+        <p:spPr>
+          <a:xfrm>
+            <a:off x="0" y="0"/>
+            <a:ext cx="12191695" cy="6858000"/>
+          </a:xfrm>
+          <a:prstGeom prst="rect">
+            <a:avLst/>
+          </a:prstGeom>
+          <a:solidFill>
+            <a:srgbClr val="FAF4EC"/>
+          </a:solidFill>
+          <a:ln>
+            <a:noFill/>
+          </a:ln>
+        </p:spPr>
+        <p:style>
+          <a:lnRef idx="1">
+            <a:schemeClr val="accent1"/>
+          </a:lnRef>
+          <a:fillRef idx="3">
+            <a:schemeClr val="accent1"/>
+          </a:fillRef>
+          <a:effectRef idx="2">
+            <a:schemeClr val="accent1"/>
+          </a:effectRef>
+          <a:fontRef idx="minor">
+            <a:schemeClr val="lt1"/>
+          </a:fontRef>
+        </p:style>
+        <p:txBody>
+          <a:bodyPr rtlCol="0" anchor="ctr"/>
+          <a:lstStyle/>
+          <a:p>
+            <a:pPr algn="ctr"/>
+          </a:p>
+        </p:txBody>
+      </p:sp>
+      <p:sp>
+        <p:nvSpPr>
+          <p:cNvPr id="3" name="Rectangle 2"/>
+          <p:cNvSpPr/>
+          <p:nvPr/>
+        </p:nvSpPr>
+        <p:spPr>
+          <a:xfrm>
+            <a:off x="0" y="0"/>
+            <a:ext cx="320040" cy="6858000"/>
+          </a:xfrm>
+          <a:prstGeom prst="rect">
+            <a:avLst/>
+          </a:prstGeom>
+          <a:solidFill>
+            <a:srgbClr val="D97742"/>
+          </a:solidFill>
+          <a:ln>
+            <a:noFill/>
+          </a:ln>
+        </p:spPr>
+        <p:style>
+          <a:lnRef idx="1">
+            <a:schemeClr val="accent1"/>
+          </a:lnRef>
+          <a:fillRef idx="3">
+            <a:schemeClr val="accent1"/>
+          </a:fillRef>
+          <a:effectRef idx="2">
+            <a:schemeClr val="accent1"/>
+          </a:effectRef>
+          <a:fontRef idx="minor">
+            <a:schemeClr val="lt1"/>
+          </a:fontRef>
+        </p:style>
+        <p:txBody>
+          <a:bodyPr rtlCol="0" anchor="ctr"/>
+          <a:lstStyle/>
+          <a:p>
+            <a:pPr algn="ctr"/>
+          </a:p>
+        </p:txBody>
+      </p:sp>
+      <p:sp>
+        <p:nvSpPr>
+          <p:cNvPr id="4" name="TextBox 3"/>
+          <p:cNvSpPr txBox="1"/>
+          <p:nvPr/>
+        </p:nvSpPr>
+        <p:spPr>
+          <a:xfrm>
+            <a:off x="548640" y="548640"/>
+            <a:ext cx="8229600" cy="365760"/>
+          </a:xfrm>
+          <a:prstGeom prst="rect">
+            <a:avLst/>
+          </a:prstGeom>
+          <a:noFill/>
+        </p:spPr>
+        <p:txBody>
+          <a:bodyPr wrap="none">
+            <a:spAutoFit/>
+          </a:bodyPr>
+          <a:lstStyle/>
+          <a:p>
+            <a:r>
+              <a:rPr sz="1500" b="1">
+                <a:solidFill>
+                  <a:srgbClr val="D97742"/>
+                </a:solidFill>
+              </a:rPr>
+              <a:t>TRUST &amp; SAFETY</a:t>
+            </a:r>
+          </a:p>
+        </p:txBody>
+      </p:sp>
+      <p:sp>
+        <p:nvSpPr>
+          <p:cNvPr id="5" name="TextBox 4"/>
+          <p:cNvSpPr txBox="1"/>
+          <p:nvPr/>
+        </p:nvSpPr>
+        <p:spPr>
+          <a:xfrm>
+            <a:off x="548640" y="932688"/>
+            <a:ext cx="11064240" cy="914400"/>
+          </a:xfrm>
+          <a:prstGeom prst="rect">
+            <a:avLst/>
+          </a:prstGeom>
+          <a:noFill/>
+        </p:spPr>
+        <p:txBody>
+          <a:bodyPr wrap="none">
+            <a:spAutoFit/>
+          </a:bodyPr>
+          <a:lstStyle/>
+          <a:p>
+            <a:r>
+              <a:rPr sz="2900" b="1">
+                <a:solidFill>
+                  <a:srgbClr val="1F1612"/>
+                </a:solidFill>
+              </a:rPr>
+              <a:t>Safe to meet, safe to get paid.</a:t>
+            </a:r>
+          </a:p>
+        </p:txBody>
+      </p:sp>
+      <p:sp>
+        <p:nvSpPr>
+          <p:cNvPr id="6" name="TextBox 5"/>
+          <p:cNvSpPr txBox="1"/>
+          <p:nvPr/>
+        </p:nvSpPr>
+        <p:spPr>
+          <a:xfrm>
+            <a:off x="548640" y="1874519"/>
+            <a:ext cx="11155680" cy="4206240"/>
+          </a:xfrm>
+          <a:prstGeom prst="rect">
+            <a:avLst/>
+          </a:prstGeom>
+          <a:noFill/>
+        </p:spPr>
+        <p:txBody>
+          <a:bodyPr wrap="square">
+            <a:spAutoFit/>
+          </a:bodyPr>
+          <a:lstStyle/>
+          <a:p>
+            <a:pPr>
+              <a:spcAft>
+                <a:spcPts val="900"/>
+              </a:spcAft>
+            </a:pPr>
+            <a:r>
+              <a:rPr sz="1300" b="1">
+                <a:solidFill>
+                  <a:srgbClr val="D97742"/>
+                </a:solidFill>
+              </a:rPr>
+              <a:t>▸  </a:t>
+            </a:r>
+            <a:r>
+              <a:rPr sz="1300" b="1">
+                <a:solidFill>
+                  <a:srgbClr val="1F1612"/>
+                </a:solidFill>
+              </a:rPr>
+              <a:t>Real-person ID verification.  </a:t>
+            </a:r>
+            <a:r>
+              <a:rPr sz="1250">
+                <a:solidFill>
+                  <a:srgbClr val="4A3A30"/>
+                </a:solidFill>
+              </a:rPr>
+              <a:t>SA ID + selfie checked before anyone can trade, earning a Verified badge both sides can see.</a:t>
+            </a:r>
+          </a:p>
+          <a:p>
+            <a:pPr>
+              <a:spcAft>
+                <a:spcPts val="900"/>
+              </a:spcAft>
+            </a:pPr>
+            <a:r>
+              <a:rPr sz="1300" b="1">
+                <a:solidFill>
+                  <a:srgbClr val="D97742"/>
+                </a:solidFill>
+              </a:rPr>
+              <a:t>▸  </a:t>
+            </a:r>
+            <a:r>
+              <a:rPr sz="1300" b="1">
+                <a:solidFill>
+                  <a:srgbClr val="1F1612"/>
+                </a:solidFill>
+              </a:rPr>
+              <a:t>Doorstep start-code.  </a:t>
+            </a:r>
+            <a:r>
+              <a:rPr sz="1250">
+                <a:solidFill>
+                  <a:srgbClr val="4A3A30"/>
+                </a:solidFill>
+              </a:rPr>
+              <a:t>The worker enters a one-time PIN at the job so the employer knows the right person started.</a:t>
+            </a:r>
+          </a:p>
+          <a:p>
+            <a:pPr>
+              <a:spcAft>
+                <a:spcPts val="900"/>
+              </a:spcAft>
+            </a:pPr>
+            <a:r>
+              <a:rPr sz="1300" b="1">
+                <a:solidFill>
+                  <a:srgbClr val="D97742"/>
+                </a:solidFill>
+              </a:rPr>
+              <a:t>▸  </a:t>
+            </a:r>
+            <a:r>
+              <a:rPr sz="1300" b="1">
+                <a:solidFill>
+                  <a:srgbClr val="1F1612"/>
+                </a:solidFill>
+              </a:rPr>
+              <a:t>Live location check-ins.  </a:t>
+            </a:r>
+            <a:r>
+              <a:rPr sz="1250">
+                <a:solidFill>
+                  <a:srgbClr val="4A3A30"/>
+                </a:solidFill>
+              </a:rPr>
+              <a:t>Optional location sharing while a job is underway, visible to a trusted contact.</a:t>
+            </a:r>
+          </a:p>
+          <a:p>
+            <a:pPr>
+              <a:spcAft>
+                <a:spcPts val="900"/>
+              </a:spcAft>
+            </a:pPr>
+            <a:r>
+              <a:rPr sz="1300" b="1">
+                <a:solidFill>
+                  <a:srgbClr val="D97742"/>
+                </a:solidFill>
+              </a:rPr>
+              <a:t>▸  </a:t>
+            </a:r>
+            <a:r>
+              <a:rPr sz="1300" b="1">
+                <a:solidFill>
+                  <a:srgbClr val="1F1612"/>
+                </a:solidFill>
+              </a:rPr>
+              <a:t>SOS to our safety team.  </a:t>
+            </a:r>
+            <a:r>
+              <a:rPr sz="1250">
+                <a:solidFill>
+                  <a:srgbClr val="4A3A30"/>
+                </a:solidFill>
+              </a:rPr>
+              <a:t>One tap or text raises an alert with location if something feels wrong.</a:t>
+            </a:r>
+          </a:p>
+          <a:p>
+            <a:pPr>
+              <a:spcAft>
+                <a:spcPts val="900"/>
+              </a:spcAft>
+            </a:pPr>
+            <a:r>
+              <a:rPr sz="1300" b="1">
+                <a:solidFill>
+                  <a:srgbClr val="D97742"/>
+                </a:solidFill>
+              </a:rPr>
+              <a:t>▸  </a:t>
+            </a:r>
+            <a:r>
+              <a:rPr sz="1300" b="1">
+                <a:solidFill>
+                  <a:srgbClr val="1F1612"/>
+                </a:solidFill>
+              </a:rPr>
+              <a:t>Admin MFA enforced.  </a:t>
+            </a:r>
+            <a:r>
+              <a:rPr sz="1250">
+                <a:solidFill>
+                  <a:srgbClr val="4A3A30"/>
+                </a:solidFill>
+              </a:rPr>
+              <a:t>Every admin account requires TOTP two-factor — no exceptions.</a:t>
+            </a:r>
+          </a:p>
+          <a:p>
+            <a:pPr>
+              <a:spcAft>
+                <a:spcPts val="900"/>
+              </a:spcAft>
+            </a:pPr>
+            <a:r>
+              <a:rPr sz="1300" b="1">
+                <a:solidFill>
+                  <a:srgbClr val="D97742"/>
+                </a:solidFill>
+              </a:rPr>
+              <a:t>▸  </a:t>
+            </a:r>
+            <a:r>
+              <a:rPr sz="1300" b="1">
+                <a:solidFill>
+                  <a:srgbClr val="1F1612"/>
+                </a:solidFill>
+              </a:rPr>
+              <a:t>POPIA-aligned by design.  </a:t>
+            </a:r>
+            <a:r>
+              <a:rPr sz="1250">
+                <a:solidFill>
+                  <a:srgbClr val="4A3A30"/>
+                </a:solidFill>
+              </a:rPr>
+              <a:t>Consent captured at signup, data resident in africa-south1, and a documented erasure runbook.</a:t>
+            </a:r>
+          </a:p>
+        </p:txBody>
+      </p:sp>
+      <p:sp>
+        <p:nvSpPr>
+          <p:cNvPr id="7" name="TextBox 6"/>
+          <p:cNvSpPr txBox="1"/>
+          <p:nvPr/>
+        </p:nvSpPr>
+        <p:spPr>
+          <a:xfrm>
+            <a:off x="548640" y="6199632"/>
+            <a:ext cx="11064240" cy="411480"/>
+          </a:xfrm>
+          <a:prstGeom prst="rect">
+            <a:avLst/>
+          </a:prstGeom>
+          <a:noFill/>
+        </p:spPr>
+        <p:txBody>
+          <a:bodyPr wrap="none">
+            <a:spAutoFit/>
+          </a:bodyPr>
+          <a:lstStyle/>
+          <a:p>
+            <a:r>
+              <a:rPr sz="1250" i="1">
+                <a:solidFill>
+                  <a:srgbClr val="6A5A4E"/>
+                </a:solidFill>
+              </a:rPr>
+              <a:t>Trust first — the whole marketplace depends on both sides feeling safe.</a:t>
+            </a:r>
+          </a:p>
+        </p:txBody>
+      </p:sp>
+    </p:spTree>
+  </p:cSld>
+  <p:clrMapOvr>
+    <a:masterClrMapping/>
+  </p:clrMapOvr>
+</p:sld>
+</file>
+
+<file path=ppt\slides\slide8.xml><?xml version="1.0" encoding="utf-8"?>
 <p:sld xmlns:a="http://schemas.openxmlformats.org/drawingml/2006/main" xmlns:p="http://schemas.openxmlformats.org/presentationml/2006/main" xmlns:r="http://schemas.openxmlformats.org/officeDocument/2006/relationships">
   <p:cSld>
     <p:spTree>
@@ -8607,7 +13635,7 @@
                 </a:solidFill>
                 <a:latin typeface="Calibri"/>
               </a:rPr>
-              <a:t>Judge login</a:t>
+              <a:t>Judge logins</a:t>
             </a:r>
           </a:p>
         </p:txBody>
@@ -8690,13 +13718,23 @@
               </a:spcAft>
             </a:pPr>
             <a:r>
-              <a:rPr sz="1350" b="0" i="0">
+              <a:rPr sz="1000" b="0" i="0">
                 <a:solidFill>
                   <a:srgbClr val="1F1612"/>
                 </a:solidFill>
                 <a:latin typeface="Calibri"/>
               </a:rPr>
-              <a:t>[DEMO EMAIL]  /  [DEMO PASSWORD]   (pre-verified account)</a:t>
+              <a:t>Employer  ·  judges2610@gmail.com  ·  password  Judges2026</a:t>
+            </a:r>
+          </a:p>
+          <a:p>
+            <a:r>
+              <a:rPr sz="1000" b="0">
+                <a:solidFill>
+                  <a:srgbClr val="1F1612"/>
+                </a:solidFill>
+              </a:rPr>
+              <a:t>Worker  ·  judges2610+worker@gmail.com  ·  password  Judges2026</a:t>
             </a:r>
           </a:p>
         </p:txBody>
@@ -8874,7 +13912,7 @@
                 </a:solidFill>
                 <a:latin typeface="Calibri"/>
               </a:rPr>
-              <a:t>Shown in the demo video below</a:t>
+              <a:t>Text HI to +27 74 320 7131 — full onboarding in WhatsApp</a:t>
             </a:r>
           </a:p>
         </p:txBody>
@@ -9173,7 +14211,7 @@
 </p:sld>
 </file>
 
-<file path=ppt/slides/slide7.xml><?xml version="1.0" encoding="utf-8"?>
+<file path=ppt\slides\slide9.xml><?xml version="1.0" encoding="utf-8"?>
 <p:sld xmlns:a="http://schemas.openxmlformats.org/drawingml/2006/main" xmlns:p="http://schemas.openxmlformats.org/presentationml/2006/main" xmlns:r="http://schemas.openxmlformats.org/officeDocument/2006/relationships">
   <p:cSld>
     <p:spTree>
@@ -9644,1871 +14682,11 @@
 </p:sld>
 </file>
 
-<file path=ppt/slides/slide8.xml><?xml version="1.0" encoding="utf-8"?>
-<p:sld xmlns:a="http://schemas.openxmlformats.org/drawingml/2006/main" xmlns:p="http://schemas.openxmlformats.org/presentationml/2006/main" xmlns:r="http://schemas.openxmlformats.org/officeDocument/2006/relationships">
-  <p:cSld>
-    <p:spTree>
-      <p:nvGrpSpPr>
-        <p:cNvPr id="1" name=""/>
-        <p:cNvGrpSpPr/>
-        <p:nvPr/>
-      </p:nvGrpSpPr>
-      <p:grpSpPr/>
-      <p:sp>
-        <p:nvSpPr>
-          <p:cNvPr id="2" name="Rectangle 1"/>
-          <p:cNvSpPr/>
-          <p:nvPr/>
-        </p:nvSpPr>
-        <p:spPr>
-          <a:xfrm>
-            <a:off x="0" y="0"/>
-            <a:ext cx="12191695" cy="6858000"/>
-          </a:xfrm>
-          <a:prstGeom prst="rect">
-            <a:avLst/>
-          </a:prstGeom>
-          <a:solidFill>
-            <a:srgbClr val="FAF4EC"/>
-          </a:solidFill>
-          <a:ln>
-            <a:noFill/>
-          </a:ln>
-          <a:effectLst/>
-        </p:spPr>
-        <p:style>
-          <a:lnRef idx="1">
-            <a:schemeClr val="accent1"/>
-          </a:lnRef>
-          <a:fillRef idx="3">
-            <a:schemeClr val="accent1"/>
-          </a:fillRef>
-          <a:effectRef idx="2">
-            <a:schemeClr val="accent1"/>
-          </a:effectRef>
-          <a:fontRef idx="minor">
-            <a:schemeClr val="lt1"/>
-          </a:fontRef>
-        </p:style>
-        <p:txBody>
-          <a:bodyPr rtlCol="0" anchor="ctr"/>
-          <a:lstStyle/>
-          <a:p>
-            <a:pPr algn="ctr"/>
-          </a:p>
-        </p:txBody>
-      </p:sp>
-      <p:sp>
-        <p:nvSpPr>
-          <p:cNvPr id="3" name="Rectangle 2"/>
-          <p:cNvSpPr/>
-          <p:nvPr/>
-        </p:nvSpPr>
-        <p:spPr>
-          <a:xfrm>
-            <a:off x="548640" y="566928"/>
-            <a:ext cx="457200" cy="82296"/>
-          </a:xfrm>
-          <a:prstGeom prst="rect">
-            <a:avLst/>
-          </a:prstGeom>
-          <a:solidFill>
-            <a:srgbClr val="D97742"/>
-          </a:solidFill>
-          <a:ln>
-            <a:noFill/>
-          </a:ln>
-          <a:effectLst/>
-        </p:spPr>
-        <p:style>
-          <a:lnRef idx="1">
-            <a:schemeClr val="accent1"/>
-          </a:lnRef>
-          <a:fillRef idx="3">
-            <a:schemeClr val="accent1"/>
-          </a:fillRef>
-          <a:effectRef idx="2">
-            <a:schemeClr val="accent1"/>
-          </a:effectRef>
-          <a:fontRef idx="minor">
-            <a:schemeClr val="lt1"/>
-          </a:fontRef>
-        </p:style>
-        <p:txBody>
-          <a:bodyPr rtlCol="0" anchor="ctr"/>
-          <a:lstStyle/>
-          <a:p>
-            <a:pPr algn="ctr"/>
-          </a:p>
-        </p:txBody>
-      </p:sp>
-      <p:sp>
-        <p:nvSpPr>
-          <p:cNvPr id="4" name="TextBox 3"/>
-          <p:cNvSpPr txBox="1"/>
-          <p:nvPr/>
-        </p:nvSpPr>
-        <p:spPr>
-          <a:xfrm>
-            <a:off x="548640" y="713232"/>
-            <a:ext cx="10058400" cy="365760"/>
-          </a:xfrm>
-          <a:prstGeom prst="rect">
-            <a:avLst/>
-          </a:prstGeom>
-          <a:noFill/>
-        </p:spPr>
-        <p:txBody>
-          <a:bodyPr wrap="square" anchor="t">
-            <a:spAutoFit/>
-          </a:bodyPr>
-          <a:lstStyle/>
-          <a:p>
-            <a:pPr algn="l">
-              <a:lnSpc>
-                <a:spcPct val="105000"/>
-              </a:lnSpc>
-              <a:spcBef>
-                <a:spcPts val="0"/>
-              </a:spcBef>
-              <a:spcAft>
-                <a:spcPts val="600"/>
-              </a:spcAft>
-            </a:pPr>
-            <a:r>
-              <a:rPr sz="1500" b="1" i="0">
-                <a:solidFill>
-                  <a:srgbClr val="B45A2C"/>
-                </a:solidFill>
-                <a:latin typeface="Calibri"/>
-              </a:rPr>
-              <a:t>ARCHITECTURE &amp; SECURITY</a:t>
-            </a:r>
-          </a:p>
-        </p:txBody>
-      </p:sp>
-      <p:sp>
-        <p:nvSpPr>
-          <p:cNvPr id="5" name="TextBox 4"/>
-          <p:cNvSpPr txBox="1"/>
-          <p:nvPr/>
-        </p:nvSpPr>
-        <p:spPr>
-          <a:xfrm>
-            <a:off x="548640" y="1024128"/>
-            <a:ext cx="11064240" cy="1097280"/>
-          </a:xfrm>
-          <a:prstGeom prst="rect">
-            <a:avLst/>
-          </a:prstGeom>
-          <a:noFill/>
-        </p:spPr>
-        <p:txBody>
-          <a:bodyPr wrap="square" anchor="t">
-            <a:spAutoFit/>
-          </a:bodyPr>
-          <a:lstStyle/>
-          <a:p>
-            <a:pPr algn="l">
-              <a:lnSpc>
-                <a:spcPct val="100000"/>
-              </a:lnSpc>
-              <a:spcBef>
-                <a:spcPts val="0"/>
-              </a:spcBef>
-              <a:spcAft>
-                <a:spcPts val="600"/>
-              </a:spcAft>
-            </a:pPr>
-            <a:r>
-              <a:rPr sz="3000" b="1" i="0">
-                <a:solidFill>
-                  <a:srgbClr val="1F1612"/>
-                </a:solidFill>
-                <a:latin typeface="Calibri"/>
-              </a:rPr>
-              <a:t>Built secure, built for South Africa.</a:t>
-            </a:r>
-          </a:p>
-        </p:txBody>
-      </p:sp>
-      <p:sp>
-        <p:nvSpPr>
-          <p:cNvPr id="6" name="TextBox 5"/>
-          <p:cNvSpPr txBox="1"/>
-          <p:nvPr/>
-        </p:nvSpPr>
-        <p:spPr>
-          <a:xfrm>
-            <a:off x="548640" y="1783080"/>
-            <a:ext cx="5486400" cy="365760"/>
-          </a:xfrm>
-          <a:prstGeom prst="rect">
-            <a:avLst/>
-          </a:prstGeom>
-          <a:noFill/>
-        </p:spPr>
-        <p:txBody>
-          <a:bodyPr wrap="square" anchor="t">
-            <a:spAutoFit/>
-          </a:bodyPr>
-          <a:lstStyle/>
-          <a:p>
-            <a:pPr algn="l">
-              <a:lnSpc>
-                <a:spcPct val="105000"/>
-              </a:lnSpc>
-              <a:spcBef>
-                <a:spcPts val="0"/>
-              </a:spcBef>
-              <a:spcAft>
-                <a:spcPts val="600"/>
-              </a:spcAft>
-            </a:pPr>
-            <a:r>
-              <a:rPr sz="1600" b="1" i="0">
-                <a:solidFill>
-                  <a:srgbClr val="B45A2C"/>
-                </a:solidFill>
-                <a:latin typeface="Calibri"/>
-              </a:rPr>
-              <a:t>Technical architecture</a:t>
-            </a:r>
-          </a:p>
-        </p:txBody>
-      </p:sp>
-      <p:sp>
-        <p:nvSpPr>
-          <p:cNvPr id="7" name="Rounded Rectangle 6"/>
-          <p:cNvSpPr/>
-          <p:nvPr/>
-        </p:nvSpPr>
-        <p:spPr>
-          <a:xfrm>
-            <a:off x="548640" y="2240280"/>
-            <a:ext cx="5212080" cy="457200"/>
-          </a:xfrm>
-          <a:prstGeom prst="roundRect">
-            <a:avLst/>
-          </a:prstGeom>
-          <a:solidFill>
-            <a:srgbClr val="F5DBB5"/>
-          </a:solidFill>
-          <a:ln>
-            <a:noFill/>
-          </a:ln>
-          <a:effectLst/>
-        </p:spPr>
-        <p:style>
-          <a:lnRef idx="1">
-            <a:schemeClr val="accent1"/>
-          </a:lnRef>
-          <a:fillRef idx="3">
-            <a:schemeClr val="accent1"/>
-          </a:fillRef>
-          <a:effectRef idx="2">
-            <a:schemeClr val="accent1"/>
-          </a:effectRef>
-          <a:fontRef idx="minor">
-            <a:schemeClr val="lt1"/>
-          </a:fontRef>
-        </p:style>
-        <p:txBody>
-          <a:bodyPr rtlCol="0" anchor="ctr"/>
-          <a:lstStyle/>
-          <a:p>
-            <a:pPr algn="ctr"/>
-          </a:p>
-        </p:txBody>
-      </p:sp>
-      <p:sp>
-        <p:nvSpPr>
-          <p:cNvPr id="8" name="TextBox 7"/>
-          <p:cNvSpPr txBox="1"/>
-          <p:nvPr/>
-        </p:nvSpPr>
-        <p:spPr>
-          <a:xfrm>
-            <a:off x="731520" y="2240280"/>
-            <a:ext cx="4937760" cy="457200"/>
-          </a:xfrm>
-          <a:prstGeom prst="rect">
-            <a:avLst/>
-          </a:prstGeom>
-          <a:noFill/>
-        </p:spPr>
-        <p:txBody>
-          <a:bodyPr wrap="square" anchor="ctr">
-            <a:spAutoFit/>
-          </a:bodyPr>
-          <a:lstStyle/>
-          <a:p>
-            <a:pPr algn="l">
-              <a:lnSpc>
-                <a:spcPct val="105000"/>
-              </a:lnSpc>
-              <a:spcBef>
-                <a:spcPts val="0"/>
-              </a:spcBef>
-              <a:spcAft>
-                <a:spcPts val="600"/>
-              </a:spcAft>
-            </a:pPr>
-            <a:r>
-              <a:rPr sz="1300" b="1" i="0">
-                <a:solidFill>
-                  <a:srgbClr val="1F1612"/>
-                </a:solidFill>
-                <a:latin typeface="Calibri"/>
-              </a:rPr>
-              <a:t>Next.js PWA (static export)</a:t>
-            </a:r>
-          </a:p>
-        </p:txBody>
-      </p:sp>
-      <p:sp>
-        <p:nvSpPr>
-          <p:cNvPr id="9" name="Rounded Rectangle 8"/>
-          <p:cNvSpPr/>
-          <p:nvPr/>
-        </p:nvSpPr>
-        <p:spPr>
-          <a:xfrm>
-            <a:off x="548640" y="2807208"/>
-            <a:ext cx="5212080" cy="457200"/>
-          </a:xfrm>
-          <a:prstGeom prst="roundRect">
-            <a:avLst/>
-          </a:prstGeom>
-          <a:solidFill>
-            <a:srgbClr val="F5DBB5"/>
-          </a:solidFill>
-          <a:ln>
-            <a:noFill/>
-          </a:ln>
-          <a:effectLst/>
-        </p:spPr>
-        <p:style>
-          <a:lnRef idx="1">
-            <a:schemeClr val="accent1"/>
-          </a:lnRef>
-          <a:fillRef idx="3">
-            <a:schemeClr val="accent1"/>
-          </a:fillRef>
-          <a:effectRef idx="2">
-            <a:schemeClr val="accent1"/>
-          </a:effectRef>
-          <a:fontRef idx="minor">
-            <a:schemeClr val="lt1"/>
-          </a:fontRef>
-        </p:style>
-        <p:txBody>
-          <a:bodyPr rtlCol="0" anchor="ctr"/>
-          <a:lstStyle/>
-          <a:p>
-            <a:pPr algn="ctr"/>
-          </a:p>
-        </p:txBody>
-      </p:sp>
-      <p:sp>
-        <p:nvSpPr>
-          <p:cNvPr id="10" name="TextBox 9"/>
-          <p:cNvSpPr txBox="1"/>
-          <p:nvPr/>
-        </p:nvSpPr>
-        <p:spPr>
-          <a:xfrm>
-            <a:off x="731520" y="2807208"/>
-            <a:ext cx="4937760" cy="457200"/>
-          </a:xfrm>
-          <a:prstGeom prst="rect">
-            <a:avLst/>
-          </a:prstGeom>
-          <a:noFill/>
-        </p:spPr>
-        <p:txBody>
-          <a:bodyPr wrap="square" anchor="ctr">
-            <a:spAutoFit/>
-          </a:bodyPr>
-          <a:lstStyle/>
-          <a:p>
-            <a:pPr algn="l">
-              <a:lnSpc>
-                <a:spcPct val="105000"/>
-              </a:lnSpc>
-              <a:spcBef>
-                <a:spcPts val="0"/>
-              </a:spcBef>
-              <a:spcAft>
-                <a:spcPts val="600"/>
-              </a:spcAft>
-            </a:pPr>
-            <a:r>
-              <a:rPr sz="1300" b="1" i="0">
-                <a:solidFill>
-                  <a:srgbClr val="1F1612"/>
-                </a:solidFill>
-                <a:latin typeface="Calibri"/>
-              </a:rPr>
-              <a:t>Firebase Auth — phone OTP / email / Google</a:t>
-            </a:r>
-          </a:p>
-        </p:txBody>
-      </p:sp>
-      <p:sp>
-        <p:nvSpPr>
-          <p:cNvPr id="11" name="Rounded Rectangle 10"/>
-          <p:cNvSpPr/>
-          <p:nvPr/>
-        </p:nvSpPr>
-        <p:spPr>
-          <a:xfrm>
-            <a:off x="548640" y="3374136"/>
-            <a:ext cx="5212080" cy="457200"/>
-          </a:xfrm>
-          <a:prstGeom prst="roundRect">
-            <a:avLst/>
-          </a:prstGeom>
-          <a:solidFill>
-            <a:srgbClr val="F5DBB5"/>
-          </a:solidFill>
-          <a:ln>
-            <a:noFill/>
-          </a:ln>
-          <a:effectLst/>
-        </p:spPr>
-        <p:style>
-          <a:lnRef idx="1">
-            <a:schemeClr val="accent1"/>
-          </a:lnRef>
-          <a:fillRef idx="3">
-            <a:schemeClr val="accent1"/>
-          </a:fillRef>
-          <a:effectRef idx="2">
-            <a:schemeClr val="accent1"/>
-          </a:effectRef>
-          <a:fontRef idx="minor">
-            <a:schemeClr val="lt1"/>
-          </a:fontRef>
-        </p:style>
-        <p:txBody>
-          <a:bodyPr rtlCol="0" anchor="ctr"/>
-          <a:lstStyle/>
-          <a:p>
-            <a:pPr algn="ctr"/>
-          </a:p>
-        </p:txBody>
-      </p:sp>
-      <p:sp>
-        <p:nvSpPr>
-          <p:cNvPr id="12" name="TextBox 11"/>
-          <p:cNvSpPr txBox="1"/>
-          <p:nvPr/>
-        </p:nvSpPr>
-        <p:spPr>
-          <a:xfrm>
-            <a:off x="731520" y="3374136"/>
-            <a:ext cx="4937760" cy="457200"/>
-          </a:xfrm>
-          <a:prstGeom prst="rect">
-            <a:avLst/>
-          </a:prstGeom>
-          <a:noFill/>
-        </p:spPr>
-        <p:txBody>
-          <a:bodyPr wrap="square" anchor="ctr">
-            <a:spAutoFit/>
-          </a:bodyPr>
-          <a:lstStyle/>
-          <a:p>
-            <a:pPr algn="l">
-              <a:lnSpc>
-                <a:spcPct val="105000"/>
-              </a:lnSpc>
-              <a:spcBef>
-                <a:spcPts val="0"/>
-              </a:spcBef>
-              <a:spcAft>
-                <a:spcPts val="600"/>
-              </a:spcAft>
-            </a:pPr>
-            <a:r>
-              <a:rPr sz="1300" b="1" i="0">
-                <a:solidFill>
-                  <a:srgbClr val="1F1612"/>
-                </a:solidFill>
-                <a:latin typeface="Calibri"/>
-              </a:rPr>
-              <a:t>Firestore + Cloud Storage</a:t>
-            </a:r>
-          </a:p>
-        </p:txBody>
-      </p:sp>
-      <p:sp>
-        <p:nvSpPr>
-          <p:cNvPr id="13" name="Rounded Rectangle 12"/>
-          <p:cNvSpPr/>
-          <p:nvPr/>
-        </p:nvSpPr>
-        <p:spPr>
-          <a:xfrm>
-            <a:off x="548640" y="3941064"/>
-            <a:ext cx="5212080" cy="457200"/>
-          </a:xfrm>
-          <a:prstGeom prst="roundRect">
-            <a:avLst/>
-          </a:prstGeom>
-          <a:solidFill>
-            <a:srgbClr val="F5DBB5"/>
-          </a:solidFill>
-          <a:ln>
-            <a:noFill/>
-          </a:ln>
-          <a:effectLst/>
-        </p:spPr>
-        <p:style>
-          <a:lnRef idx="1">
-            <a:schemeClr val="accent1"/>
-          </a:lnRef>
-          <a:fillRef idx="3">
-            <a:schemeClr val="accent1"/>
-          </a:fillRef>
-          <a:effectRef idx="2">
-            <a:schemeClr val="accent1"/>
-          </a:effectRef>
-          <a:fontRef idx="minor">
-            <a:schemeClr val="lt1"/>
-          </a:fontRef>
-        </p:style>
-        <p:txBody>
-          <a:bodyPr rtlCol="0" anchor="ctr"/>
-          <a:lstStyle/>
-          <a:p>
-            <a:pPr algn="ctr"/>
-          </a:p>
-        </p:txBody>
-      </p:sp>
-      <p:sp>
-        <p:nvSpPr>
-          <p:cNvPr id="14" name="TextBox 13"/>
-          <p:cNvSpPr txBox="1"/>
-          <p:nvPr/>
-        </p:nvSpPr>
-        <p:spPr>
-          <a:xfrm>
-            <a:off x="731520" y="3941064"/>
-            <a:ext cx="4937760" cy="457200"/>
-          </a:xfrm>
-          <a:prstGeom prst="rect">
-            <a:avLst/>
-          </a:prstGeom>
-          <a:noFill/>
-        </p:spPr>
-        <p:txBody>
-          <a:bodyPr wrap="square" anchor="ctr">
-            <a:spAutoFit/>
-          </a:bodyPr>
-          <a:lstStyle/>
-          <a:p>
-            <a:pPr algn="l">
-              <a:lnSpc>
-                <a:spcPct val="105000"/>
-              </a:lnSpc>
-              <a:spcBef>
-                <a:spcPts val="0"/>
-              </a:spcBef>
-              <a:spcAft>
-                <a:spcPts val="600"/>
-              </a:spcAft>
-            </a:pPr>
-            <a:r>
-              <a:rPr sz="1300" b="1" i="0">
-                <a:solidFill>
-                  <a:srgbClr val="1F1612"/>
-                </a:solidFill>
-                <a:latin typeface="Calibri"/>
-              </a:rPr>
-              <a:t>Cloud Functions (africa-south1)</a:t>
-            </a:r>
-          </a:p>
-        </p:txBody>
-      </p:sp>
-      <p:sp>
-        <p:nvSpPr>
-          <p:cNvPr id="15" name="Rounded Rectangle 14"/>
-          <p:cNvSpPr/>
-          <p:nvPr/>
-        </p:nvSpPr>
-        <p:spPr>
-          <a:xfrm>
-            <a:off x="548640" y="4507992"/>
-            <a:ext cx="5212080" cy="457200"/>
-          </a:xfrm>
-          <a:prstGeom prst="roundRect">
-            <a:avLst/>
-          </a:prstGeom>
-          <a:solidFill>
-            <a:srgbClr val="F5DBB5"/>
-          </a:solidFill>
-          <a:ln>
-            <a:noFill/>
-          </a:ln>
-          <a:effectLst/>
-        </p:spPr>
-        <p:style>
-          <a:lnRef idx="1">
-            <a:schemeClr val="accent1"/>
-          </a:lnRef>
-          <a:fillRef idx="3">
-            <a:schemeClr val="accent1"/>
-          </a:fillRef>
-          <a:effectRef idx="2">
-            <a:schemeClr val="accent1"/>
-          </a:effectRef>
-          <a:fontRef idx="minor">
-            <a:schemeClr val="lt1"/>
-          </a:fontRef>
-        </p:style>
-        <p:txBody>
-          <a:bodyPr rtlCol="0" anchor="ctr"/>
-          <a:lstStyle/>
-          <a:p>
-            <a:pPr algn="ctr"/>
-          </a:p>
-        </p:txBody>
-      </p:sp>
-      <p:sp>
-        <p:nvSpPr>
-          <p:cNvPr id="16" name="TextBox 15"/>
-          <p:cNvSpPr txBox="1"/>
-          <p:nvPr/>
-        </p:nvSpPr>
-        <p:spPr>
-          <a:xfrm>
-            <a:off x="731520" y="4507992"/>
-            <a:ext cx="4937760" cy="457200"/>
-          </a:xfrm>
-          <a:prstGeom prst="rect">
-            <a:avLst/>
-          </a:prstGeom>
-          <a:noFill/>
-        </p:spPr>
-        <p:txBody>
-          <a:bodyPr wrap="square" anchor="ctr">
-            <a:spAutoFit/>
-          </a:bodyPr>
-          <a:lstStyle/>
-          <a:p>
-            <a:pPr algn="l">
-              <a:lnSpc>
-                <a:spcPct val="105000"/>
-              </a:lnSpc>
-              <a:spcBef>
-                <a:spcPts val="0"/>
-              </a:spcBef>
-              <a:spcAft>
-                <a:spcPts val="600"/>
-              </a:spcAft>
-            </a:pPr>
-            <a:r>
-              <a:rPr sz="1300" b="1" i="0">
-                <a:solidFill>
-                  <a:srgbClr val="1F1612"/>
-                </a:solidFill>
-                <a:latin typeface="Calibri"/>
-              </a:rPr>
-              <a:t>FCM push · WhatsApp Cloud API · Gemini</a:t>
-            </a:r>
-          </a:p>
-        </p:txBody>
-      </p:sp>
-      <p:sp>
-        <p:nvSpPr>
-          <p:cNvPr id="17" name="Rounded Rectangle 16"/>
-          <p:cNvSpPr/>
-          <p:nvPr/>
-        </p:nvSpPr>
-        <p:spPr>
-          <a:xfrm>
-            <a:off x="548640" y="5303520"/>
-            <a:ext cx="3355848" cy="329184"/>
-          </a:xfrm>
-          <a:prstGeom prst="roundRect">
-            <a:avLst/>
-          </a:prstGeom>
-          <a:solidFill>
-            <a:srgbClr val="2F8F83"/>
-          </a:solidFill>
-          <a:ln>
-            <a:noFill/>
-          </a:ln>
-          <a:effectLst/>
-        </p:spPr>
-        <p:style>
-          <a:lnRef idx="1">
-            <a:schemeClr val="accent1"/>
-          </a:lnRef>
-          <a:fillRef idx="3">
-            <a:schemeClr val="accent1"/>
-          </a:fillRef>
-          <a:effectRef idx="2">
-            <a:schemeClr val="accent1"/>
-          </a:effectRef>
-          <a:fontRef idx="minor">
-            <a:schemeClr val="lt1"/>
-          </a:fontRef>
-        </p:style>
-        <p:txBody>
-          <a:bodyPr rtlCol="0" anchor="ctr" wrap="none" tIns="18288" bIns="18288"/>
-          <a:lstStyle/>
-          <a:p>
-            <a:pPr algn="ctr"/>
-            <a:r>
-              <a:rPr sz="1200" b="1">
-                <a:solidFill>
-                  <a:srgbClr val="FFFFFF"/>
-                </a:solidFill>
-                <a:latin typeface="Calibri"/>
-              </a:rPr>
-              <a:t>All data resident in africa-south1</a:t>
-            </a:r>
-          </a:p>
-        </p:txBody>
-      </p:sp>
-      <p:sp>
-        <p:nvSpPr>
-          <p:cNvPr id="18" name="TextBox 17"/>
-          <p:cNvSpPr txBox="1"/>
-          <p:nvPr/>
-        </p:nvSpPr>
-        <p:spPr>
-          <a:xfrm>
-            <a:off x="6309360" y="1783080"/>
-            <a:ext cx="5486400" cy="365760"/>
-          </a:xfrm>
-          <a:prstGeom prst="rect">
-            <a:avLst/>
-          </a:prstGeom>
-          <a:noFill/>
-        </p:spPr>
-        <p:txBody>
-          <a:bodyPr wrap="square" anchor="t">
-            <a:spAutoFit/>
-          </a:bodyPr>
-          <a:lstStyle/>
-          <a:p>
-            <a:pPr algn="l">
-              <a:lnSpc>
-                <a:spcPct val="105000"/>
-              </a:lnSpc>
-              <a:spcBef>
-                <a:spcPts val="0"/>
-              </a:spcBef>
-              <a:spcAft>
-                <a:spcPts val="600"/>
-              </a:spcAft>
-            </a:pPr>
-            <a:r>
-              <a:rPr sz="1600" b="1" i="0">
-                <a:solidFill>
-                  <a:srgbClr val="B45A2C"/>
-                </a:solidFill>
-                <a:latin typeface="Calibri"/>
-              </a:rPr>
-              <a:t>Security &amp; compliance</a:t>
-            </a:r>
-          </a:p>
-        </p:txBody>
-      </p:sp>
-      <p:sp>
-        <p:nvSpPr>
-          <p:cNvPr id="19" name="TextBox 18"/>
-          <p:cNvSpPr txBox="1"/>
-          <p:nvPr/>
-        </p:nvSpPr>
-        <p:spPr>
-          <a:xfrm>
-            <a:off x="6309360" y="2240280"/>
-            <a:ext cx="5303520" cy="4572000"/>
-          </a:xfrm>
-          <a:prstGeom prst="rect">
-            <a:avLst/>
-          </a:prstGeom>
-          <a:noFill/>
-        </p:spPr>
-        <p:txBody>
-          <a:bodyPr wrap="square" anchor="t">
-            <a:spAutoFit/>
-          </a:bodyPr>
-          <a:lstStyle/>
-          <a:p>
-            <a:pPr algn="l">
-              <a:lnSpc>
-                <a:spcPct val="104000"/>
-              </a:lnSpc>
-              <a:spcBef>
-                <a:spcPts val="0"/>
-              </a:spcBef>
-              <a:spcAft>
-                <a:spcPts val="900"/>
-              </a:spcAft>
-            </a:pPr>
-            <a:r>
-              <a:rPr sz="1350" b="1" i="0">
-                <a:solidFill>
-                  <a:srgbClr val="A93226"/>
-                </a:solidFill>
-                <a:latin typeface="Calibri"/>
-              </a:rPr>
-              <a:t>▸  </a:t>
-            </a:r>
-            <a:r>
-              <a:rPr sz="1350" b="0" i="0">
-                <a:solidFill>
-                  <a:srgbClr val="4A3A30"/>
-                </a:solidFill>
-                <a:latin typeface="Calibri"/>
-              </a:rPr>
-              <a:t>TOTP MFA enforced for all admins</a:t>
-            </a:r>
-          </a:p>
-          <a:p>
-            <a:pPr algn="l">
-              <a:lnSpc>
-                <a:spcPct val="104000"/>
-              </a:lnSpc>
-              <a:spcBef>
-                <a:spcPts val="0"/>
-              </a:spcBef>
-              <a:spcAft>
-                <a:spcPts val="900"/>
-              </a:spcAft>
-            </a:pPr>
-            <a:r>
-              <a:rPr sz="1350" b="1" i="0">
-                <a:solidFill>
-                  <a:srgbClr val="A93226"/>
-                </a:solidFill>
-                <a:latin typeface="Calibri"/>
-              </a:rPr>
-              <a:t>▸  </a:t>
-            </a:r>
-            <a:r>
-              <a:rPr sz="1350" b="0" i="0">
-                <a:solidFill>
-                  <a:srgbClr val="4A3A30"/>
-                </a:solidFill>
-                <a:latin typeface="Calibri"/>
-              </a:rPr>
-              <a:t>Real-person ID verification before you can trade</a:t>
-            </a:r>
-          </a:p>
-          <a:p>
-            <a:pPr algn="l">
-              <a:lnSpc>
-                <a:spcPct val="104000"/>
-              </a:lnSpc>
-              <a:spcBef>
-                <a:spcPts val="0"/>
-              </a:spcBef>
-              <a:spcAft>
-                <a:spcPts val="900"/>
-              </a:spcAft>
-            </a:pPr>
-            <a:r>
-              <a:rPr sz="1350" b="1" i="0">
-                <a:solidFill>
-                  <a:srgbClr val="A93226"/>
-                </a:solidFill>
-                <a:latin typeface="Calibri"/>
-              </a:rPr>
-              <a:t>▸  </a:t>
-            </a:r>
-            <a:r>
-              <a:rPr sz="1350" b="0" i="0">
-                <a:solidFill>
-                  <a:srgbClr val="4A3A30"/>
-                </a:solidFill>
-                <a:latin typeface="Calibri"/>
-              </a:rPr>
-              <a:t>Firestore security rules + automated rules tests</a:t>
-            </a:r>
-          </a:p>
-          <a:p>
-            <a:pPr algn="l">
-              <a:lnSpc>
-                <a:spcPct val="104000"/>
-              </a:lnSpc>
-              <a:spcBef>
-                <a:spcPts val="0"/>
-              </a:spcBef>
-              <a:spcAft>
-                <a:spcPts val="900"/>
-              </a:spcAft>
-            </a:pPr>
-            <a:r>
-              <a:rPr sz="1350" b="1" i="0">
-                <a:solidFill>
-                  <a:srgbClr val="A93226"/>
-                </a:solidFill>
-                <a:latin typeface="Calibri"/>
-              </a:rPr>
-              <a:t>▸  </a:t>
-            </a:r>
-            <a:r>
-              <a:rPr sz="1350" b="0" i="0">
-                <a:solidFill>
-                  <a:srgbClr val="4A3A30"/>
-                </a:solidFill>
-                <a:latin typeface="Calibri"/>
-              </a:rPr>
-              <a:t>Sensitive ID docs isolated in a private subcollection</a:t>
-            </a:r>
-          </a:p>
-          <a:p>
-            <a:pPr algn="l">
-              <a:lnSpc>
-                <a:spcPct val="104000"/>
-              </a:lnSpc>
-              <a:spcBef>
-                <a:spcPts val="0"/>
-              </a:spcBef>
-              <a:spcAft>
-                <a:spcPts val="900"/>
-              </a:spcAft>
-            </a:pPr>
-            <a:r>
-              <a:rPr sz="1350" b="1" i="0">
-                <a:solidFill>
-                  <a:srgbClr val="A93226"/>
-                </a:solidFill>
-                <a:latin typeface="Calibri"/>
-              </a:rPr>
-              <a:t>▸  </a:t>
-            </a:r>
-            <a:r>
-              <a:rPr sz="1350" b="0" i="0">
-                <a:solidFill>
-                  <a:srgbClr val="4A3A30"/>
-                </a:solidFill>
-                <a:latin typeface="Calibri"/>
-              </a:rPr>
-              <a:t>HMAC-signed WhatsApp webhook (rejects forged calls)</a:t>
-            </a:r>
-          </a:p>
-          <a:p>
-            <a:pPr algn="l">
-              <a:lnSpc>
-                <a:spcPct val="104000"/>
-              </a:lnSpc>
-              <a:spcBef>
-                <a:spcPts val="0"/>
-              </a:spcBef>
-              <a:spcAft>
-                <a:spcPts val="900"/>
-              </a:spcAft>
-            </a:pPr>
-            <a:r>
-              <a:rPr sz="1350" b="1" i="0">
-                <a:solidFill>
-                  <a:srgbClr val="A93226"/>
-                </a:solidFill>
-                <a:latin typeface="Calibri"/>
-              </a:rPr>
-              <a:t>▸  </a:t>
-            </a:r>
-            <a:r>
-              <a:rPr sz="1350" b="0" i="0">
-                <a:solidFill>
-                  <a:srgbClr val="4A3A30"/>
-                </a:solidFill>
-                <a:latin typeface="Calibri"/>
-              </a:rPr>
-              <a:t>POPIA: consent, opt-in, and a documented erasure runbook</a:t>
-            </a:r>
-          </a:p>
-        </p:txBody>
-      </p:sp>
-    </p:spTree>
-  </p:cSld>
-  <p:clrMapOvr>
-    <a:masterClrMapping/>
-  </p:clrMapOvr>
-</p:sld>
+<file path=ppt\tableStyles.xml><?xml version="1.0" encoding="utf-8"?>
+<a:tblStyleLst xmlns:a="http://schemas.openxmlformats.org/drawingml/2006/main" def="{5C22544A-7EE6-4342-B048-85BDC9FD1C3A}"/>
 </file>
 
-<file path=ppt/slides/slide9.xml><?xml version="1.0" encoding="utf-8"?>
-<p:sld xmlns:a="http://schemas.openxmlformats.org/drawingml/2006/main" xmlns:p="http://schemas.openxmlformats.org/presentationml/2006/main" xmlns:r="http://schemas.openxmlformats.org/officeDocument/2006/relationships">
-  <p:cSld>
-    <p:spTree>
-      <p:nvGrpSpPr>
-        <p:cNvPr id="1" name=""/>
-        <p:cNvGrpSpPr/>
-        <p:nvPr/>
-      </p:nvGrpSpPr>
-      <p:grpSpPr/>
-      <p:sp>
-        <p:nvSpPr>
-          <p:cNvPr id="2" name="Rectangle 1"/>
-          <p:cNvSpPr/>
-          <p:nvPr/>
-        </p:nvSpPr>
-        <p:spPr>
-          <a:xfrm>
-            <a:off x="0" y="0"/>
-            <a:ext cx="12191695" cy="6858000"/>
-          </a:xfrm>
-          <a:prstGeom prst="rect">
-            <a:avLst/>
-          </a:prstGeom>
-          <a:solidFill>
-            <a:srgbClr val="FAF4EC"/>
-          </a:solidFill>
-          <a:ln>
-            <a:noFill/>
-          </a:ln>
-          <a:effectLst/>
-        </p:spPr>
-        <p:style>
-          <a:lnRef idx="1">
-            <a:schemeClr val="accent1"/>
-          </a:lnRef>
-          <a:fillRef idx="3">
-            <a:schemeClr val="accent1"/>
-          </a:fillRef>
-          <a:effectRef idx="2">
-            <a:schemeClr val="accent1"/>
-          </a:effectRef>
-          <a:fontRef idx="minor">
-            <a:schemeClr val="lt1"/>
-          </a:fontRef>
-        </p:style>
-        <p:txBody>
-          <a:bodyPr rtlCol="0" anchor="ctr"/>
-          <a:lstStyle/>
-          <a:p>
-            <a:pPr algn="ctr"/>
-          </a:p>
-        </p:txBody>
-      </p:sp>
-      <p:sp>
-        <p:nvSpPr>
-          <p:cNvPr id="3" name="Rectangle 2"/>
-          <p:cNvSpPr/>
-          <p:nvPr/>
-        </p:nvSpPr>
-        <p:spPr>
-          <a:xfrm>
-            <a:off x="548640" y="566928"/>
-            <a:ext cx="457200" cy="82296"/>
-          </a:xfrm>
-          <a:prstGeom prst="rect">
-            <a:avLst/>
-          </a:prstGeom>
-          <a:solidFill>
-            <a:srgbClr val="D97742"/>
-          </a:solidFill>
-          <a:ln>
-            <a:noFill/>
-          </a:ln>
-          <a:effectLst/>
-        </p:spPr>
-        <p:style>
-          <a:lnRef idx="1">
-            <a:schemeClr val="accent1"/>
-          </a:lnRef>
-          <a:fillRef idx="3">
-            <a:schemeClr val="accent1"/>
-          </a:fillRef>
-          <a:effectRef idx="2">
-            <a:schemeClr val="accent1"/>
-          </a:effectRef>
-          <a:fontRef idx="minor">
-            <a:schemeClr val="lt1"/>
-          </a:fontRef>
-        </p:style>
-        <p:txBody>
-          <a:bodyPr rtlCol="0" anchor="ctr"/>
-          <a:lstStyle/>
-          <a:p>
-            <a:pPr algn="ctr"/>
-          </a:p>
-        </p:txBody>
-      </p:sp>
-      <p:sp>
-        <p:nvSpPr>
-          <p:cNvPr id="4" name="TextBox 3"/>
-          <p:cNvSpPr txBox="1"/>
-          <p:nvPr/>
-        </p:nvSpPr>
-        <p:spPr>
-          <a:xfrm>
-            <a:off x="548640" y="713232"/>
-            <a:ext cx="10058400" cy="365760"/>
-          </a:xfrm>
-          <a:prstGeom prst="rect">
-            <a:avLst/>
-          </a:prstGeom>
-          <a:noFill/>
-        </p:spPr>
-        <p:txBody>
-          <a:bodyPr wrap="square" anchor="t">
-            <a:spAutoFit/>
-          </a:bodyPr>
-          <a:lstStyle/>
-          <a:p>
-            <a:pPr algn="l">
-              <a:lnSpc>
-                <a:spcPct val="105000"/>
-              </a:lnSpc>
-              <a:spcBef>
-                <a:spcPts val="0"/>
-              </a:spcBef>
-              <a:spcAft>
-                <a:spcPts val="600"/>
-              </a:spcAft>
-            </a:pPr>
-            <a:r>
-              <a:rPr sz="1500" b="1" i="0">
-                <a:solidFill>
-                  <a:srgbClr val="B45A2C"/>
-                </a:solidFill>
-                <a:latin typeface="Calibri"/>
-              </a:rPr>
-              <a:t>SUSTAINABILITY — PATH TO REVENUE</a:t>
-            </a:r>
-          </a:p>
-        </p:txBody>
-      </p:sp>
-      <p:sp>
-        <p:nvSpPr>
-          <p:cNvPr id="5" name="TextBox 4"/>
-          <p:cNvSpPr txBox="1"/>
-          <p:nvPr/>
-        </p:nvSpPr>
-        <p:spPr>
-          <a:xfrm>
-            <a:off x="548640" y="1024128"/>
-            <a:ext cx="11064240" cy="1097280"/>
-          </a:xfrm>
-          <a:prstGeom prst="rect">
-            <a:avLst/>
-          </a:prstGeom>
-          <a:noFill/>
-        </p:spPr>
-        <p:txBody>
-          <a:bodyPr wrap="square" anchor="t">
-            <a:spAutoFit/>
-          </a:bodyPr>
-          <a:lstStyle/>
-          <a:p>
-            <a:pPr algn="l">
-              <a:lnSpc>
-                <a:spcPct val="100000"/>
-              </a:lnSpc>
-              <a:spcBef>
-                <a:spcPts val="0"/>
-              </a:spcBef>
-              <a:spcAft>
-                <a:spcPts val="600"/>
-              </a:spcAft>
-            </a:pPr>
-            <a:r>
-              <a:rPr sz="3000" b="1" i="0">
-                <a:solidFill>
-                  <a:srgbClr val="1F1612"/>
-                </a:solidFill>
-                <a:latin typeface="Calibri"/>
-              </a:rPr>
-              <a:t>Free to grow, then a clear path to revenue.</a:t>
-            </a:r>
-          </a:p>
-        </p:txBody>
-      </p:sp>
-      <p:sp>
-        <p:nvSpPr>
-          <p:cNvPr id="6" name="Rounded Rectangle 5"/>
-          <p:cNvSpPr/>
-          <p:nvPr/>
-        </p:nvSpPr>
-        <p:spPr>
-          <a:xfrm>
-            <a:off x="548640" y="1828800"/>
-            <a:ext cx="2606040" cy="1737360"/>
-          </a:xfrm>
-          <a:prstGeom prst="roundRect">
-            <a:avLst/>
-          </a:prstGeom>
-          <a:solidFill>
-            <a:srgbClr val="1F1612"/>
-          </a:solidFill>
-          <a:ln>
-            <a:noFill/>
-          </a:ln>
-          <a:effectLst/>
-        </p:spPr>
-        <p:style>
-          <a:lnRef idx="1">
-            <a:schemeClr val="accent1"/>
-          </a:lnRef>
-          <a:fillRef idx="3">
-            <a:schemeClr val="accent1"/>
-          </a:fillRef>
-          <a:effectRef idx="2">
-            <a:schemeClr val="accent1"/>
-          </a:effectRef>
-          <a:fontRef idx="minor">
-            <a:schemeClr val="lt1"/>
-          </a:fontRef>
-        </p:style>
-        <p:txBody>
-          <a:bodyPr rtlCol="0" anchor="ctr"/>
-          <a:lstStyle/>
-          <a:p>
-            <a:pPr algn="ctr"/>
-          </a:p>
-        </p:txBody>
-      </p:sp>
-      <p:sp>
-        <p:nvSpPr>
-          <p:cNvPr id="7" name="TextBox 6"/>
-          <p:cNvSpPr txBox="1"/>
-          <p:nvPr/>
-        </p:nvSpPr>
-        <p:spPr>
-          <a:xfrm>
-            <a:off x="548640" y="1965960"/>
-            <a:ext cx="2606040" cy="1554480"/>
-          </a:xfrm>
-          <a:prstGeom prst="rect">
-            <a:avLst/>
-          </a:prstGeom>
-          <a:noFill/>
-        </p:spPr>
-        <p:txBody>
-          <a:bodyPr wrap="square" anchor="t">
-            <a:spAutoFit/>
-          </a:bodyPr>
-          <a:lstStyle/>
-          <a:p>
-            <a:pPr algn="ctr">
-              <a:lnSpc>
-                <a:spcPct val="100000"/>
-              </a:lnSpc>
-              <a:spcBef>
-                <a:spcPts val="0"/>
-              </a:spcBef>
-              <a:spcAft>
-                <a:spcPts val="300"/>
-              </a:spcAft>
-            </a:pPr>
-            <a:r>
-              <a:rPr sz="3400" b="1" i="0">
-                <a:solidFill>
-                  <a:srgbClr val="D97742"/>
-                </a:solidFill>
-                <a:latin typeface="Calibri"/>
-              </a:rPr>
-              <a:t>8%</a:t>
-            </a:r>
-          </a:p>
-          <a:p>
-            <a:pPr algn="ctr">
-              <a:lnSpc>
-                <a:spcPct val="100000"/>
-              </a:lnSpc>
-              <a:spcBef>
-                <a:spcPts val="0"/>
-              </a:spcBef>
-              <a:spcAft>
-                <a:spcPts val="300"/>
-              </a:spcAft>
-            </a:pPr>
-            <a:r>
-              <a:rPr sz="1500" b="1" i="0">
-                <a:solidFill>
-                  <a:srgbClr val="FAF4EC"/>
-                </a:solidFill>
-                <a:latin typeface="Calibri"/>
-              </a:rPr>
-              <a:t>service fee</a:t>
-            </a:r>
-          </a:p>
-          <a:p>
-            <a:pPr algn="ctr">
-              <a:lnSpc>
-                <a:spcPct val="100000"/>
-              </a:lnSpc>
-              <a:spcBef>
-                <a:spcPts val="0"/>
-              </a:spcBef>
-              <a:spcAft>
-                <a:spcPts val="300"/>
-              </a:spcAft>
-            </a:pPr>
-            <a:r>
-              <a:rPr sz="1200" b="0" i="0">
-                <a:solidFill>
-                  <a:srgbClr val="F5DBB5"/>
-                </a:solidFill>
-                <a:latin typeface="Calibri"/>
-              </a:rPr>
-              <a:t>paid by the job poster</a:t>
-            </a:r>
-          </a:p>
-        </p:txBody>
-      </p:sp>
-      <p:sp>
-        <p:nvSpPr>
-          <p:cNvPr id="8" name="Rounded Rectangle 7"/>
-          <p:cNvSpPr/>
-          <p:nvPr/>
-        </p:nvSpPr>
-        <p:spPr>
-          <a:xfrm>
-            <a:off x="3364992" y="1828800"/>
-            <a:ext cx="2606040" cy="1737360"/>
-          </a:xfrm>
-          <a:prstGeom prst="roundRect">
-            <a:avLst/>
-          </a:prstGeom>
-          <a:solidFill>
-            <a:srgbClr val="1F1612"/>
-          </a:solidFill>
-          <a:ln>
-            <a:noFill/>
-          </a:ln>
-          <a:effectLst/>
-        </p:spPr>
-        <p:style>
-          <a:lnRef idx="1">
-            <a:schemeClr val="accent1"/>
-          </a:lnRef>
-          <a:fillRef idx="3">
-            <a:schemeClr val="accent1"/>
-          </a:fillRef>
-          <a:effectRef idx="2">
-            <a:schemeClr val="accent1"/>
-          </a:effectRef>
-          <a:fontRef idx="minor">
-            <a:schemeClr val="lt1"/>
-          </a:fontRef>
-        </p:style>
-        <p:txBody>
-          <a:bodyPr rtlCol="0" anchor="ctr"/>
-          <a:lstStyle/>
-          <a:p>
-            <a:pPr algn="ctr"/>
-          </a:p>
-        </p:txBody>
-      </p:sp>
-      <p:sp>
-        <p:nvSpPr>
-          <p:cNvPr id="9" name="TextBox 8"/>
-          <p:cNvSpPr txBox="1"/>
-          <p:nvPr/>
-        </p:nvSpPr>
-        <p:spPr>
-          <a:xfrm>
-            <a:off x="3364992" y="1965960"/>
-            <a:ext cx="2606040" cy="1554480"/>
-          </a:xfrm>
-          <a:prstGeom prst="rect">
-            <a:avLst/>
-          </a:prstGeom>
-          <a:noFill/>
-        </p:spPr>
-        <p:txBody>
-          <a:bodyPr wrap="square" anchor="t">
-            <a:spAutoFit/>
-          </a:bodyPr>
-          <a:lstStyle/>
-          <a:p>
-            <a:pPr algn="ctr">
-              <a:lnSpc>
-                <a:spcPct val="100000"/>
-              </a:lnSpc>
-              <a:spcBef>
-                <a:spcPts val="0"/>
-              </a:spcBef>
-              <a:spcAft>
-                <a:spcPts val="300"/>
-              </a:spcAft>
-            </a:pPr>
-            <a:r>
-              <a:rPr sz="3400" b="1" i="0">
-                <a:solidFill>
-                  <a:srgbClr val="D97742"/>
-                </a:solidFill>
-                <a:latin typeface="Calibri"/>
-              </a:rPr>
-              <a:t>R49</a:t>
-            </a:r>
-          </a:p>
-          <a:p>
-            <a:pPr algn="ctr">
-              <a:lnSpc>
-                <a:spcPct val="100000"/>
-              </a:lnSpc>
-              <a:spcBef>
-                <a:spcPts val="0"/>
-              </a:spcBef>
-              <a:spcAft>
-                <a:spcPts val="300"/>
-              </a:spcAft>
-            </a:pPr>
-            <a:r>
-              <a:rPr sz="1500" b="1" i="0">
-                <a:solidFill>
-                  <a:srgbClr val="FAF4EC"/>
-                </a:solidFill>
-                <a:latin typeface="Calibri"/>
-              </a:rPr>
-              <a:t>Gold badge</a:t>
-            </a:r>
-          </a:p>
-          <a:p>
-            <a:pPr algn="ctr">
-              <a:lnSpc>
-                <a:spcPct val="100000"/>
-              </a:lnSpc>
-              <a:spcBef>
-                <a:spcPts val="0"/>
-              </a:spcBef>
-              <a:spcAft>
-                <a:spcPts val="300"/>
-              </a:spcAft>
-            </a:pPr>
-            <a:r>
-              <a:rPr sz="1200" b="0" i="0">
-                <a:solidFill>
-                  <a:srgbClr val="F5DBB5"/>
-                </a:solidFill>
-                <a:latin typeface="Calibri"/>
-              </a:rPr>
-              <a:t>premium verification</a:t>
-            </a:r>
-          </a:p>
-        </p:txBody>
-      </p:sp>
-      <p:sp>
-        <p:nvSpPr>
-          <p:cNvPr id="10" name="Rounded Rectangle 9"/>
-          <p:cNvSpPr/>
-          <p:nvPr/>
-        </p:nvSpPr>
-        <p:spPr>
-          <a:xfrm>
-            <a:off x="6181344" y="1828800"/>
-            <a:ext cx="2606040" cy="1737360"/>
-          </a:xfrm>
-          <a:prstGeom prst="roundRect">
-            <a:avLst/>
-          </a:prstGeom>
-          <a:solidFill>
-            <a:srgbClr val="1F1612"/>
-          </a:solidFill>
-          <a:ln>
-            <a:noFill/>
-          </a:ln>
-          <a:effectLst/>
-        </p:spPr>
-        <p:style>
-          <a:lnRef idx="1">
-            <a:schemeClr val="accent1"/>
-          </a:lnRef>
-          <a:fillRef idx="3">
-            <a:schemeClr val="accent1"/>
-          </a:fillRef>
-          <a:effectRef idx="2">
-            <a:schemeClr val="accent1"/>
-          </a:effectRef>
-          <a:fontRef idx="minor">
-            <a:schemeClr val="lt1"/>
-          </a:fontRef>
-        </p:style>
-        <p:txBody>
-          <a:bodyPr rtlCol="0" anchor="ctr"/>
-          <a:lstStyle/>
-          <a:p>
-            <a:pPr algn="ctr"/>
-          </a:p>
-        </p:txBody>
-      </p:sp>
-      <p:sp>
-        <p:nvSpPr>
-          <p:cNvPr id="11" name="TextBox 10"/>
-          <p:cNvSpPr txBox="1"/>
-          <p:nvPr/>
-        </p:nvSpPr>
-        <p:spPr>
-          <a:xfrm>
-            <a:off x="6181344" y="1965960"/>
-            <a:ext cx="2606040" cy="1554480"/>
-          </a:xfrm>
-          <a:prstGeom prst="rect">
-            <a:avLst/>
-          </a:prstGeom>
-          <a:noFill/>
-        </p:spPr>
-        <p:txBody>
-          <a:bodyPr wrap="square" anchor="t">
-            <a:spAutoFit/>
-          </a:bodyPr>
-          <a:lstStyle/>
-          <a:p>
-            <a:pPr algn="ctr">
-              <a:lnSpc>
-                <a:spcPct val="100000"/>
-              </a:lnSpc>
-              <a:spcBef>
-                <a:spcPts val="0"/>
-              </a:spcBef>
-              <a:spcAft>
-                <a:spcPts val="300"/>
-              </a:spcAft>
-            </a:pPr>
-            <a:r>
-              <a:rPr sz="3400" b="1" i="0">
-                <a:solidFill>
-                  <a:srgbClr val="D97742"/>
-                </a:solidFill>
-                <a:latin typeface="Calibri"/>
-              </a:rPr>
-              <a:t>R20</a:t>
-            </a:r>
-          </a:p>
-          <a:p>
-            <a:pPr algn="ctr">
-              <a:lnSpc>
-                <a:spcPct val="100000"/>
-              </a:lnSpc>
-              <a:spcBef>
-                <a:spcPts val="0"/>
-              </a:spcBef>
-              <a:spcAft>
-                <a:spcPts val="300"/>
-              </a:spcAft>
-            </a:pPr>
-            <a:r>
-              <a:rPr sz="1500" b="1" i="0">
-                <a:solidFill>
-                  <a:srgbClr val="FAF4EC"/>
-                </a:solidFill>
-                <a:latin typeface="Calibri"/>
-              </a:rPr>
-              <a:t>boosted post</a:t>
-            </a:r>
-          </a:p>
-          <a:p>
-            <a:pPr algn="ctr">
-              <a:lnSpc>
-                <a:spcPct val="100000"/>
-              </a:lnSpc>
-              <a:spcBef>
-                <a:spcPts val="0"/>
-              </a:spcBef>
-              <a:spcAft>
-                <a:spcPts val="300"/>
-              </a:spcAft>
-            </a:pPr>
-            <a:r>
-              <a:rPr sz="1200" b="0" i="0">
-                <a:solidFill>
-                  <a:srgbClr val="F5DBB5"/>
-                </a:solidFill>
-                <a:latin typeface="Calibri"/>
-              </a:rPr>
-              <a:t>more visibility</a:t>
-            </a:r>
-          </a:p>
-        </p:txBody>
-      </p:sp>
-      <p:sp>
-        <p:nvSpPr>
-          <p:cNvPr id="12" name="Rounded Rectangle 11"/>
-          <p:cNvSpPr/>
-          <p:nvPr/>
-        </p:nvSpPr>
-        <p:spPr>
-          <a:xfrm>
-            <a:off x="8997696" y="1828800"/>
-            <a:ext cx="2606040" cy="1737360"/>
-          </a:xfrm>
-          <a:prstGeom prst="roundRect">
-            <a:avLst/>
-          </a:prstGeom>
-          <a:solidFill>
-            <a:srgbClr val="1F1612"/>
-          </a:solidFill>
-          <a:ln>
-            <a:noFill/>
-          </a:ln>
-          <a:effectLst/>
-        </p:spPr>
-        <p:style>
-          <a:lnRef idx="1">
-            <a:schemeClr val="accent1"/>
-          </a:lnRef>
-          <a:fillRef idx="3">
-            <a:schemeClr val="accent1"/>
-          </a:fillRef>
-          <a:effectRef idx="2">
-            <a:schemeClr val="accent1"/>
-          </a:effectRef>
-          <a:fontRef idx="minor">
-            <a:schemeClr val="lt1"/>
-          </a:fontRef>
-        </p:style>
-        <p:txBody>
-          <a:bodyPr rtlCol="0" anchor="ctr"/>
-          <a:lstStyle/>
-          <a:p>
-            <a:pPr algn="ctr"/>
-          </a:p>
-        </p:txBody>
-      </p:sp>
-      <p:sp>
-        <p:nvSpPr>
-          <p:cNvPr id="13" name="TextBox 12"/>
-          <p:cNvSpPr txBox="1"/>
-          <p:nvPr/>
-        </p:nvSpPr>
-        <p:spPr>
-          <a:xfrm>
-            <a:off x="8997696" y="1965960"/>
-            <a:ext cx="2606040" cy="1554480"/>
-          </a:xfrm>
-          <a:prstGeom prst="rect">
-            <a:avLst/>
-          </a:prstGeom>
-          <a:noFill/>
-        </p:spPr>
-        <p:txBody>
-          <a:bodyPr wrap="square" anchor="t">
-            <a:spAutoFit/>
-          </a:bodyPr>
-          <a:lstStyle/>
-          <a:p>
-            <a:pPr algn="ctr">
-              <a:lnSpc>
-                <a:spcPct val="100000"/>
-              </a:lnSpc>
-              <a:spcBef>
-                <a:spcPts val="0"/>
-              </a:spcBef>
-              <a:spcAft>
-                <a:spcPts val="300"/>
-              </a:spcAft>
-            </a:pPr>
-            <a:r>
-              <a:rPr sz="3400" b="1" i="0">
-                <a:solidFill>
-                  <a:srgbClr val="D97742"/>
-                </a:solidFill>
-                <a:latin typeface="Calibri"/>
-              </a:rPr>
-              <a:t>R199</a:t>
-            </a:r>
-          </a:p>
-          <a:p>
-            <a:pPr algn="ctr">
-              <a:lnSpc>
-                <a:spcPct val="100000"/>
-              </a:lnSpc>
-              <a:spcBef>
-                <a:spcPts val="0"/>
-              </a:spcBef>
-              <a:spcAft>
-                <a:spcPts val="300"/>
-              </a:spcAft>
-            </a:pPr>
-            <a:r>
-              <a:rPr sz="1500" b="1" i="0">
-                <a:solidFill>
-                  <a:srgbClr val="FAF4EC"/>
-                </a:solidFill>
-                <a:latin typeface="Calibri"/>
-              </a:rPr>
-              <a:t>/ month</a:t>
-            </a:r>
-          </a:p>
-          <a:p>
-            <a:pPr algn="ctr">
-              <a:lnSpc>
-                <a:spcPct val="100000"/>
-              </a:lnSpc>
-              <a:spcBef>
-                <a:spcPts val="0"/>
-              </a:spcBef>
-              <a:spcAft>
-                <a:spcPts val="300"/>
-              </a:spcAft>
-            </a:pPr>
-            <a:r>
-              <a:rPr sz="1200" b="0" i="0">
-                <a:solidFill>
-                  <a:srgbClr val="F5DBB5"/>
-                </a:solidFill>
-                <a:latin typeface="Calibri"/>
-              </a:rPr>
-              <a:t>business plan</a:t>
-            </a:r>
-          </a:p>
-        </p:txBody>
-      </p:sp>
-      <p:sp>
-        <p:nvSpPr>
-          <p:cNvPr id="14" name="TextBox 13"/>
-          <p:cNvSpPr txBox="1"/>
-          <p:nvPr/>
-        </p:nvSpPr>
-        <p:spPr>
-          <a:xfrm>
-            <a:off x="548640" y="3931920"/>
-            <a:ext cx="10972800" cy="4572000"/>
-          </a:xfrm>
-          <a:prstGeom prst="rect">
-            <a:avLst/>
-          </a:prstGeom>
-          <a:noFill/>
-        </p:spPr>
-        <p:txBody>
-          <a:bodyPr wrap="square" anchor="t">
-            <a:spAutoFit/>
-          </a:bodyPr>
-          <a:lstStyle/>
-          <a:p>
-            <a:pPr algn="l">
-              <a:lnSpc>
-                <a:spcPct val="104000"/>
-              </a:lnSpc>
-              <a:spcBef>
-                <a:spcPts val="0"/>
-              </a:spcBef>
-              <a:spcAft>
-                <a:spcPts val="1100"/>
-              </a:spcAft>
-            </a:pPr>
-            <a:r>
-              <a:rPr sz="1500" b="1" i="0">
-                <a:solidFill>
-                  <a:srgbClr val="D97742"/>
-                </a:solidFill>
-                <a:latin typeface="Calibri"/>
-              </a:rPr>
-              <a:t>▸  </a:t>
-            </a:r>
-            <a:r>
-              <a:rPr sz="1500" b="1" i="0">
-                <a:solidFill>
-                  <a:srgbClr val="1F1612"/>
-                </a:solidFill>
-                <a:latin typeface="Calibri"/>
-              </a:rPr>
-              <a:t>Launch is free  </a:t>
-            </a:r>
-            <a:r>
-              <a:rPr sz="1500" b="0" i="0">
-                <a:solidFill>
-                  <a:srgbClr val="4A3A30"/>
-                </a:solidFill>
-                <a:latin typeface="Calibri"/>
-              </a:rPr>
-              <a:t>— the priority is marketplace liquidity (workers + jobs) first.</a:t>
-            </a:r>
-          </a:p>
-          <a:p>
-            <a:pPr algn="l">
-              <a:lnSpc>
-                <a:spcPct val="104000"/>
-              </a:lnSpc>
-              <a:spcBef>
-                <a:spcPts val="0"/>
-              </a:spcBef>
-              <a:spcAft>
-                <a:spcPts val="1100"/>
-              </a:spcAft>
-            </a:pPr>
-            <a:r>
-              <a:rPr sz="1500" b="1" i="0">
-                <a:solidFill>
-                  <a:srgbClr val="D97742"/>
-                </a:solidFill>
-                <a:latin typeface="Calibri"/>
-              </a:rPr>
-              <a:t>▸  </a:t>
-            </a:r>
-            <a:r>
-              <a:rPr sz="1500" b="1" i="0">
-                <a:solidFill>
-                  <a:srgbClr val="1F1612"/>
-                </a:solidFill>
-                <a:latin typeface="Calibri"/>
-              </a:rPr>
-              <a:t>Running cost ≈ R14,100 / month  </a:t>
-            </a:r>
-            <a:r>
-              <a:rPr sz="1500" b="0" i="0">
-                <a:solidFill>
-                  <a:srgbClr val="4A3A30"/>
-                </a:solidFill>
-                <a:latin typeface="Calibri"/>
-              </a:rPr>
-              <a:t>· break-even ≈ 500 completed jobs / month.</a:t>
-            </a:r>
-          </a:p>
-          <a:p>
-            <a:pPr algn="l">
-              <a:lnSpc>
-                <a:spcPct val="104000"/>
-              </a:lnSpc>
-              <a:spcBef>
-                <a:spcPts val="0"/>
-              </a:spcBef>
-              <a:spcAft>
-                <a:spcPts val="1100"/>
-              </a:spcAft>
-            </a:pPr>
-            <a:r>
-              <a:rPr sz="1500" b="1" i="0">
-                <a:solidFill>
-                  <a:srgbClr val="D97742"/>
-                </a:solidFill>
-                <a:latin typeface="Calibri"/>
-              </a:rPr>
-              <a:t>▸  </a:t>
-            </a:r>
-            <a:r>
-              <a:rPr sz="1500" b="1" i="0">
-                <a:solidFill>
-                  <a:srgbClr val="1F1612"/>
-                </a:solidFill>
-                <a:latin typeface="Calibri"/>
-              </a:rPr>
-              <a:t>The moat is data.  </a:t>
-            </a:r>
-            <a:r>
-              <a:rPr sz="1500" b="0" i="0">
-                <a:solidFill>
-                  <a:srgbClr val="4A3A30"/>
-                </a:solidFill>
-                <a:latin typeface="Calibri"/>
-              </a:rPr>
-              <a:t>We own POPIA-compliant verified-worker and work-record data no feed can replicate.</a:t>
-            </a:r>
-          </a:p>
-        </p:txBody>
-      </p:sp>
-    </p:spTree>
-  </p:cSld>
-  <p:clrMapOvr>
-    <a:masterClrMapping/>
-  </p:clrMapOvr>
-</p:sld>
-</file>
-
-<file path=ppt/theme/theme1.xml><?xml version="1.0" encoding="utf-8"?>
+<file path=ppt\theme\theme1.xml><?xml version="1.0" encoding="utf-8"?>
 <a:theme xmlns:a="http://schemas.openxmlformats.org/drawingml/2006/main" name="Office Theme">
   <a:themeElements>
     <a:clrScheme name="Office">
@@ -11828,7 +15006,7 @@
 </a:theme>
 </file>
 
-<file path=ppt/theme/theme2.xml><?xml version="1.0" encoding="utf-8"?>
+<file path=ppt\theme\theme2.xml><?xml version="1.0" encoding="utf-8"?>
 <a:theme xmlns:a="http://schemas.openxmlformats.org/drawingml/2006/main" name="Office Theme">
   <a:themeElements>
     <a:clrScheme name="Office">
@@ -12146,4 +15324,38 @@
   </a:objectDefaults>
   <a:extraClrSchemeLst/>
 </a:theme>
+</file>
+
+<file path=ppt\viewProps.xml><?xml version="1.0" encoding="utf-8"?>
+<p:viewPr xmlns:a="http://schemas.openxmlformats.org/drawingml/2006/main" xmlns:r="http://schemas.openxmlformats.org/officeDocument/2006/relationships" xmlns:p="http://schemas.openxmlformats.org/presentationml/2006/main" lastView="sldThumbnailView">
+  <p:normalViewPr>
+    <p:restoredLeft sz="15620"/>
+    <p:restoredTop sz="94660"/>
+  </p:normalViewPr>
+  <p:slideViewPr>
+    <p:cSldViewPr snapToGrid="0" snapToObjects="1">
+      <p:cViewPr varScale="1">
+        <p:scale>
+          <a:sx n="124" d="100"/>
+          <a:sy n="124" d="100"/>
+        </p:scale>
+        <p:origin x="-1512" y="-112"/>
+      </p:cViewPr>
+      <p:guideLst>
+        <p:guide orient="horz" pos="2160"/>
+        <p:guide pos="2880"/>
+      </p:guideLst>
+    </p:cSldViewPr>
+  </p:slideViewPr>
+  <p:notesTextViewPr>
+    <p:cViewPr>
+      <p:scale>
+        <a:sx n="100" d="100"/>
+        <a:sy n="100" d="100"/>
+      </p:scale>
+      <p:origin x="0" y="0"/>
+    </p:cViewPr>
+  </p:notesTextViewPr>
+  <p:gridSpacing cx="76200" cy="76200"/>
+</p:viewPr>
 </file>